--- a/reports/Fraud_Detection_Business_Deck.pptx
+++ b/reports/Fraud_Detection_Business_Deck.pptx
@@ -4,21 +4,22 @@
   <p:sldMasterIdLst>
     <p:sldMasterId id="2147483648" r:id="rId1"/>
   </p:sldMasterIdLst>
+  <p:notesMasterIdLst>
+    <p:notesMasterId r:id="rId12"/>
+  </p:notesMasterIdLst>
   <p:sldIdLst>
-    <p:sldId id="256" r:id="rId7"/>
-    <p:sldId id="257" r:id="rId8"/>
-    <p:sldId id="258" r:id="rId9"/>
-    <p:sldId id="259" r:id="rId10"/>
-    <p:sldId id="260" r:id="rId11"/>
-    <p:sldId id="261" r:id="rId12"/>
-    <p:sldId id="262" r:id="rId13"/>
-    <p:sldId id="263" r:id="rId14"/>
-    <p:sldId id="264" r:id="rId15"/>
-    <p:sldId id="265" r:id="rId16"/>
-    <p:sldId id="266" r:id="rId17"/>
-    <p:sldId id="267" r:id="rId18"/>
+    <p:sldId id="256" r:id="rId2"/>
+    <p:sldId id="257" r:id="rId3"/>
+    <p:sldId id="258" r:id="rId4"/>
+    <p:sldId id="259" r:id="rId5"/>
+    <p:sldId id="260" r:id="rId6"/>
+    <p:sldId id="262" r:id="rId7"/>
+    <p:sldId id="263" r:id="rId8"/>
+    <p:sldId id="264" r:id="rId9"/>
+    <p:sldId id="265" r:id="rId10"/>
+    <p:sldId id="266" r:id="rId11"/>
   </p:sldIdLst>
-  <p:sldSz cx="12191695" cy="6858000" type="screen4x3"/>
+  <p:sldSz cx="12192000" cy="6858000"/>
   <p:notesSz cx="6858000" cy="9144000"/>
   <p:defaultTextStyle>
     <a:defPPr>
@@ -115,7 +116,540 @@
       </a:defRPr>
     </a:lvl9pPr>
   </p:defaultTextStyle>
+  <p:extLst>
+    <p:ext uri="{EFAFB233-063F-42B5-8137-9DF3F51BA10A}">
+      <p15:sldGuideLst xmlns:p15="http://schemas.microsoft.com/office/powerpoint/2012/main">
+        <p15:guide id="1" orient="horz" pos="2160">
+          <p15:clr>
+            <a:srgbClr val="A4A3A4"/>
+          </p15:clr>
+        </p15:guide>
+        <p15:guide id="2" pos="2880">
+          <p15:clr>
+            <a:srgbClr val="A4A3A4"/>
+          </p15:clr>
+        </p15:guide>
+      </p15:sldGuideLst>
+    </p:ext>
+  </p:extLst>
 </p:presentation>
+</file>
+
+<file path=ppt/notesMasters/notesMaster1.xml><?xml version="1.0" encoding="utf-8"?>
+<p:notesMaster xmlns:a="http://schemas.openxmlformats.org/drawingml/2006/main" xmlns:r="http://schemas.openxmlformats.org/officeDocument/2006/relationships" xmlns:p="http://schemas.openxmlformats.org/presentationml/2006/main">
+  <p:cSld>
+    <p:bg>
+      <p:bgRef idx="1001">
+        <a:schemeClr val="bg1"/>
+      </p:bgRef>
+    </p:bg>
+    <p:spTree>
+      <p:nvGrpSpPr>
+        <p:cNvPr id="1" name=""/>
+        <p:cNvGrpSpPr/>
+        <p:nvPr/>
+      </p:nvGrpSpPr>
+      <p:grpSpPr>
+        <a:xfrm>
+          <a:off x="0" y="0"/>
+          <a:ext cx="0" cy="0"/>
+          <a:chOff x="0" y="0"/>
+          <a:chExt cx="0" cy="0"/>
+        </a:xfrm>
+      </p:grpSpPr>
+      <p:sp>
+        <p:nvSpPr>
+          <p:cNvPr id="2" name="Header Placeholder 1"/>
+          <p:cNvSpPr>
+            <a:spLocks noGrp="1"/>
+          </p:cNvSpPr>
+          <p:nvPr>
+            <p:ph type="hdr" sz="quarter"/>
+          </p:nvPr>
+        </p:nvSpPr>
+        <p:spPr>
+          <a:xfrm>
+            <a:off x="0" y="0"/>
+            <a:ext cx="2971800" cy="458788"/>
+          </a:xfrm>
+          <a:prstGeom prst="rect">
+            <a:avLst/>
+          </a:prstGeom>
+        </p:spPr>
+        <p:txBody>
+          <a:bodyPr vert="horz" lIns="91440" tIns="45720" rIns="91440" bIns="45720" rtlCol="0"/>
+          <a:lstStyle>
+            <a:lvl1pPr algn="l">
+              <a:defRPr sz="1200"/>
+            </a:lvl1pPr>
+          </a:lstStyle>
+          <a:p>
+            <a:endParaRPr lang="en-US"/>
+          </a:p>
+        </p:txBody>
+      </p:sp>
+      <p:sp>
+        <p:nvSpPr>
+          <p:cNvPr id="3" name="Date Placeholder 2"/>
+          <p:cNvSpPr>
+            <a:spLocks noGrp="1"/>
+          </p:cNvSpPr>
+          <p:nvPr>
+            <p:ph type="dt" idx="1"/>
+          </p:nvPr>
+        </p:nvSpPr>
+        <p:spPr>
+          <a:xfrm>
+            <a:off x="3884613" y="0"/>
+            <a:ext cx="2971800" cy="458788"/>
+          </a:xfrm>
+          <a:prstGeom prst="rect">
+            <a:avLst/>
+          </a:prstGeom>
+        </p:spPr>
+        <p:txBody>
+          <a:bodyPr vert="horz" lIns="91440" tIns="45720" rIns="91440" bIns="45720" rtlCol="0"/>
+          <a:lstStyle>
+            <a:lvl1pPr algn="r">
+              <a:defRPr sz="1200"/>
+            </a:lvl1pPr>
+          </a:lstStyle>
+          <a:p>
+            <a:fld id="{70BAB962-C210-EA44-9889-CE0484881036}" type="datetimeFigureOut">
+              <a:rPr lang="en-US" smtClean="0"/>
+              <a:t>4/13/26</a:t>
+            </a:fld>
+            <a:endParaRPr lang="en-US"/>
+          </a:p>
+        </p:txBody>
+      </p:sp>
+      <p:sp>
+        <p:nvSpPr>
+          <p:cNvPr id="4" name="Slide Image Placeholder 3"/>
+          <p:cNvSpPr>
+            <a:spLocks noGrp="1" noRot="1" noChangeAspect="1"/>
+          </p:cNvSpPr>
+          <p:nvPr>
+            <p:ph type="sldImg" idx="2"/>
+          </p:nvPr>
+        </p:nvSpPr>
+        <p:spPr>
+          <a:xfrm>
+            <a:off x="685800" y="1143000"/>
+            <a:ext cx="5486400" cy="3086100"/>
+          </a:xfrm>
+          <a:prstGeom prst="rect">
+            <a:avLst/>
+          </a:prstGeom>
+          <a:noFill/>
+          <a:ln w="12700">
+            <a:solidFill>
+              <a:prstClr val="black"/>
+            </a:solidFill>
+          </a:ln>
+        </p:spPr>
+        <p:txBody>
+          <a:bodyPr vert="horz" lIns="91440" tIns="45720" rIns="91440" bIns="45720" rtlCol="0" anchor="ctr"/>
+          <a:lstStyle/>
+          <a:p>
+            <a:endParaRPr lang="en-US"/>
+          </a:p>
+        </p:txBody>
+      </p:sp>
+      <p:sp>
+        <p:nvSpPr>
+          <p:cNvPr id="5" name="Notes Placeholder 4"/>
+          <p:cNvSpPr>
+            <a:spLocks noGrp="1"/>
+          </p:cNvSpPr>
+          <p:nvPr>
+            <p:ph type="body" sz="quarter" idx="3"/>
+          </p:nvPr>
+        </p:nvSpPr>
+        <p:spPr>
+          <a:xfrm>
+            <a:off x="685800" y="4400550"/>
+            <a:ext cx="5486400" cy="3600450"/>
+          </a:xfrm>
+          <a:prstGeom prst="rect">
+            <a:avLst/>
+          </a:prstGeom>
+        </p:spPr>
+        <p:txBody>
+          <a:bodyPr vert="horz" lIns="91440" tIns="45720" rIns="91440" bIns="45720" rtlCol="0"/>
+          <a:lstStyle/>
+          <a:p>
+            <a:pPr lvl="0"/>
+            <a:r>
+              <a:rPr lang="en-US"/>
+              <a:t>Click to edit Master text styles</a:t>
+            </a:r>
+          </a:p>
+          <a:p>
+            <a:pPr lvl="1"/>
+            <a:r>
+              <a:rPr lang="en-US"/>
+              <a:t>Second level</a:t>
+            </a:r>
+          </a:p>
+          <a:p>
+            <a:pPr lvl="2"/>
+            <a:r>
+              <a:rPr lang="en-US"/>
+              <a:t>Third level</a:t>
+            </a:r>
+          </a:p>
+          <a:p>
+            <a:pPr lvl="3"/>
+            <a:r>
+              <a:rPr lang="en-US"/>
+              <a:t>Fourth level</a:t>
+            </a:r>
+          </a:p>
+          <a:p>
+            <a:pPr lvl="4"/>
+            <a:r>
+              <a:rPr lang="en-US"/>
+              <a:t>Fifth level</a:t>
+            </a:r>
+          </a:p>
+        </p:txBody>
+      </p:sp>
+      <p:sp>
+        <p:nvSpPr>
+          <p:cNvPr id="6" name="Footer Placeholder 5"/>
+          <p:cNvSpPr>
+            <a:spLocks noGrp="1"/>
+          </p:cNvSpPr>
+          <p:nvPr>
+            <p:ph type="ftr" sz="quarter" idx="4"/>
+          </p:nvPr>
+        </p:nvSpPr>
+        <p:spPr>
+          <a:xfrm>
+            <a:off x="0" y="8685213"/>
+            <a:ext cx="2971800" cy="458787"/>
+          </a:xfrm>
+          <a:prstGeom prst="rect">
+            <a:avLst/>
+          </a:prstGeom>
+        </p:spPr>
+        <p:txBody>
+          <a:bodyPr vert="horz" lIns="91440" tIns="45720" rIns="91440" bIns="45720" rtlCol="0" anchor="b"/>
+          <a:lstStyle>
+            <a:lvl1pPr algn="l">
+              <a:defRPr sz="1200"/>
+            </a:lvl1pPr>
+          </a:lstStyle>
+          <a:p>
+            <a:endParaRPr lang="en-US"/>
+          </a:p>
+        </p:txBody>
+      </p:sp>
+      <p:sp>
+        <p:nvSpPr>
+          <p:cNvPr id="7" name="Slide Number Placeholder 6"/>
+          <p:cNvSpPr>
+            <a:spLocks noGrp="1"/>
+          </p:cNvSpPr>
+          <p:nvPr>
+            <p:ph type="sldNum" sz="quarter" idx="5"/>
+          </p:nvPr>
+        </p:nvSpPr>
+        <p:spPr>
+          <a:xfrm>
+            <a:off x="3884613" y="8685213"/>
+            <a:ext cx="2971800" cy="458787"/>
+          </a:xfrm>
+          <a:prstGeom prst="rect">
+            <a:avLst/>
+          </a:prstGeom>
+        </p:spPr>
+        <p:txBody>
+          <a:bodyPr vert="horz" lIns="91440" tIns="45720" rIns="91440" bIns="45720" rtlCol="0" anchor="b"/>
+          <a:lstStyle>
+            <a:lvl1pPr algn="r">
+              <a:defRPr sz="1200"/>
+            </a:lvl1pPr>
+          </a:lstStyle>
+          <a:p>
+            <a:fld id="{D7BE232A-BFA8-7D46-88A5-16F7A00800B4}" type="slidenum">
+              <a:rPr lang="en-US" smtClean="0"/>
+              <a:t>‹#›</a:t>
+            </a:fld>
+            <a:endParaRPr lang="en-US"/>
+          </a:p>
+        </p:txBody>
+      </p:sp>
+    </p:spTree>
+    <p:extLst>
+      <p:ext uri="{BB962C8B-B14F-4D97-AF65-F5344CB8AC3E}">
+        <p14:creationId xmlns:p14="http://schemas.microsoft.com/office/powerpoint/2010/main" val="968491741"/>
+      </p:ext>
+    </p:extLst>
+  </p:cSld>
+  <p:clrMap bg1="lt1" tx1="dk1" bg2="lt2" tx2="dk2" accent1="accent1" accent2="accent2" accent3="accent3" accent4="accent4" accent5="accent5" accent6="accent6" hlink="hlink" folHlink="folHlink"/>
+  <p:notesStyle>
+    <a:lvl1pPr marL="0" algn="l" defTabSz="914400" rtl="0" eaLnBrk="1" latinLnBrk="0" hangingPunct="1">
+      <a:defRPr sz="1200" kern="1200">
+        <a:solidFill>
+          <a:schemeClr val="tx1"/>
+        </a:solidFill>
+        <a:latin typeface="+mn-lt"/>
+        <a:ea typeface="+mn-ea"/>
+        <a:cs typeface="+mn-cs"/>
+      </a:defRPr>
+    </a:lvl1pPr>
+    <a:lvl2pPr marL="457200" algn="l" defTabSz="914400" rtl="0" eaLnBrk="1" latinLnBrk="0" hangingPunct="1">
+      <a:defRPr sz="1200" kern="1200">
+        <a:solidFill>
+          <a:schemeClr val="tx1"/>
+        </a:solidFill>
+        <a:latin typeface="+mn-lt"/>
+        <a:ea typeface="+mn-ea"/>
+        <a:cs typeface="+mn-cs"/>
+      </a:defRPr>
+    </a:lvl2pPr>
+    <a:lvl3pPr marL="914400" algn="l" defTabSz="914400" rtl="0" eaLnBrk="1" latinLnBrk="0" hangingPunct="1">
+      <a:defRPr sz="1200" kern="1200">
+        <a:solidFill>
+          <a:schemeClr val="tx1"/>
+        </a:solidFill>
+        <a:latin typeface="+mn-lt"/>
+        <a:ea typeface="+mn-ea"/>
+        <a:cs typeface="+mn-cs"/>
+      </a:defRPr>
+    </a:lvl3pPr>
+    <a:lvl4pPr marL="1371600" algn="l" defTabSz="914400" rtl="0" eaLnBrk="1" latinLnBrk="0" hangingPunct="1">
+      <a:defRPr sz="1200" kern="1200">
+        <a:solidFill>
+          <a:schemeClr val="tx1"/>
+        </a:solidFill>
+        <a:latin typeface="+mn-lt"/>
+        <a:ea typeface="+mn-ea"/>
+        <a:cs typeface="+mn-cs"/>
+      </a:defRPr>
+    </a:lvl4pPr>
+    <a:lvl5pPr marL="1828800" algn="l" defTabSz="914400" rtl="0" eaLnBrk="1" latinLnBrk="0" hangingPunct="1">
+      <a:defRPr sz="1200" kern="1200">
+        <a:solidFill>
+          <a:schemeClr val="tx1"/>
+        </a:solidFill>
+        <a:latin typeface="+mn-lt"/>
+        <a:ea typeface="+mn-ea"/>
+        <a:cs typeface="+mn-cs"/>
+      </a:defRPr>
+    </a:lvl5pPr>
+    <a:lvl6pPr marL="2286000" algn="l" defTabSz="914400" rtl="0" eaLnBrk="1" latinLnBrk="0" hangingPunct="1">
+      <a:defRPr sz="1200" kern="1200">
+        <a:solidFill>
+          <a:schemeClr val="tx1"/>
+        </a:solidFill>
+        <a:latin typeface="+mn-lt"/>
+        <a:ea typeface="+mn-ea"/>
+        <a:cs typeface="+mn-cs"/>
+      </a:defRPr>
+    </a:lvl6pPr>
+    <a:lvl7pPr marL="2743200" algn="l" defTabSz="914400" rtl="0" eaLnBrk="1" latinLnBrk="0" hangingPunct="1">
+      <a:defRPr sz="1200" kern="1200">
+        <a:solidFill>
+          <a:schemeClr val="tx1"/>
+        </a:solidFill>
+        <a:latin typeface="+mn-lt"/>
+        <a:ea typeface="+mn-ea"/>
+        <a:cs typeface="+mn-cs"/>
+      </a:defRPr>
+    </a:lvl7pPr>
+    <a:lvl8pPr marL="3200400" algn="l" defTabSz="914400" rtl="0" eaLnBrk="1" latinLnBrk="0" hangingPunct="1">
+      <a:defRPr sz="1200" kern="1200">
+        <a:solidFill>
+          <a:schemeClr val="tx1"/>
+        </a:solidFill>
+        <a:latin typeface="+mn-lt"/>
+        <a:ea typeface="+mn-ea"/>
+        <a:cs typeface="+mn-cs"/>
+      </a:defRPr>
+    </a:lvl8pPr>
+    <a:lvl9pPr marL="3657600" algn="l" defTabSz="914400" rtl="0" eaLnBrk="1" latinLnBrk="0" hangingPunct="1">
+      <a:defRPr sz="1200" kern="1200">
+        <a:solidFill>
+          <a:schemeClr val="tx1"/>
+        </a:solidFill>
+        <a:latin typeface="+mn-lt"/>
+        <a:ea typeface="+mn-ea"/>
+        <a:cs typeface="+mn-cs"/>
+      </a:defRPr>
+    </a:lvl9pPr>
+  </p:notesStyle>
+</p:notesMaster>
+</file>
+
+<file path=ppt/notesSlides/notesSlide1.xml><?xml version="1.0" encoding="utf-8"?>
+<p:notes xmlns:a="http://schemas.openxmlformats.org/drawingml/2006/main" xmlns:r="http://schemas.openxmlformats.org/officeDocument/2006/relationships" xmlns:p="http://schemas.openxmlformats.org/presentationml/2006/main">
+  <p:cSld>
+    <p:spTree>
+      <p:nvGrpSpPr>
+        <p:cNvPr id="1" name=""/>
+        <p:cNvGrpSpPr/>
+        <p:nvPr/>
+      </p:nvGrpSpPr>
+      <p:grpSpPr>
+        <a:xfrm>
+          <a:off x="0" y="0"/>
+          <a:ext cx="0" cy="0"/>
+          <a:chOff x="0" y="0"/>
+          <a:chExt cx="0" cy="0"/>
+        </a:xfrm>
+      </p:grpSpPr>
+      <p:sp>
+        <p:nvSpPr>
+          <p:cNvPr id="2" name="Slide Image Placeholder 1"/>
+          <p:cNvSpPr>
+            <a:spLocks noGrp="1" noRot="1" noChangeAspect="1"/>
+          </p:cNvSpPr>
+          <p:nvPr>
+            <p:ph type="sldImg"/>
+          </p:nvPr>
+        </p:nvSpPr>
+        <p:spPr/>
+      </p:sp>
+      <p:sp>
+        <p:nvSpPr>
+          <p:cNvPr id="3" name="Notes Placeholder 2"/>
+          <p:cNvSpPr>
+            <a:spLocks noGrp="1"/>
+          </p:cNvSpPr>
+          <p:nvPr>
+            <p:ph type="body" idx="1"/>
+          </p:nvPr>
+        </p:nvSpPr>
+        <p:spPr/>
+        <p:txBody>
+          <a:bodyPr/>
+          <a:lstStyle/>
+          <a:p>
+            <a:endParaRPr lang="en-US" dirty="0"/>
+          </a:p>
+        </p:txBody>
+      </p:sp>
+      <p:sp>
+        <p:nvSpPr>
+          <p:cNvPr id="4" name="Slide Number Placeholder 3"/>
+          <p:cNvSpPr>
+            <a:spLocks noGrp="1"/>
+          </p:cNvSpPr>
+          <p:nvPr>
+            <p:ph type="sldNum" sz="quarter" idx="5"/>
+          </p:nvPr>
+        </p:nvSpPr>
+        <p:spPr/>
+        <p:txBody>
+          <a:bodyPr/>
+          <a:lstStyle/>
+          <a:p>
+            <a:fld id="{D7BE232A-BFA8-7D46-88A5-16F7A00800B4}" type="slidenum">
+              <a:rPr lang="en-US" smtClean="0"/>
+              <a:t>5</a:t>
+            </a:fld>
+            <a:endParaRPr lang="en-US"/>
+          </a:p>
+        </p:txBody>
+      </p:sp>
+    </p:spTree>
+    <p:extLst>
+      <p:ext uri="{BB962C8B-B14F-4D97-AF65-F5344CB8AC3E}">
+        <p14:creationId xmlns:p14="http://schemas.microsoft.com/office/powerpoint/2010/main" val="690967663"/>
+      </p:ext>
+    </p:extLst>
+  </p:cSld>
+  <p:clrMapOvr>
+    <a:masterClrMapping/>
+  </p:clrMapOvr>
+</p:notes>
+</file>
+
+<file path=ppt/notesSlides/notesSlide2.xml><?xml version="1.0" encoding="utf-8"?>
+<p:notes xmlns:a="http://schemas.openxmlformats.org/drawingml/2006/main" xmlns:r="http://schemas.openxmlformats.org/officeDocument/2006/relationships" xmlns:p="http://schemas.openxmlformats.org/presentationml/2006/main">
+  <p:cSld>
+    <p:spTree>
+      <p:nvGrpSpPr>
+        <p:cNvPr id="1" name=""/>
+        <p:cNvGrpSpPr/>
+        <p:nvPr/>
+      </p:nvGrpSpPr>
+      <p:grpSpPr>
+        <a:xfrm>
+          <a:off x="0" y="0"/>
+          <a:ext cx="0" cy="0"/>
+          <a:chOff x="0" y="0"/>
+          <a:chExt cx="0" cy="0"/>
+        </a:xfrm>
+      </p:grpSpPr>
+      <p:sp>
+        <p:nvSpPr>
+          <p:cNvPr id="2" name="Slide Image Placeholder 1"/>
+          <p:cNvSpPr>
+            <a:spLocks noGrp="1" noRot="1" noChangeAspect="1"/>
+          </p:cNvSpPr>
+          <p:nvPr>
+            <p:ph type="sldImg"/>
+          </p:nvPr>
+        </p:nvSpPr>
+        <p:spPr/>
+      </p:sp>
+      <p:sp>
+        <p:nvSpPr>
+          <p:cNvPr id="3" name="Notes Placeholder 2"/>
+          <p:cNvSpPr>
+            <a:spLocks noGrp="1"/>
+          </p:cNvSpPr>
+          <p:nvPr>
+            <p:ph type="body" idx="1"/>
+          </p:nvPr>
+        </p:nvSpPr>
+        <p:spPr/>
+        <p:txBody>
+          <a:bodyPr/>
+          <a:lstStyle/>
+          <a:p>
+            <a:endParaRPr lang="en-US" dirty="0"/>
+          </a:p>
+        </p:txBody>
+      </p:sp>
+      <p:sp>
+        <p:nvSpPr>
+          <p:cNvPr id="4" name="Slide Number Placeholder 3"/>
+          <p:cNvSpPr>
+            <a:spLocks noGrp="1"/>
+          </p:cNvSpPr>
+          <p:nvPr>
+            <p:ph type="sldNum" sz="quarter" idx="5"/>
+          </p:nvPr>
+        </p:nvSpPr>
+        <p:spPr/>
+        <p:txBody>
+          <a:bodyPr/>
+          <a:lstStyle/>
+          <a:p>
+            <a:fld id="{D7BE232A-BFA8-7D46-88A5-16F7A00800B4}" type="slidenum">
+              <a:rPr lang="en-US" smtClean="0"/>
+              <a:t>7</a:t>
+            </a:fld>
+            <a:endParaRPr lang="en-US"/>
+          </a:p>
+        </p:txBody>
+      </p:sp>
+    </p:spTree>
+    <p:extLst>
+      <p:ext uri="{BB962C8B-B14F-4D97-AF65-F5344CB8AC3E}">
+        <p14:creationId xmlns:p14="http://schemas.microsoft.com/office/powerpoint/2010/main" val="3874054166"/>
+      </p:ext>
+    </p:extLst>
+  </p:cSld>
+  <p:clrMapOvr>
+    <a:masterClrMapping/>
+  </p:clrMapOvr>
+</p:notes>
 </file>
 
 <file path=ppt/slideLayouts/slideLayout1.xml><?xml version="1.0" encoding="utf-8"?>
@@ -156,10 +690,9 @@
           <a:lstStyle/>
           <a:p>
             <a:r>
-              <a:rPr lang="en-US" smtClean="0"/>
+              <a:rPr lang="en-US"/>
               <a:t>Click to edit Master title style</a:t>
             </a:r>
-            <a:endParaRPr lang="en-US"/>
           </a:p>
         </p:txBody>
       </p:sp>
@@ -275,10 +808,9 @@
           </a:lstStyle>
           <a:p>
             <a:r>
-              <a:rPr lang="en-US" smtClean="0"/>
+              <a:rPr lang="en-US"/>
               <a:t>Click to edit Master subtitle style</a:t>
             </a:r>
-            <a:endParaRPr lang="en-US"/>
           </a:p>
         </p:txBody>
       </p:sp>
@@ -299,7 +831,7 @@
           <a:p>
             <a:fld id="{5BCAD085-E8A6-8845-BD4E-CB4CCA059FC4}" type="datetimeFigureOut">
               <a:rPr lang="en-US" smtClean="0"/>
-              <a:t>1/27/13</a:t>
+              <a:t>4/13/26</a:t>
             </a:fld>
             <a:endParaRPr lang="en-US"/>
           </a:p>
@@ -393,10 +925,9 @@
           <a:lstStyle/>
           <a:p>
             <a:r>
-              <a:rPr lang="en-US" smtClean="0"/>
+              <a:rPr lang="en-US"/>
               <a:t>Click to edit Master title style</a:t>
             </a:r>
-            <a:endParaRPr lang="en-US"/>
           </a:p>
         </p:txBody>
       </p:sp>
@@ -417,38 +948,37 @@
           <a:p>
             <a:pPr lvl="0"/>
             <a:r>
-              <a:rPr lang="en-US" smtClean="0"/>
+              <a:rPr lang="en-US"/>
               <a:t>Click to edit Master text styles</a:t>
             </a:r>
           </a:p>
           <a:p>
             <a:pPr lvl="1"/>
             <a:r>
-              <a:rPr lang="en-US" smtClean="0"/>
+              <a:rPr lang="en-US"/>
               <a:t>Second level</a:t>
             </a:r>
           </a:p>
           <a:p>
             <a:pPr lvl="2"/>
             <a:r>
-              <a:rPr lang="en-US" smtClean="0"/>
+              <a:rPr lang="en-US"/>
               <a:t>Third level</a:t>
             </a:r>
           </a:p>
           <a:p>
             <a:pPr lvl="3"/>
             <a:r>
-              <a:rPr lang="en-US" smtClean="0"/>
+              <a:rPr lang="en-US"/>
               <a:t>Fourth level</a:t>
             </a:r>
           </a:p>
           <a:p>
             <a:pPr lvl="4"/>
             <a:r>
-              <a:rPr lang="en-US" smtClean="0"/>
+              <a:rPr lang="en-US"/>
               <a:t>Fifth level</a:t>
             </a:r>
-            <a:endParaRPr lang="en-US"/>
           </a:p>
         </p:txBody>
       </p:sp>
@@ -469,7 +999,7 @@
           <a:p>
             <a:fld id="{5BCAD085-E8A6-8845-BD4E-CB4CCA059FC4}" type="datetimeFigureOut">
               <a:rPr lang="en-US" smtClean="0"/>
-              <a:t>1/27/13</a:t>
+              <a:t>4/13/26</a:t>
             </a:fld>
             <a:endParaRPr lang="en-US"/>
           </a:p>
@@ -568,10 +1098,9 @@
           <a:lstStyle/>
           <a:p>
             <a:r>
-              <a:rPr lang="en-US" smtClean="0"/>
+              <a:rPr lang="en-US"/>
               <a:t>Click to edit Master title style</a:t>
             </a:r>
-            <a:endParaRPr lang="en-US"/>
           </a:p>
         </p:txBody>
       </p:sp>
@@ -597,38 +1126,37 @@
           <a:p>
             <a:pPr lvl="0"/>
             <a:r>
-              <a:rPr lang="en-US" smtClean="0"/>
+              <a:rPr lang="en-US"/>
               <a:t>Click to edit Master text styles</a:t>
             </a:r>
           </a:p>
           <a:p>
             <a:pPr lvl="1"/>
             <a:r>
-              <a:rPr lang="en-US" smtClean="0"/>
+              <a:rPr lang="en-US"/>
               <a:t>Second level</a:t>
             </a:r>
           </a:p>
           <a:p>
             <a:pPr lvl="2"/>
             <a:r>
-              <a:rPr lang="en-US" smtClean="0"/>
+              <a:rPr lang="en-US"/>
               <a:t>Third level</a:t>
             </a:r>
           </a:p>
           <a:p>
             <a:pPr lvl="3"/>
             <a:r>
-              <a:rPr lang="en-US" smtClean="0"/>
+              <a:rPr lang="en-US"/>
               <a:t>Fourth level</a:t>
             </a:r>
           </a:p>
           <a:p>
             <a:pPr lvl="4"/>
             <a:r>
-              <a:rPr lang="en-US" smtClean="0"/>
+              <a:rPr lang="en-US"/>
               <a:t>Fifth level</a:t>
             </a:r>
-            <a:endParaRPr lang="en-US"/>
           </a:p>
         </p:txBody>
       </p:sp>
@@ -649,7 +1177,7 @@
           <a:p>
             <a:fld id="{5BCAD085-E8A6-8845-BD4E-CB4CCA059FC4}" type="datetimeFigureOut">
               <a:rPr lang="en-US" smtClean="0"/>
-              <a:t>1/27/13</a:t>
+              <a:t>4/13/26</a:t>
             </a:fld>
             <a:endParaRPr lang="en-US"/>
           </a:p>
@@ -743,10 +1271,9 @@
           <a:lstStyle/>
           <a:p>
             <a:r>
-              <a:rPr lang="en-US" smtClean="0"/>
+              <a:rPr lang="en-US"/>
               <a:t>Click to edit Master title style</a:t>
             </a:r>
-            <a:endParaRPr lang="en-US"/>
           </a:p>
         </p:txBody>
       </p:sp>
@@ -767,38 +1294,37 @@
           <a:p>
             <a:pPr lvl="0"/>
             <a:r>
-              <a:rPr lang="en-US" smtClean="0"/>
+              <a:rPr lang="en-US"/>
               <a:t>Click to edit Master text styles</a:t>
             </a:r>
           </a:p>
           <a:p>
             <a:pPr lvl="1"/>
             <a:r>
-              <a:rPr lang="en-US" smtClean="0"/>
+              <a:rPr lang="en-US"/>
               <a:t>Second level</a:t>
             </a:r>
           </a:p>
           <a:p>
             <a:pPr lvl="2"/>
             <a:r>
-              <a:rPr lang="en-US" smtClean="0"/>
+              <a:rPr lang="en-US"/>
               <a:t>Third level</a:t>
             </a:r>
           </a:p>
           <a:p>
             <a:pPr lvl="3"/>
             <a:r>
-              <a:rPr lang="en-US" smtClean="0"/>
+              <a:rPr lang="en-US"/>
               <a:t>Fourth level</a:t>
             </a:r>
           </a:p>
           <a:p>
             <a:pPr lvl="4"/>
             <a:r>
-              <a:rPr lang="en-US" smtClean="0"/>
+              <a:rPr lang="en-US"/>
               <a:t>Fifth level</a:t>
             </a:r>
-            <a:endParaRPr lang="en-US"/>
           </a:p>
         </p:txBody>
       </p:sp>
@@ -819,7 +1345,7 @@
           <a:p>
             <a:fld id="{5BCAD085-E8A6-8845-BD4E-CB4CCA059FC4}" type="datetimeFigureOut">
               <a:rPr lang="en-US" smtClean="0"/>
-              <a:t>1/27/13</a:t>
+              <a:t>4/13/26</a:t>
             </a:fld>
             <a:endParaRPr lang="en-US"/>
           </a:p>
@@ -922,10 +1448,9 @@
           </a:lstStyle>
           <a:p>
             <a:r>
-              <a:rPr lang="en-US" smtClean="0"/>
+              <a:rPr lang="en-US"/>
               <a:t>Click to edit Master title style</a:t>
             </a:r>
-            <a:endParaRPr lang="en-US"/>
           </a:p>
         </p:txBody>
       </p:sp>
@@ -1042,7 +1567,7 @@
           <a:p>
             <a:pPr lvl="0"/>
             <a:r>
-              <a:rPr lang="en-US" smtClean="0"/>
+              <a:rPr lang="en-US"/>
               <a:t>Click to edit Master text styles</a:t>
             </a:r>
           </a:p>
@@ -1065,7 +1590,7 @@
           <a:p>
             <a:fld id="{5BCAD085-E8A6-8845-BD4E-CB4CCA059FC4}" type="datetimeFigureOut">
               <a:rPr lang="en-US" smtClean="0"/>
-              <a:t>1/27/13</a:t>
+              <a:t>4/13/26</a:t>
             </a:fld>
             <a:endParaRPr lang="en-US"/>
           </a:p>
@@ -1159,10 +1684,9 @@
           <a:lstStyle/>
           <a:p>
             <a:r>
-              <a:rPr lang="en-US" smtClean="0"/>
+              <a:rPr lang="en-US"/>
               <a:t>Click to edit Master title style</a:t>
             </a:r>
-            <a:endParaRPr lang="en-US"/>
           </a:p>
         </p:txBody>
       </p:sp>
@@ -1216,38 +1740,37 @@
           <a:p>
             <a:pPr lvl="0"/>
             <a:r>
-              <a:rPr lang="en-US" smtClean="0"/>
+              <a:rPr lang="en-US"/>
               <a:t>Click to edit Master text styles</a:t>
             </a:r>
           </a:p>
           <a:p>
             <a:pPr lvl="1"/>
             <a:r>
-              <a:rPr lang="en-US" smtClean="0"/>
+              <a:rPr lang="en-US"/>
               <a:t>Second level</a:t>
             </a:r>
           </a:p>
           <a:p>
             <a:pPr lvl="2"/>
             <a:r>
-              <a:rPr lang="en-US" smtClean="0"/>
+              <a:rPr lang="en-US"/>
               <a:t>Third level</a:t>
             </a:r>
           </a:p>
           <a:p>
             <a:pPr lvl="3"/>
             <a:r>
-              <a:rPr lang="en-US" smtClean="0"/>
+              <a:rPr lang="en-US"/>
               <a:t>Fourth level</a:t>
             </a:r>
           </a:p>
           <a:p>
             <a:pPr lvl="4"/>
             <a:r>
-              <a:rPr lang="en-US" smtClean="0"/>
+              <a:rPr lang="en-US"/>
               <a:t>Fifth level</a:t>
             </a:r>
-            <a:endParaRPr lang="en-US"/>
           </a:p>
         </p:txBody>
       </p:sp>
@@ -1301,38 +1824,37 @@
           <a:p>
             <a:pPr lvl="0"/>
             <a:r>
-              <a:rPr lang="en-US" smtClean="0"/>
+              <a:rPr lang="en-US"/>
               <a:t>Click to edit Master text styles</a:t>
             </a:r>
           </a:p>
           <a:p>
             <a:pPr lvl="1"/>
             <a:r>
-              <a:rPr lang="en-US" smtClean="0"/>
+              <a:rPr lang="en-US"/>
               <a:t>Second level</a:t>
             </a:r>
           </a:p>
           <a:p>
             <a:pPr lvl="2"/>
             <a:r>
-              <a:rPr lang="en-US" smtClean="0"/>
+              <a:rPr lang="en-US"/>
               <a:t>Third level</a:t>
             </a:r>
           </a:p>
           <a:p>
             <a:pPr lvl="3"/>
             <a:r>
-              <a:rPr lang="en-US" smtClean="0"/>
+              <a:rPr lang="en-US"/>
               <a:t>Fourth level</a:t>
             </a:r>
           </a:p>
           <a:p>
             <a:pPr lvl="4"/>
             <a:r>
-              <a:rPr lang="en-US" smtClean="0"/>
+              <a:rPr lang="en-US"/>
               <a:t>Fifth level</a:t>
             </a:r>
-            <a:endParaRPr lang="en-US"/>
           </a:p>
         </p:txBody>
       </p:sp>
@@ -1353,7 +1875,7 @@
           <a:p>
             <a:fld id="{5BCAD085-E8A6-8845-BD4E-CB4CCA059FC4}" type="datetimeFigureOut">
               <a:rPr lang="en-US" smtClean="0"/>
-              <a:t>1/27/13</a:t>
+              <a:t>4/13/26</a:t>
             </a:fld>
             <a:endParaRPr lang="en-US"/>
           </a:p>
@@ -1451,10 +1973,9 @@
           </a:lstStyle>
           <a:p>
             <a:r>
-              <a:rPr lang="en-US" smtClean="0"/>
+              <a:rPr lang="en-US"/>
               <a:t>Click to edit Master title style</a:t>
             </a:r>
-            <a:endParaRPr lang="en-US"/>
           </a:p>
         </p:txBody>
       </p:sp>
@@ -1517,7 +2038,7 @@
           <a:p>
             <a:pPr lvl="0"/>
             <a:r>
-              <a:rPr lang="en-US" smtClean="0"/>
+              <a:rPr lang="en-US"/>
               <a:t>Click to edit Master text styles</a:t>
             </a:r>
           </a:p>
@@ -1573,38 +2094,37 @@
           <a:p>
             <a:pPr lvl="0"/>
             <a:r>
-              <a:rPr lang="en-US" smtClean="0"/>
+              <a:rPr lang="en-US"/>
               <a:t>Click to edit Master text styles</a:t>
             </a:r>
           </a:p>
           <a:p>
             <a:pPr lvl="1"/>
             <a:r>
-              <a:rPr lang="en-US" smtClean="0"/>
+              <a:rPr lang="en-US"/>
               <a:t>Second level</a:t>
             </a:r>
           </a:p>
           <a:p>
             <a:pPr lvl="2"/>
             <a:r>
-              <a:rPr lang="en-US" smtClean="0"/>
+              <a:rPr lang="en-US"/>
               <a:t>Third level</a:t>
             </a:r>
           </a:p>
           <a:p>
             <a:pPr lvl="3"/>
             <a:r>
-              <a:rPr lang="en-US" smtClean="0"/>
+              <a:rPr lang="en-US"/>
               <a:t>Fourth level</a:t>
             </a:r>
           </a:p>
           <a:p>
             <a:pPr lvl="4"/>
             <a:r>
-              <a:rPr lang="en-US" smtClean="0"/>
+              <a:rPr lang="en-US"/>
               <a:t>Fifth level</a:t>
             </a:r>
-            <a:endParaRPr lang="en-US"/>
           </a:p>
         </p:txBody>
       </p:sp>
@@ -1667,7 +2187,7 @@
           <a:p>
             <a:pPr lvl="0"/>
             <a:r>
-              <a:rPr lang="en-US" smtClean="0"/>
+              <a:rPr lang="en-US"/>
               <a:t>Click to edit Master text styles</a:t>
             </a:r>
           </a:p>
@@ -1723,38 +2243,37 @@
           <a:p>
             <a:pPr lvl="0"/>
             <a:r>
-              <a:rPr lang="en-US" smtClean="0"/>
+              <a:rPr lang="en-US"/>
               <a:t>Click to edit Master text styles</a:t>
             </a:r>
           </a:p>
           <a:p>
             <a:pPr lvl="1"/>
             <a:r>
-              <a:rPr lang="en-US" smtClean="0"/>
+              <a:rPr lang="en-US"/>
               <a:t>Second level</a:t>
             </a:r>
           </a:p>
           <a:p>
             <a:pPr lvl="2"/>
             <a:r>
-              <a:rPr lang="en-US" smtClean="0"/>
+              <a:rPr lang="en-US"/>
               <a:t>Third level</a:t>
             </a:r>
           </a:p>
           <a:p>
             <a:pPr lvl="3"/>
             <a:r>
-              <a:rPr lang="en-US" smtClean="0"/>
+              <a:rPr lang="en-US"/>
               <a:t>Fourth level</a:t>
             </a:r>
           </a:p>
           <a:p>
             <a:pPr lvl="4"/>
             <a:r>
-              <a:rPr lang="en-US" smtClean="0"/>
+              <a:rPr lang="en-US"/>
               <a:t>Fifth level</a:t>
             </a:r>
-            <a:endParaRPr lang="en-US"/>
           </a:p>
         </p:txBody>
       </p:sp>
@@ -1775,7 +2294,7 @@
           <a:p>
             <a:fld id="{5BCAD085-E8A6-8845-BD4E-CB4CCA059FC4}" type="datetimeFigureOut">
               <a:rPr lang="en-US" smtClean="0"/>
-              <a:t>1/27/13</a:t>
+              <a:t>4/13/26</a:t>
             </a:fld>
             <a:endParaRPr lang="en-US"/>
           </a:p>
@@ -1869,10 +2388,9 @@
           <a:lstStyle/>
           <a:p>
             <a:r>
-              <a:rPr lang="en-US" smtClean="0"/>
+              <a:rPr lang="en-US"/>
               <a:t>Click to edit Master title style</a:t>
             </a:r>
-            <a:endParaRPr lang="en-US"/>
           </a:p>
         </p:txBody>
       </p:sp>
@@ -1893,7 +2411,7 @@
           <a:p>
             <a:fld id="{5BCAD085-E8A6-8845-BD4E-CB4CCA059FC4}" type="datetimeFigureOut">
               <a:rPr lang="en-US" smtClean="0"/>
-              <a:t>1/27/13</a:t>
+              <a:t>4/13/26</a:t>
             </a:fld>
             <a:endParaRPr lang="en-US"/>
           </a:p>
@@ -1988,7 +2506,7 @@
           <a:p>
             <a:fld id="{5BCAD085-E8A6-8845-BD4E-CB4CCA059FC4}" type="datetimeFigureOut">
               <a:rPr lang="en-US" smtClean="0"/>
-              <a:t>1/27/13</a:t>
+              <a:t>4/13/26</a:t>
             </a:fld>
             <a:endParaRPr lang="en-US"/>
           </a:p>
@@ -2091,10 +2609,9 @@
           </a:lstStyle>
           <a:p>
             <a:r>
-              <a:rPr lang="en-US" smtClean="0"/>
+              <a:rPr lang="en-US"/>
               <a:t>Click to edit Master title style</a:t>
             </a:r>
-            <a:endParaRPr lang="en-US"/>
           </a:p>
         </p:txBody>
       </p:sp>
@@ -2148,38 +2665,37 @@
           <a:p>
             <a:pPr lvl="0"/>
             <a:r>
-              <a:rPr lang="en-US" smtClean="0"/>
+              <a:rPr lang="en-US"/>
               <a:t>Click to edit Master text styles</a:t>
             </a:r>
           </a:p>
           <a:p>
             <a:pPr lvl="1"/>
             <a:r>
-              <a:rPr lang="en-US" smtClean="0"/>
+              <a:rPr lang="en-US"/>
               <a:t>Second level</a:t>
             </a:r>
           </a:p>
           <a:p>
             <a:pPr lvl="2"/>
             <a:r>
-              <a:rPr lang="en-US" smtClean="0"/>
+              <a:rPr lang="en-US"/>
               <a:t>Third level</a:t>
             </a:r>
           </a:p>
           <a:p>
             <a:pPr lvl="3"/>
             <a:r>
-              <a:rPr lang="en-US" smtClean="0"/>
+              <a:rPr lang="en-US"/>
               <a:t>Fourth level</a:t>
             </a:r>
           </a:p>
           <a:p>
             <a:pPr lvl="4"/>
             <a:r>
-              <a:rPr lang="en-US" smtClean="0"/>
+              <a:rPr lang="en-US"/>
               <a:t>Fifth level</a:t>
             </a:r>
-            <a:endParaRPr lang="en-US"/>
           </a:p>
         </p:txBody>
       </p:sp>
@@ -2242,7 +2758,7 @@
           <a:p>
             <a:pPr lvl="0"/>
             <a:r>
-              <a:rPr lang="en-US" smtClean="0"/>
+              <a:rPr lang="en-US"/>
               <a:t>Click to edit Master text styles</a:t>
             </a:r>
           </a:p>
@@ -2265,7 +2781,7 @@
           <a:p>
             <a:fld id="{5BCAD085-E8A6-8845-BD4E-CB4CCA059FC4}" type="datetimeFigureOut">
               <a:rPr lang="en-US" smtClean="0"/>
-              <a:t>1/27/13</a:t>
+              <a:t>4/13/26</a:t>
             </a:fld>
             <a:endParaRPr lang="en-US"/>
           </a:p>
@@ -2368,10 +2884,9 @@
           </a:lstStyle>
           <a:p>
             <a:r>
-              <a:rPr lang="en-US" smtClean="0"/>
+              <a:rPr lang="en-US"/>
               <a:t>Click to edit Master title style</a:t>
             </a:r>
-            <a:endParaRPr lang="en-US"/>
           </a:p>
         </p:txBody>
       </p:sp>
@@ -2495,7 +3010,7 @@
           <a:p>
             <a:pPr lvl="0"/>
             <a:r>
-              <a:rPr lang="en-US" smtClean="0"/>
+              <a:rPr lang="en-US"/>
               <a:t>Click to edit Master text styles</a:t>
             </a:r>
           </a:p>
@@ -2518,7 +3033,7 @@
           <a:p>
             <a:fld id="{5BCAD085-E8A6-8845-BD4E-CB4CCA059FC4}" type="datetimeFigureOut">
               <a:rPr lang="en-US" smtClean="0"/>
-              <a:t>1/27/13</a:t>
+              <a:t>4/13/26</a:t>
             </a:fld>
             <a:endParaRPr lang="en-US"/>
           </a:p>
@@ -2627,10 +3142,9 @@
           <a:lstStyle/>
           <a:p>
             <a:r>
-              <a:rPr lang="en-US" smtClean="0"/>
+              <a:rPr lang="en-US"/>
               <a:t>Click to edit Master title style</a:t>
             </a:r>
-            <a:endParaRPr lang="en-US"/>
           </a:p>
         </p:txBody>
       </p:sp>
@@ -2661,38 +3175,37 @@
           <a:p>
             <a:pPr lvl="0"/>
             <a:r>
-              <a:rPr lang="en-US" smtClean="0"/>
+              <a:rPr lang="en-US"/>
               <a:t>Click to edit Master text styles</a:t>
             </a:r>
           </a:p>
           <a:p>
             <a:pPr lvl="1"/>
             <a:r>
-              <a:rPr lang="en-US" smtClean="0"/>
+              <a:rPr lang="en-US"/>
               <a:t>Second level</a:t>
             </a:r>
           </a:p>
           <a:p>
             <a:pPr lvl="2"/>
             <a:r>
-              <a:rPr lang="en-US" smtClean="0"/>
+              <a:rPr lang="en-US"/>
               <a:t>Third level</a:t>
             </a:r>
           </a:p>
           <a:p>
             <a:pPr lvl="3"/>
             <a:r>
-              <a:rPr lang="en-US" smtClean="0"/>
+              <a:rPr lang="en-US"/>
               <a:t>Fourth level</a:t>
             </a:r>
           </a:p>
           <a:p>
             <a:pPr lvl="4"/>
             <a:r>
-              <a:rPr lang="en-US" smtClean="0"/>
+              <a:rPr lang="en-US"/>
               <a:t>Fifth level</a:t>
             </a:r>
-            <a:endParaRPr lang="en-US"/>
           </a:p>
         </p:txBody>
       </p:sp>
@@ -2731,7 +3244,7 @@
           <a:p>
             <a:fld id="{5BCAD085-E8A6-8845-BD4E-CB4CCA059FC4}" type="datetimeFigureOut">
               <a:rPr lang="en-US" smtClean="0"/>
-              <a:t>1/27/13</a:t>
+              <a:t>4/13/26</a:t>
             </a:fld>
             <a:endParaRPr lang="en-US"/>
           </a:p>
@@ -3090,7 +3603,7 @@
 </file>
 
 <file path=ppt/slides/slide1.xml><?xml version="1.0" encoding="utf-8"?>
-<p:sld xmlns:a="http://schemas.openxmlformats.org/drawingml/2006/main" xmlns:p="http://schemas.openxmlformats.org/presentationml/2006/main" xmlns:r="http://schemas.openxmlformats.org/officeDocument/2006/relationships">
+<p:sld xmlns:a="http://schemas.openxmlformats.org/drawingml/2006/main" xmlns:r="http://schemas.openxmlformats.org/officeDocument/2006/relationships" xmlns:p="http://schemas.openxmlformats.org/presentationml/2006/main">
   <p:cSld>
     <p:bg>
       <p:bgPr>
@@ -3106,7 +3619,14 @@
         <p:cNvGrpSpPr/>
         <p:nvPr/>
       </p:nvGrpSpPr>
-      <p:grpSpPr/>
+      <p:grpSpPr>
+        <a:xfrm>
+          <a:off x="0" y="0"/>
+          <a:ext cx="0" cy="0"/>
+          <a:chOff x="0" y="0"/>
+          <a:chExt cx="0" cy="0"/>
+        </a:xfrm>
+      </p:grpSpPr>
       <p:sp>
         <p:nvSpPr>
           <p:cNvPr id="2" name="TextBox 1"/>
@@ -3224,7 +3744,7 @@
 </file>
 
 <file path=ppt/slides/slide10.xml><?xml version="1.0" encoding="utf-8"?>
-<p:sld xmlns:a="http://schemas.openxmlformats.org/drawingml/2006/main" xmlns:p="http://schemas.openxmlformats.org/presentationml/2006/main" xmlns:r="http://schemas.openxmlformats.org/officeDocument/2006/relationships">
+<p:sld xmlns:a="http://schemas.openxmlformats.org/drawingml/2006/main" xmlns:r="http://schemas.openxmlformats.org/officeDocument/2006/relationships" xmlns:p="http://schemas.openxmlformats.org/presentationml/2006/main">
   <p:cSld>
     <p:bg>
       <p:bgPr>
@@ -3240,7 +3760,14 @@
         <p:cNvGrpSpPr/>
         <p:nvPr/>
       </p:nvGrpSpPr>
-      <p:grpSpPr/>
+      <p:grpSpPr>
+        <a:xfrm>
+          <a:off x="0" y="0"/>
+          <a:ext cx="0" cy="0"/>
+          <a:chOff x="0" y="0"/>
+          <a:chExt cx="0" cy="0"/>
+        </a:xfrm>
+      </p:grpSpPr>
       <p:sp>
         <p:nvSpPr>
           <p:cNvPr id="2" name="Rounded Rectangle 1"/>
@@ -3277,7 +3804,7 @@
           </a:fontRef>
         </p:style>
         <p:txBody>
-          <a:bodyPr rtlCol="0" anchor="ctr" wrap="square"/>
+          <a:bodyPr wrap="square" rtlCol="0" anchor="ctr"/>
           <a:lstStyle/>
           <a:p>
             <a:pPr algn="ctr">
@@ -3289,7 +3816,7 @@
               </a:defRPr>
             </a:pPr>
             <a:r>
-              <a:t>Expected Business Impact</a:t>
+              <a:t>Considerations &amp; Roadmap</a:t>
             </a:r>
           </a:p>
         </p:txBody>
@@ -3302,8 +3829,349 @@
         </p:nvSpPr>
         <p:spPr>
           <a:xfrm>
-            <a:off x="457200" y="1371600"/>
-            <a:ext cx="2651760" cy="3200400"/>
+            <a:off x="731520" y="1371599"/>
+            <a:ext cx="5029200" cy="4351867"/>
+          </a:xfrm>
+          <a:prstGeom prst="roundRect">
+            <a:avLst/>
+          </a:prstGeom>
+          <a:solidFill>
+            <a:srgbClr val="FDF2E8"/>
+          </a:solidFill>
+          <a:ln>
+            <a:noFill/>
+          </a:ln>
+        </p:spPr>
+        <p:style>
+          <a:lnRef idx="1">
+            <a:schemeClr val="accent1"/>
+          </a:lnRef>
+          <a:fillRef idx="3">
+            <a:schemeClr val="accent1"/>
+          </a:fillRef>
+          <a:effectRef idx="2">
+            <a:schemeClr val="accent1"/>
+          </a:effectRef>
+          <a:fontRef idx="minor">
+            <a:schemeClr val="lt1"/>
+          </a:fontRef>
+        </p:style>
+        <p:txBody>
+          <a:bodyPr rtlCol="0" anchor="ctr"/>
+          <a:lstStyle/>
+          <a:p>
+            <a:pPr algn="ctr"/>
+            <a:endParaRPr/>
+          </a:p>
+        </p:txBody>
+      </p:sp>
+      <p:sp>
+        <p:nvSpPr>
+          <p:cNvPr id="4" name="TextBox 3"/>
+          <p:cNvSpPr txBox="1"/>
+          <p:nvPr/>
+        </p:nvSpPr>
+        <p:spPr>
+          <a:xfrm>
+            <a:off x="914400" y="1463040"/>
+            <a:ext cx="4754880" cy="365760"/>
+          </a:xfrm>
+          <a:prstGeom prst="rect">
+            <a:avLst/>
+          </a:prstGeom>
+          <a:noFill/>
+        </p:spPr>
+        <p:txBody>
+          <a:bodyPr wrap="square">
+            <a:spAutoFit/>
+          </a:bodyPr>
+          <a:lstStyle/>
+          <a:p>
+            <a:pPr algn="l">
+              <a:defRPr sz="2000" b="1">
+                <a:solidFill>
+                  <a:srgbClr val="FF9900"/>
+                </a:solidFill>
+                <a:latin typeface="Calibri"/>
+              </a:defRPr>
+            </a:pPr>
+            <a:r>
+              <a:t>Things to Keep in Mind</a:t>
+            </a:r>
+          </a:p>
+        </p:txBody>
+      </p:sp>
+      <p:sp>
+        <p:nvSpPr>
+          <p:cNvPr id="5" name="TextBox 4"/>
+          <p:cNvSpPr txBox="1"/>
+          <p:nvPr/>
+        </p:nvSpPr>
+        <p:spPr>
+          <a:xfrm>
+            <a:off x="1097280" y="2011680"/>
+            <a:ext cx="4572000" cy="3016210"/>
+          </a:xfrm>
+          <a:prstGeom prst="rect">
+            <a:avLst/>
+          </a:prstGeom>
+          <a:noFill/>
+        </p:spPr>
+        <p:txBody>
+          <a:bodyPr wrap="square">
+            <a:spAutoFit/>
+          </a:bodyPr>
+          <a:lstStyle/>
+          <a:p>
+            <a:pPr>
+              <a:spcAft>
+                <a:spcPts val="300"/>
+              </a:spcAft>
+              <a:defRPr sz="1500">
+                <a:solidFill>
+                  <a:srgbClr val="232F3E"/>
+                </a:solidFill>
+                <a:latin typeface="Calibri"/>
+              </a:defRPr>
+            </a:pPr>
+            <a:r>
+              <a:rPr dirty="0"/>
+              <a:t>• Fraud patterns evolve</a:t>
+            </a:r>
+            <a:r>
+              <a:rPr lang="en-US" dirty="0"/>
+              <a:t>. T</a:t>
+            </a:r>
+            <a:r>
+              <a:rPr dirty="0"/>
+              <a:t>he model needs</a:t>
+            </a:r>
+          </a:p>
+          <a:p>
+            <a:pPr>
+              <a:spcAft>
+                <a:spcPts val="300"/>
+              </a:spcAft>
+              <a:defRPr sz="1500">
+                <a:solidFill>
+                  <a:srgbClr val="232F3E"/>
+                </a:solidFill>
+                <a:latin typeface="Calibri"/>
+              </a:defRPr>
+            </a:pPr>
+            <a:r>
+              <a:rPr dirty="0"/>
+              <a:t>  periodic updates to stay effective</a:t>
+            </a:r>
+            <a:r>
+              <a:rPr lang="en-US" dirty="0"/>
+              <a:t>.</a:t>
+            </a:r>
+            <a:endParaRPr dirty="0"/>
+          </a:p>
+          <a:p>
+            <a:pPr>
+              <a:spcAft>
+                <a:spcPts val="300"/>
+              </a:spcAft>
+              <a:defRPr sz="1500">
+                <a:solidFill>
+                  <a:srgbClr val="232F3E"/>
+                </a:solidFill>
+                <a:latin typeface="Calibri"/>
+              </a:defRPr>
+            </a:pPr>
+            <a:endParaRPr dirty="0"/>
+          </a:p>
+          <a:p>
+            <a:pPr>
+              <a:spcAft>
+                <a:spcPts val="300"/>
+              </a:spcAft>
+              <a:defRPr sz="1500">
+                <a:solidFill>
+                  <a:srgbClr val="232F3E"/>
+                </a:solidFill>
+                <a:latin typeface="Calibri"/>
+              </a:defRPr>
+            </a:pPr>
+            <a:r>
+              <a:rPr dirty="0"/>
+              <a:t>• 170 out of 1,501 fraud cases were missed</a:t>
+            </a:r>
+          </a:p>
+          <a:p>
+            <a:pPr>
+              <a:spcAft>
+                <a:spcPts val="300"/>
+              </a:spcAft>
+              <a:defRPr sz="1500">
+                <a:solidFill>
+                  <a:srgbClr val="232F3E"/>
+                </a:solidFill>
+                <a:latin typeface="Calibri"/>
+              </a:defRPr>
+            </a:pPr>
+            <a:r>
+              <a:rPr dirty="0"/>
+              <a:t>  (11.3%)</a:t>
+            </a:r>
+            <a:r>
+              <a:rPr lang="en-US" dirty="0"/>
+              <a:t>. A</a:t>
+            </a:r>
+            <a:r>
+              <a:rPr dirty="0"/>
+              <a:t>dditional layers may be needed</a:t>
+            </a:r>
+            <a:r>
+              <a:rPr lang="en-US" dirty="0"/>
+              <a:t>.</a:t>
+            </a:r>
+            <a:endParaRPr dirty="0"/>
+          </a:p>
+          <a:p>
+            <a:pPr>
+              <a:spcAft>
+                <a:spcPts val="300"/>
+              </a:spcAft>
+              <a:defRPr sz="1500">
+                <a:solidFill>
+                  <a:srgbClr val="232F3E"/>
+                </a:solidFill>
+                <a:latin typeface="Calibri"/>
+              </a:defRPr>
+            </a:pPr>
+            <a:endParaRPr dirty="0"/>
+          </a:p>
+          <a:p>
+            <a:pPr>
+              <a:spcAft>
+                <a:spcPts val="300"/>
+              </a:spcAft>
+              <a:defRPr sz="1500">
+                <a:solidFill>
+                  <a:srgbClr val="232F3E"/>
+                </a:solidFill>
+                <a:latin typeface="Calibri"/>
+              </a:defRPr>
+            </a:pPr>
+            <a:r>
+              <a:rPr dirty="0"/>
+              <a:t>• Younger customers have slightly lower</a:t>
+            </a:r>
+          </a:p>
+          <a:p>
+            <a:pPr>
+              <a:spcAft>
+                <a:spcPts val="300"/>
+              </a:spcAft>
+              <a:defRPr sz="1500">
+                <a:solidFill>
+                  <a:srgbClr val="232F3E"/>
+                </a:solidFill>
+                <a:latin typeface="Calibri"/>
+              </a:defRPr>
+            </a:pPr>
+            <a:r>
+              <a:rPr dirty="0"/>
+              <a:t>  protection</a:t>
+            </a:r>
+            <a:r>
+              <a:rPr lang="en-US" dirty="0"/>
+              <a:t>. T</a:t>
+            </a:r>
+            <a:r>
+              <a:rPr dirty="0"/>
+              <a:t>argeted improvements </a:t>
+            </a:r>
+            <a:r>
+              <a:rPr lang="en-US" dirty="0"/>
+              <a:t>should be </a:t>
+            </a:r>
+            <a:r>
+              <a:rPr dirty="0"/>
+              <a:t>planned</a:t>
+            </a:r>
+            <a:r>
+              <a:rPr lang="en-US" dirty="0"/>
+              <a:t>.</a:t>
+            </a:r>
+            <a:endParaRPr dirty="0"/>
+          </a:p>
+          <a:p>
+            <a:pPr>
+              <a:spcAft>
+                <a:spcPts val="300"/>
+              </a:spcAft>
+              <a:defRPr sz="1500">
+                <a:solidFill>
+                  <a:srgbClr val="232F3E"/>
+                </a:solidFill>
+                <a:latin typeface="Calibri"/>
+              </a:defRPr>
+            </a:pPr>
+            <a:endParaRPr dirty="0"/>
+          </a:p>
+          <a:p>
+            <a:pPr>
+              <a:spcAft>
+                <a:spcPts val="300"/>
+              </a:spcAft>
+              <a:defRPr sz="1500">
+                <a:solidFill>
+                  <a:srgbClr val="232F3E"/>
+                </a:solidFill>
+                <a:latin typeface="Calibri"/>
+              </a:defRPr>
+            </a:pPr>
+            <a:r>
+              <a:rPr dirty="0"/>
+              <a:t>• Model trained on historical dat</a:t>
+            </a:r>
+            <a:r>
+              <a:rPr lang="en-US" dirty="0"/>
+              <a:t>a. N</a:t>
+            </a:r>
+            <a:r>
+              <a:rPr dirty="0"/>
+              <a:t>ew</a:t>
+            </a:r>
+          </a:p>
+          <a:p>
+            <a:pPr>
+              <a:spcAft>
+                <a:spcPts val="300"/>
+              </a:spcAft>
+              <a:defRPr sz="1500">
+                <a:solidFill>
+                  <a:srgbClr val="232F3E"/>
+                </a:solidFill>
+                <a:latin typeface="Calibri"/>
+              </a:defRPr>
+            </a:pPr>
+            <a:r>
+              <a:rPr dirty="0"/>
+              <a:t>  fraud types may require retraining</a:t>
+            </a:r>
+            <a:r>
+              <a:rPr lang="en-US" dirty="0"/>
+              <a:t>.</a:t>
+            </a:r>
+            <a:endParaRPr dirty="0"/>
+          </a:p>
+        </p:txBody>
+      </p:sp>
+      <p:sp>
+        <p:nvSpPr>
+          <p:cNvPr id="6" name="Rounded Rectangle 5"/>
+          <p:cNvSpPr/>
+          <p:nvPr/>
+        </p:nvSpPr>
+        <p:spPr>
+          <a:xfrm>
+            <a:off x="6400800" y="1371600"/>
+            <a:ext cx="5029200" cy="4351866"/>
           </a:xfrm>
           <a:prstGeom prst="roundRect">
             <a:avLst/>
@@ -3334,19 +4202,20 @@
           <a:lstStyle/>
           <a:p>
             <a:pPr algn="ctr"/>
-          </a:p>
-        </p:txBody>
-      </p:sp>
-      <p:sp>
-        <p:nvSpPr>
-          <p:cNvPr id="4" name="TextBox 3"/>
+            <a:endParaRPr/>
+          </a:p>
+        </p:txBody>
+      </p:sp>
+      <p:sp>
+        <p:nvSpPr>
+          <p:cNvPr id="7" name="TextBox 6"/>
           <p:cNvSpPr txBox="1"/>
           <p:nvPr/>
         </p:nvSpPr>
         <p:spPr>
           <a:xfrm>
-            <a:off x="457200" y="1554480"/>
-            <a:ext cx="2651760" cy="731520"/>
+            <a:off x="6583680" y="1463040"/>
+            <a:ext cx="4754880" cy="365760"/>
           </a:xfrm>
           <a:prstGeom prst="rect">
             <a:avLst/>
@@ -3359,7 +4228,7 @@
           </a:bodyPr>
           <a:lstStyle/>
           <a:p>
-            <a:pPr algn="ctr">
+            <a:pPr algn="l">
               <a:defRPr sz="2000" b="1">
                 <a:solidFill>
                   <a:srgbClr val="2ECC71"/>
@@ -3368,25 +4237,21 @@
               </a:defRPr>
             </a:pPr>
             <a:r>
-              <a:t>Reduced</a:t>
-            </a:r>
-            <a:br/>
-            <a:r>
-              <a:t>Fraud Losses</a:t>
-            </a:r>
-          </a:p>
-        </p:txBody>
-      </p:sp>
-      <p:sp>
-        <p:nvSpPr>
-          <p:cNvPr id="5" name="TextBox 4"/>
+              <a:t>Recommended Next Steps</a:t>
+            </a:r>
+          </a:p>
+        </p:txBody>
+      </p:sp>
+      <p:sp>
+        <p:nvSpPr>
+          <p:cNvPr id="8" name="TextBox 7"/>
           <p:cNvSpPr txBox="1"/>
           <p:nvPr/>
         </p:nvSpPr>
         <p:spPr>
           <a:xfrm>
-            <a:off x="457200" y="2560320"/>
-            <a:ext cx="2651760" cy="1371600"/>
+            <a:off x="6766560" y="2011680"/>
+            <a:ext cx="4572000" cy="3016210"/>
           </a:xfrm>
           <a:prstGeom prst="rect">
             <a:avLst/>
@@ -3399,8 +4264,11 @@
           </a:bodyPr>
           <a:lstStyle/>
           <a:p>
-            <a:pPr algn="ctr">
-              <a:defRPr sz="1500" b="0">
+            <a:pPr>
+              <a:spcAft>
+                <a:spcPts val="300"/>
+              </a:spcAft>
+              <a:defRPr sz="1500">
                 <a:solidFill>
                   <a:srgbClr val="232F3E"/>
                 </a:solidFill>
@@ -3408,126 +4276,16 @@
               </a:defRPr>
             </a:pPr>
             <a:r>
-              <a:t>88.7% of fraud</a:t>
-            </a:r>
-            <a:br/>
-            <a:r>
-              <a:t>caught before</a:t>
-            </a:r>
-            <a:br/>
-            <a:r>
-              <a:t>it costs money</a:t>
-            </a:r>
-          </a:p>
-        </p:txBody>
-      </p:sp>
-      <p:sp>
-        <p:nvSpPr>
-          <p:cNvPr id="6" name="Rounded Rectangle 5"/>
-          <p:cNvSpPr/>
-          <p:nvPr/>
-        </p:nvSpPr>
-        <p:spPr>
-          <a:xfrm>
-            <a:off x="3383280" y="1371600"/>
-            <a:ext cx="2651760" cy="3200400"/>
-          </a:xfrm>
-          <a:prstGeom prst="roundRect">
-            <a:avLst/>
-          </a:prstGeom>
-          <a:solidFill>
-            <a:srgbClr val="E8F4FD"/>
-          </a:solidFill>
-          <a:ln>
-            <a:noFill/>
-          </a:ln>
-        </p:spPr>
-        <p:style>
-          <a:lnRef idx="1">
-            <a:schemeClr val="accent1"/>
-          </a:lnRef>
-          <a:fillRef idx="3">
-            <a:schemeClr val="accent1"/>
-          </a:fillRef>
-          <a:effectRef idx="2">
-            <a:schemeClr val="accent1"/>
-          </a:effectRef>
-          <a:fontRef idx="minor">
-            <a:schemeClr val="lt1"/>
-          </a:fontRef>
-        </p:style>
-        <p:txBody>
-          <a:bodyPr rtlCol="0" anchor="ctr"/>
-          <a:lstStyle/>
-          <a:p>
-            <a:pPr algn="ctr"/>
-          </a:p>
-        </p:txBody>
-      </p:sp>
-      <p:sp>
-        <p:nvSpPr>
-          <p:cNvPr id="7" name="TextBox 6"/>
-          <p:cNvSpPr txBox="1"/>
-          <p:nvPr/>
-        </p:nvSpPr>
-        <p:spPr>
-          <a:xfrm>
-            <a:off x="3383280" y="1554480"/>
-            <a:ext cx="2651760" cy="731520"/>
-          </a:xfrm>
-          <a:prstGeom prst="rect">
-            <a:avLst/>
-          </a:prstGeom>
-          <a:noFill/>
-        </p:spPr>
-        <p:txBody>
-          <a:bodyPr wrap="square">
-            <a:spAutoFit/>
-          </a:bodyPr>
-          <a:lstStyle/>
-          <a:p>
-            <a:pPr algn="ctr">
-              <a:defRPr sz="2000" b="1">
-                <a:solidFill>
-                  <a:srgbClr val="00A3E0"/>
-                </a:solidFill>
-                <a:latin typeface="Calibri"/>
-              </a:defRPr>
-            </a:pPr>
-            <a:r>
-              <a:t>Fewer Customer</a:t>
-            </a:r>
-            <a:br/>
-            <a:r>
-              <a:t>Complaints</a:t>
-            </a:r>
-          </a:p>
-        </p:txBody>
-      </p:sp>
-      <p:sp>
-        <p:nvSpPr>
-          <p:cNvPr id="8" name="TextBox 7"/>
-          <p:cNvSpPr txBox="1"/>
-          <p:nvPr/>
-        </p:nvSpPr>
-        <p:spPr>
-          <a:xfrm>
-            <a:off x="3383280" y="2560320"/>
-            <a:ext cx="2651760" cy="1371600"/>
-          </a:xfrm>
-          <a:prstGeom prst="rect">
-            <a:avLst/>
-          </a:prstGeom>
-          <a:noFill/>
-        </p:spPr>
-        <p:txBody>
-          <a:bodyPr wrap="square">
-            <a:spAutoFit/>
-          </a:bodyPr>
-          <a:lstStyle/>
-          <a:p>
-            <a:pPr algn="ctr">
-              <a:defRPr sz="1500" b="0">
+              <a:rPr dirty="0"/>
+              <a:t>• Deploy model in production with</a:t>
+            </a:r>
+          </a:p>
+          <a:p>
+            <a:pPr>
+              <a:spcAft>
+                <a:spcPts val="300"/>
+              </a:spcAft>
+              <a:defRPr sz="1500">
                 <a:solidFill>
                   <a:srgbClr val="232F3E"/>
                 </a:solidFill>
@@ -3535,253 +4293,35 @@
               </a:defRPr>
             </a:pPr>
             <a:r>
-              <a:t>Only 0.03% of</a:t>
-            </a:r>
-            <a:br/>
-            <a:r>
-              <a:t>legitimate transactions</a:t>
-            </a:r>
-            <a:br/>
-            <a:r>
-              <a:t>incorrectly flagged</a:t>
-            </a:r>
-          </a:p>
-        </p:txBody>
-      </p:sp>
-      <p:sp>
-        <p:nvSpPr>
-          <p:cNvPr id="9" name="Rounded Rectangle 8"/>
-          <p:cNvSpPr/>
-          <p:nvPr/>
-        </p:nvSpPr>
-        <p:spPr>
-          <a:xfrm>
-            <a:off x="6309360" y="1371600"/>
-            <a:ext cx="2651760" cy="3200400"/>
-          </a:xfrm>
-          <a:prstGeom prst="roundRect">
-            <a:avLst/>
-          </a:prstGeom>
-          <a:solidFill>
-            <a:srgbClr val="FDF2E8"/>
-          </a:solidFill>
-          <a:ln>
-            <a:noFill/>
-          </a:ln>
-        </p:spPr>
-        <p:style>
-          <a:lnRef idx="1">
-            <a:schemeClr val="accent1"/>
-          </a:lnRef>
-          <a:fillRef idx="3">
-            <a:schemeClr val="accent1"/>
-          </a:fillRef>
-          <a:effectRef idx="2">
-            <a:schemeClr val="accent1"/>
-          </a:effectRef>
-          <a:fontRef idx="minor">
-            <a:schemeClr val="lt1"/>
-          </a:fontRef>
-        </p:style>
-        <p:txBody>
-          <a:bodyPr rtlCol="0" anchor="ctr"/>
-          <a:lstStyle/>
-          <a:p>
-            <a:pPr algn="ctr"/>
-          </a:p>
-        </p:txBody>
-      </p:sp>
-      <p:sp>
-        <p:nvSpPr>
-          <p:cNvPr id="10" name="TextBox 9"/>
-          <p:cNvSpPr txBox="1"/>
-          <p:nvPr/>
-        </p:nvSpPr>
-        <p:spPr>
-          <a:xfrm>
-            <a:off x="6309360" y="1554480"/>
-            <a:ext cx="2651760" cy="731520"/>
-          </a:xfrm>
-          <a:prstGeom prst="rect">
-            <a:avLst/>
-          </a:prstGeom>
-          <a:noFill/>
-        </p:spPr>
-        <p:txBody>
-          <a:bodyPr wrap="square">
-            <a:spAutoFit/>
-          </a:bodyPr>
-          <a:lstStyle/>
-          <a:p>
-            <a:pPr algn="ctr">
-              <a:defRPr sz="2000" b="1">
-                <a:solidFill>
-                  <a:srgbClr val="FF9900"/>
-                </a:solidFill>
-                <a:latin typeface="Calibri"/>
-              </a:defRPr>
-            </a:pPr>
-            <a:r>
-              <a:t>Faster</a:t>
-            </a:r>
-            <a:br/>
-            <a:r>
-              <a:t>Resolution</a:t>
-            </a:r>
-          </a:p>
-        </p:txBody>
-      </p:sp>
-      <p:sp>
-        <p:nvSpPr>
-          <p:cNvPr id="11" name="TextBox 10"/>
-          <p:cNvSpPr txBox="1"/>
-          <p:nvPr/>
-        </p:nvSpPr>
-        <p:spPr>
-          <a:xfrm>
-            <a:off x="6309360" y="2560320"/>
-            <a:ext cx="2651760" cy="1371600"/>
-          </a:xfrm>
-          <a:prstGeom prst="rect">
-            <a:avLst/>
-          </a:prstGeom>
-          <a:noFill/>
-        </p:spPr>
-        <p:txBody>
-          <a:bodyPr wrap="square">
-            <a:spAutoFit/>
-          </a:bodyPr>
-          <a:lstStyle/>
-          <a:p>
-            <a:pPr algn="ctr">
-              <a:defRPr sz="1500" b="0">
+              <a:rPr dirty="0"/>
+              <a:t>  real-time transaction scoring</a:t>
+            </a:r>
+            <a:r>
+              <a:rPr lang="en-US" dirty="0"/>
+              <a:t>.</a:t>
+            </a:r>
+            <a:endParaRPr dirty="0"/>
+          </a:p>
+          <a:p>
+            <a:pPr>
+              <a:spcAft>
+                <a:spcPts val="300"/>
+              </a:spcAft>
+              <a:defRPr sz="1500">
                 <a:solidFill>
                   <a:srgbClr val="232F3E"/>
                 </a:solidFill>
                 <a:latin typeface="Calibri"/>
               </a:defRPr>
             </a:pPr>
-            <a:r>
-              <a:t>Automated scoring</a:t>
-            </a:r>
-            <a:br/>
-            <a:r>
-              <a:t>reduces manual</a:t>
-            </a:r>
-            <a:br/>
-            <a:r>
-              <a:t>review workload</a:t>
-            </a:r>
-          </a:p>
-        </p:txBody>
-      </p:sp>
-      <p:sp>
-        <p:nvSpPr>
-          <p:cNvPr id="12" name="Rounded Rectangle 11"/>
-          <p:cNvSpPr/>
-          <p:nvPr/>
-        </p:nvSpPr>
-        <p:spPr>
-          <a:xfrm>
-            <a:off x="9235440" y="1371600"/>
-            <a:ext cx="2651760" cy="3200400"/>
-          </a:xfrm>
-          <a:prstGeom prst="roundRect">
-            <a:avLst/>
-          </a:prstGeom>
-          <a:solidFill>
-            <a:srgbClr val="F0E8FD"/>
-          </a:solidFill>
-          <a:ln>
-            <a:noFill/>
-          </a:ln>
-        </p:spPr>
-        <p:style>
-          <a:lnRef idx="1">
-            <a:schemeClr val="accent1"/>
-          </a:lnRef>
-          <a:fillRef idx="3">
-            <a:schemeClr val="accent1"/>
-          </a:fillRef>
-          <a:effectRef idx="2">
-            <a:schemeClr val="accent1"/>
-          </a:effectRef>
-          <a:fontRef idx="minor">
-            <a:schemeClr val="lt1"/>
-          </a:fontRef>
-        </p:style>
-        <p:txBody>
-          <a:bodyPr rtlCol="0" anchor="ctr"/>
-          <a:lstStyle/>
-          <a:p>
-            <a:pPr algn="ctr"/>
-          </a:p>
-        </p:txBody>
-      </p:sp>
-      <p:sp>
-        <p:nvSpPr>
-          <p:cNvPr id="13" name="TextBox 12"/>
-          <p:cNvSpPr txBox="1"/>
-          <p:nvPr/>
-        </p:nvSpPr>
-        <p:spPr>
-          <a:xfrm>
-            <a:off x="9235440" y="1554480"/>
-            <a:ext cx="2651760" cy="731520"/>
-          </a:xfrm>
-          <a:prstGeom prst="rect">
-            <a:avLst/>
-          </a:prstGeom>
-          <a:noFill/>
-        </p:spPr>
-        <p:txBody>
-          <a:bodyPr wrap="square">
-            <a:spAutoFit/>
-          </a:bodyPr>
-          <a:lstStyle/>
-          <a:p>
-            <a:pPr algn="ctr">
-              <a:defRPr sz="2000" b="1">
-                <a:solidFill>
-                  <a:srgbClr val="8E44AD"/>
-                </a:solidFill>
-                <a:latin typeface="Calibri"/>
-              </a:defRPr>
-            </a:pPr>
-            <a:r>
-              <a:t>Regulatory</a:t>
-            </a:r>
-            <a:br/>
-            <a:r>
-              <a:t>Compliance</a:t>
-            </a:r>
-          </a:p>
-        </p:txBody>
-      </p:sp>
-      <p:sp>
-        <p:nvSpPr>
-          <p:cNvPr id="14" name="TextBox 13"/>
-          <p:cNvSpPr txBox="1"/>
-          <p:nvPr/>
-        </p:nvSpPr>
-        <p:spPr>
-          <a:xfrm>
-            <a:off x="9235440" y="2560320"/>
-            <a:ext cx="2651760" cy="1371600"/>
-          </a:xfrm>
-          <a:prstGeom prst="rect">
-            <a:avLst/>
-          </a:prstGeom>
-          <a:noFill/>
-        </p:spPr>
-        <p:txBody>
-          <a:bodyPr wrap="square">
-            <a:spAutoFit/>
-          </a:bodyPr>
-          <a:lstStyle/>
-          <a:p>
-            <a:pPr algn="ctr">
-              <a:defRPr sz="1500" b="0">
+            <a:endParaRPr dirty="0"/>
+          </a:p>
+          <a:p>
+            <a:pPr>
+              <a:spcAft>
+                <a:spcPts val="300"/>
+              </a:spcAft>
+              <a:defRPr sz="1500">
                 <a:solidFill>
                   <a:srgbClr val="232F3E"/>
                 </a:solidFill>
@@ -3789,43 +4329,16 @@
               </a:defRPr>
             </a:pPr>
             <a:r>
-              <a:t>Explainable AI with</a:t>
-            </a:r>
-            <a:br/>
-            <a:r>
-              <a:t>fairness auditing</a:t>
-            </a:r>
-            <a:br/>
-            <a:r>
-              <a:t>across demographics</a:t>
-            </a:r>
-          </a:p>
-        </p:txBody>
-      </p:sp>
-      <p:sp>
-        <p:nvSpPr>
-          <p:cNvPr id="15" name="TextBox 14"/>
-          <p:cNvSpPr txBox="1"/>
-          <p:nvPr/>
-        </p:nvSpPr>
-        <p:spPr>
-          <a:xfrm>
-            <a:off x="731520" y="5029200"/>
-            <a:ext cx="10515600" cy="731520"/>
-          </a:xfrm>
-          <a:prstGeom prst="rect">
-            <a:avLst/>
-          </a:prstGeom>
-          <a:noFill/>
-        </p:spPr>
-        <p:txBody>
-          <a:bodyPr wrap="square">
-            <a:spAutoFit/>
-          </a:bodyPr>
-          <a:lstStyle/>
-          <a:p>
-            <a:pPr algn="l">
-              <a:defRPr sz="1700" b="0">
+              <a:rPr dirty="0"/>
+              <a:t>• Set up automated monitoring to detect</a:t>
+            </a:r>
+          </a:p>
+          <a:p>
+            <a:pPr>
+              <a:spcAft>
+                <a:spcPts val="300"/>
+              </a:spcAft>
+              <a:defRPr sz="1500">
                 <a:solidFill>
                   <a:srgbClr val="232F3E"/>
                 </a:solidFill>
@@ -3833,8 +4346,120 @@
               </a:defRPr>
             </a:pPr>
             <a:r>
-              <a:t>The model processes transactions in real-time, providing instant fraud risk scores that can be integrated into existing payment processing workflows.</a:t>
-            </a:r>
+              <a:rPr dirty="0"/>
+              <a:t>  when model performance degrades</a:t>
+            </a:r>
+            <a:r>
+              <a:rPr lang="en-US" dirty="0"/>
+              <a:t>.</a:t>
+            </a:r>
+            <a:endParaRPr dirty="0"/>
+          </a:p>
+          <a:p>
+            <a:pPr>
+              <a:spcAft>
+                <a:spcPts val="300"/>
+              </a:spcAft>
+              <a:defRPr sz="1500">
+                <a:solidFill>
+                  <a:srgbClr val="232F3E"/>
+                </a:solidFill>
+                <a:latin typeface="Calibri"/>
+              </a:defRPr>
+            </a:pPr>
+            <a:endParaRPr dirty="0"/>
+          </a:p>
+          <a:p>
+            <a:pPr>
+              <a:spcAft>
+                <a:spcPts val="300"/>
+              </a:spcAft>
+              <a:defRPr sz="1500">
+                <a:solidFill>
+                  <a:srgbClr val="232F3E"/>
+                </a:solidFill>
+                <a:latin typeface="Calibri"/>
+              </a:defRPr>
+            </a:pPr>
+            <a:r>
+              <a:rPr dirty="0"/>
+              <a:t>• Run A/B test against current rule-based</a:t>
+            </a:r>
+          </a:p>
+          <a:p>
+            <a:pPr>
+              <a:spcAft>
+                <a:spcPts val="300"/>
+              </a:spcAft>
+              <a:defRPr sz="1500">
+                <a:solidFill>
+                  <a:srgbClr val="232F3E"/>
+                </a:solidFill>
+                <a:latin typeface="Calibri"/>
+              </a:defRPr>
+            </a:pPr>
+            <a:r>
+              <a:rPr dirty="0"/>
+              <a:t>  fraud detection system</a:t>
+            </a:r>
+            <a:r>
+              <a:rPr lang="en-US" dirty="0"/>
+              <a:t>.</a:t>
+            </a:r>
+            <a:endParaRPr dirty="0"/>
+          </a:p>
+          <a:p>
+            <a:pPr>
+              <a:spcAft>
+                <a:spcPts val="300"/>
+              </a:spcAft>
+              <a:defRPr sz="1500">
+                <a:solidFill>
+                  <a:srgbClr val="232F3E"/>
+                </a:solidFill>
+                <a:latin typeface="Calibri"/>
+              </a:defRPr>
+            </a:pPr>
+            <a:endParaRPr dirty="0"/>
+          </a:p>
+          <a:p>
+            <a:pPr>
+              <a:spcAft>
+                <a:spcPts val="300"/>
+              </a:spcAft>
+              <a:defRPr sz="1500">
+                <a:solidFill>
+                  <a:srgbClr val="232F3E"/>
+                </a:solidFill>
+                <a:latin typeface="Calibri"/>
+              </a:defRPr>
+            </a:pPr>
+            <a:r>
+              <a:rPr dirty="0"/>
+              <a:t>• Schedule quarterly model retraining</a:t>
+            </a:r>
+          </a:p>
+          <a:p>
+            <a:pPr>
+              <a:spcAft>
+                <a:spcPts val="300"/>
+              </a:spcAft>
+              <a:defRPr sz="1500">
+                <a:solidFill>
+                  <a:srgbClr val="232F3E"/>
+                </a:solidFill>
+                <a:latin typeface="Calibri"/>
+              </a:defRPr>
+            </a:pPr>
+            <a:r>
+              <a:rPr dirty="0"/>
+              <a:t>  with latest transaction data</a:t>
+            </a:r>
+            <a:r>
+              <a:rPr lang="en-US" dirty="0"/>
+              <a:t>.</a:t>
+            </a:r>
+            <a:endParaRPr dirty="0"/>
           </a:p>
         </p:txBody>
       </p:sp>
@@ -3846,8 +4471,8 @@
 </p:sld>
 </file>
 
-<file path=ppt/slides/slide11.xml><?xml version="1.0" encoding="utf-8"?>
-<p:sld xmlns:a="http://schemas.openxmlformats.org/drawingml/2006/main" xmlns:p="http://schemas.openxmlformats.org/presentationml/2006/main" xmlns:r="http://schemas.openxmlformats.org/officeDocument/2006/relationships">
+<file path=ppt/slides/slide2.xml><?xml version="1.0" encoding="utf-8"?>
+<p:sld xmlns:a="http://schemas.openxmlformats.org/drawingml/2006/main" xmlns:r="http://schemas.openxmlformats.org/officeDocument/2006/relationships" xmlns:p="http://schemas.openxmlformats.org/presentationml/2006/main">
   <p:cSld>
     <p:bg>
       <p:bgPr>
@@ -3863,7 +4488,14 @@
         <p:cNvGrpSpPr/>
         <p:nvPr/>
       </p:nvGrpSpPr>
-      <p:grpSpPr/>
+      <p:grpSpPr>
+        <a:xfrm>
+          <a:off x="0" y="0"/>
+          <a:ext cx="0" cy="0"/>
+          <a:chOff x="0" y="0"/>
+          <a:chExt cx="0" cy="0"/>
+        </a:xfrm>
+      </p:grpSpPr>
       <p:sp>
         <p:nvSpPr>
           <p:cNvPr id="2" name="Rounded Rectangle 1"/>
@@ -3900,7 +4532,7 @@
           </a:fontRef>
         </p:style>
         <p:txBody>
-          <a:bodyPr rtlCol="0" anchor="ctr" wrap="square"/>
+          <a:bodyPr wrap="square" rtlCol="0" anchor="ctr"/>
           <a:lstStyle/>
           <a:p>
             <a:pPr algn="ctr">
@@ -3912,21 +4544,224 @@
               </a:defRPr>
             </a:pPr>
             <a:r>
-              <a:t>Considerations &amp; Roadmap</a:t>
-            </a:r>
-          </a:p>
-        </p:txBody>
-      </p:sp>
-      <p:sp>
-        <p:nvSpPr>
-          <p:cNvPr id="3" name="Rounded Rectangle 2"/>
+              <a:t>The Challenge</a:t>
+            </a:r>
+          </a:p>
+        </p:txBody>
+      </p:sp>
+      <p:sp>
+        <p:nvSpPr>
+          <p:cNvPr id="3" name="TextBox 2"/>
+          <p:cNvSpPr txBox="1"/>
+          <p:nvPr/>
+        </p:nvSpPr>
+        <p:spPr>
+          <a:xfrm>
+            <a:off x="731520" y="1188720"/>
+            <a:ext cx="10515600" cy="1097280"/>
+          </a:xfrm>
+          <a:prstGeom prst="rect">
+            <a:avLst/>
+          </a:prstGeom>
+          <a:noFill/>
+        </p:spPr>
+        <p:txBody>
+          <a:bodyPr wrap="square">
+            <a:spAutoFit/>
+          </a:bodyPr>
+          <a:lstStyle/>
+          <a:p>
+            <a:pPr algn="l">
+              <a:defRPr sz="2000" b="0">
+                <a:solidFill>
+                  <a:srgbClr val="232F3E"/>
+                </a:solidFill>
+                <a:latin typeface="Calibri"/>
+              </a:defRPr>
+            </a:pPr>
+            <a:r>
+              <a:t>Credit card fraud costs the financial industry billions annually. As digital payments grow, so do fraudulent attacks. Customers who are charged for purchases they didn't make lose trust. The challenge: catch fraud quickly without disrupting legitimate transactions.</a:t>
+            </a:r>
+          </a:p>
+        </p:txBody>
+      </p:sp>
+      <p:sp>
+        <p:nvSpPr>
+          <p:cNvPr id="4" name="Rounded Rectangle 3"/>
           <p:cNvSpPr/>
           <p:nvPr/>
         </p:nvSpPr>
         <p:spPr>
           <a:xfrm>
-            <a:off x="731520" y="1371600"/>
-            <a:ext cx="5029200" cy="3200400"/>
+            <a:off x="731520" y="2743200"/>
+            <a:ext cx="3200400" cy="2286000"/>
+          </a:xfrm>
+          <a:prstGeom prst="roundRect">
+            <a:avLst/>
+          </a:prstGeom>
+          <a:solidFill>
+            <a:srgbClr val="FDE8E8"/>
+          </a:solidFill>
+          <a:ln>
+            <a:noFill/>
+          </a:ln>
+        </p:spPr>
+        <p:style>
+          <a:lnRef idx="1">
+            <a:schemeClr val="accent1"/>
+          </a:lnRef>
+          <a:fillRef idx="3">
+            <a:schemeClr val="accent1"/>
+          </a:fillRef>
+          <a:effectRef idx="2">
+            <a:schemeClr val="accent1"/>
+          </a:effectRef>
+          <a:fontRef idx="minor">
+            <a:schemeClr val="lt1"/>
+          </a:fontRef>
+        </p:style>
+        <p:txBody>
+          <a:bodyPr rtlCol="0" anchor="ctr"/>
+          <a:lstStyle/>
+          <a:p>
+            <a:pPr algn="ctr"/>
+            <a:endParaRPr/>
+          </a:p>
+        </p:txBody>
+      </p:sp>
+      <p:sp>
+        <p:nvSpPr>
+          <p:cNvPr id="5" name="TextBox 4"/>
+          <p:cNvSpPr txBox="1"/>
+          <p:nvPr/>
+        </p:nvSpPr>
+        <p:spPr>
+          <a:xfrm>
+            <a:off x="914400" y="2834640"/>
+            <a:ext cx="2926080" cy="365760"/>
+          </a:xfrm>
+          <a:prstGeom prst="rect">
+            <a:avLst/>
+          </a:prstGeom>
+          <a:noFill/>
+        </p:spPr>
+        <p:txBody>
+          <a:bodyPr wrap="square">
+            <a:spAutoFit/>
+          </a:bodyPr>
+          <a:lstStyle/>
+          <a:p>
+            <a:pPr algn="ctr">
+              <a:defRPr sz="1800" b="1">
+                <a:solidFill>
+                  <a:srgbClr val="E74C3C"/>
+                </a:solidFill>
+                <a:latin typeface="Calibri"/>
+              </a:defRPr>
+            </a:pPr>
+            <a:r>
+              <a:t>The Cost of Missed Fraud</a:t>
+            </a:r>
+          </a:p>
+        </p:txBody>
+      </p:sp>
+      <p:sp>
+        <p:nvSpPr>
+          <p:cNvPr id="6" name="TextBox 5"/>
+          <p:cNvSpPr txBox="1"/>
+          <p:nvPr/>
+        </p:nvSpPr>
+        <p:spPr>
+          <a:xfrm>
+            <a:off x="914400" y="3291840"/>
+            <a:ext cx="2926080" cy="1645920"/>
+          </a:xfrm>
+          <a:prstGeom prst="rect">
+            <a:avLst/>
+          </a:prstGeom>
+          <a:noFill/>
+        </p:spPr>
+        <p:txBody>
+          <a:bodyPr wrap="square">
+            <a:spAutoFit/>
+          </a:bodyPr>
+          <a:lstStyle/>
+          <a:p>
+            <a:pPr>
+              <a:spcAft>
+                <a:spcPts val="1000"/>
+              </a:spcAft>
+              <a:defRPr sz="1500">
+                <a:solidFill>
+                  <a:srgbClr val="232F3E"/>
+                </a:solidFill>
+                <a:latin typeface="Calibri"/>
+              </a:defRPr>
+            </a:pPr>
+            <a:r>
+              <a:t>Financial losses to the company</a:t>
+            </a:r>
+          </a:p>
+          <a:p>
+            <a:pPr>
+              <a:spcAft>
+                <a:spcPts val="1000"/>
+              </a:spcAft>
+              <a:defRPr sz="1500">
+                <a:solidFill>
+                  <a:srgbClr val="232F3E"/>
+                </a:solidFill>
+                <a:latin typeface="Calibri"/>
+              </a:defRPr>
+            </a:pPr>
+            <a:r>
+              <a:t>Chargebacks and disputes</a:t>
+            </a:r>
+          </a:p>
+          <a:p>
+            <a:pPr>
+              <a:spcAft>
+                <a:spcPts val="1000"/>
+              </a:spcAft>
+              <a:defRPr sz="1500">
+                <a:solidFill>
+                  <a:srgbClr val="232F3E"/>
+                </a:solidFill>
+                <a:latin typeface="Calibri"/>
+              </a:defRPr>
+            </a:pPr>
+            <a:r>
+              <a:t>Damaged customer trust</a:t>
+            </a:r>
+          </a:p>
+          <a:p>
+            <a:pPr>
+              <a:spcAft>
+                <a:spcPts val="1000"/>
+              </a:spcAft>
+              <a:defRPr sz="1500">
+                <a:solidFill>
+                  <a:srgbClr val="232F3E"/>
+                </a:solidFill>
+                <a:latin typeface="Calibri"/>
+              </a:defRPr>
+            </a:pPr>
+            <a:r>
+              <a:t>Regulatory scrutiny</a:t>
+            </a:r>
+          </a:p>
+        </p:txBody>
+      </p:sp>
+      <p:sp>
+        <p:nvSpPr>
+          <p:cNvPr id="7" name="Rounded Rectangle 6"/>
+          <p:cNvSpPr/>
+          <p:nvPr/>
+        </p:nvSpPr>
+        <p:spPr>
+          <a:xfrm>
+            <a:off x="4572000" y="2743200"/>
+            <a:ext cx="3200400" cy="2286000"/>
           </a:xfrm>
           <a:prstGeom prst="roundRect">
             <a:avLst/>
@@ -3957,19 +4792,20 @@
           <a:lstStyle/>
           <a:p>
             <a:pPr algn="ctr"/>
-          </a:p>
-        </p:txBody>
-      </p:sp>
-      <p:sp>
-        <p:nvSpPr>
-          <p:cNvPr id="4" name="TextBox 3"/>
+            <a:endParaRPr/>
+          </a:p>
+        </p:txBody>
+      </p:sp>
+      <p:sp>
+        <p:nvSpPr>
+          <p:cNvPr id="8" name="TextBox 7"/>
           <p:cNvSpPr txBox="1"/>
           <p:nvPr/>
         </p:nvSpPr>
         <p:spPr>
           <a:xfrm>
-            <a:off x="914400" y="1463040"/>
-            <a:ext cx="4754880" cy="365760"/>
+            <a:off x="4754880" y="2834640"/>
+            <a:ext cx="2926080" cy="365760"/>
           </a:xfrm>
           <a:prstGeom prst="rect">
             <a:avLst/>
@@ -3982,8 +4818,8 @@
           </a:bodyPr>
           <a:lstStyle/>
           <a:p>
-            <a:pPr algn="l">
-              <a:defRPr sz="2000" b="1">
+            <a:pPr algn="ctr">
+              <a:defRPr sz="1800" b="1">
                 <a:solidFill>
                   <a:srgbClr val="FF9900"/>
                 </a:solidFill>
@@ -3991,21 +4827,21 @@
               </a:defRPr>
             </a:pPr>
             <a:r>
-              <a:t>Things to Keep in Mind</a:t>
-            </a:r>
-          </a:p>
-        </p:txBody>
-      </p:sp>
-      <p:sp>
-        <p:nvSpPr>
-          <p:cNvPr id="5" name="TextBox 4"/>
+              <a:t>The Cost of False Alarms</a:t>
+            </a:r>
+          </a:p>
+        </p:txBody>
+      </p:sp>
+      <p:sp>
+        <p:nvSpPr>
+          <p:cNvPr id="9" name="TextBox 8"/>
           <p:cNvSpPr txBox="1"/>
           <p:nvPr/>
         </p:nvSpPr>
         <p:spPr>
           <a:xfrm>
-            <a:off x="1097280" y="2011680"/>
-            <a:ext cx="4572000" cy="2286000"/>
+            <a:off x="4754880" y="3291840"/>
+            <a:ext cx="2926080" cy="1645920"/>
           </a:xfrm>
           <a:prstGeom prst="rect">
             <a:avLst/>
@@ -4020,7 +4856,7 @@
           <a:p>
             <a:pPr>
               <a:spcAft>
-                <a:spcPts val="300"/>
+                <a:spcPts val="1000"/>
               </a:spcAft>
               <a:defRPr sz="1500">
                 <a:solidFill>
@@ -4030,13 +4866,13 @@
               </a:defRPr>
             </a:pPr>
             <a:r>
-              <a:t>• Fraud patterns evolve — the model needs</a:t>
+              <a:t>Legitimate purchases blocked</a:t>
             </a:r>
           </a:p>
           <a:p>
             <a:pPr>
               <a:spcAft>
-                <a:spcPts val="300"/>
+                <a:spcPts val="1000"/>
               </a:spcAft>
               <a:defRPr sz="1500">
                 <a:solidFill>
@@ -4046,13 +4882,13 @@
               </a:defRPr>
             </a:pPr>
             <a:r>
-              <a:t>  periodic updates to stay effective</a:t>
+              <a:t>Frustrated customers</a:t>
             </a:r>
           </a:p>
           <a:p>
             <a:pPr>
               <a:spcAft>
-                <a:spcPts val="300"/>
+                <a:spcPts val="1000"/>
               </a:spcAft>
               <a:defRPr sz="1500">
                 <a:solidFill>
@@ -4061,11 +4897,14 @@
                 <a:latin typeface="Calibri"/>
               </a:defRPr>
             </a:pPr>
+            <a:r>
+              <a:t>Increased call center volume</a:t>
+            </a:r>
           </a:p>
           <a:p>
             <a:pPr>
               <a:spcAft>
-                <a:spcPts val="300"/>
+                <a:spcPts val="1000"/>
               </a:spcAft>
               <a:defRPr sz="1500">
                 <a:solidFill>
@@ -4075,127 +4914,21 @@
               </a:defRPr>
             </a:pPr>
             <a:r>
-              <a:t>• 170 out of 1,501 fraud cases were missed</a:t>
-            </a:r>
-          </a:p>
-          <a:p>
-            <a:pPr>
-              <a:spcAft>
-                <a:spcPts val="300"/>
-              </a:spcAft>
-              <a:defRPr sz="1500">
-                <a:solidFill>
-                  <a:srgbClr val="232F3E"/>
-                </a:solidFill>
-                <a:latin typeface="Calibri"/>
-              </a:defRPr>
-            </a:pPr>
-            <a:r>
-              <a:t>  (11.3%) — additional layers may be needed</a:t>
-            </a:r>
-          </a:p>
-          <a:p>
-            <a:pPr>
-              <a:spcAft>
-                <a:spcPts val="300"/>
-              </a:spcAft>
-              <a:defRPr sz="1500">
-                <a:solidFill>
-                  <a:srgbClr val="232F3E"/>
-                </a:solidFill>
-                <a:latin typeface="Calibri"/>
-              </a:defRPr>
-            </a:pPr>
-          </a:p>
-          <a:p>
-            <a:pPr>
-              <a:spcAft>
-                <a:spcPts val="300"/>
-              </a:spcAft>
-              <a:defRPr sz="1500">
-                <a:solidFill>
-                  <a:srgbClr val="232F3E"/>
-                </a:solidFill>
-                <a:latin typeface="Calibri"/>
-              </a:defRPr>
-            </a:pPr>
-            <a:r>
-              <a:t>• Younger customers have slightly lower</a:t>
-            </a:r>
-          </a:p>
-          <a:p>
-            <a:pPr>
-              <a:spcAft>
-                <a:spcPts val="300"/>
-              </a:spcAft>
-              <a:defRPr sz="1500">
-                <a:solidFill>
-                  <a:srgbClr val="232F3E"/>
-                </a:solidFill>
-                <a:latin typeface="Calibri"/>
-              </a:defRPr>
-            </a:pPr>
-            <a:r>
-              <a:t>  protection — targeted improvements planned</a:t>
-            </a:r>
-          </a:p>
-          <a:p>
-            <a:pPr>
-              <a:spcAft>
-                <a:spcPts val="300"/>
-              </a:spcAft>
-              <a:defRPr sz="1500">
-                <a:solidFill>
-                  <a:srgbClr val="232F3E"/>
-                </a:solidFill>
-                <a:latin typeface="Calibri"/>
-              </a:defRPr>
-            </a:pPr>
-          </a:p>
-          <a:p>
-            <a:pPr>
-              <a:spcAft>
-                <a:spcPts val="300"/>
-              </a:spcAft>
-              <a:defRPr sz="1500">
-                <a:solidFill>
-                  <a:srgbClr val="232F3E"/>
-                </a:solidFill>
-                <a:latin typeface="Calibri"/>
-              </a:defRPr>
-            </a:pPr>
-            <a:r>
-              <a:t>• Model trained on historical data — new</a:t>
-            </a:r>
-          </a:p>
-          <a:p>
-            <a:pPr>
-              <a:spcAft>
-                <a:spcPts val="300"/>
-              </a:spcAft>
-              <a:defRPr sz="1500">
-                <a:solidFill>
-                  <a:srgbClr val="232F3E"/>
-                </a:solidFill>
-                <a:latin typeface="Calibri"/>
-              </a:defRPr>
-            </a:pPr>
-            <a:r>
-              <a:t>  fraud types may require retraining</a:t>
-            </a:r>
-          </a:p>
-        </p:txBody>
-      </p:sp>
-      <p:sp>
-        <p:nvSpPr>
-          <p:cNvPr id="6" name="Rounded Rectangle 5"/>
+              <a:t>Customer churn</a:t>
+            </a:r>
+          </a:p>
+        </p:txBody>
+      </p:sp>
+      <p:sp>
+        <p:nvSpPr>
+          <p:cNvPr id="10" name="Rounded Rectangle 9"/>
           <p:cNvSpPr/>
           <p:nvPr/>
         </p:nvSpPr>
         <p:spPr>
           <a:xfrm>
-            <a:off x="6400800" y="1371600"/>
-            <a:ext cx="5029200" cy="3200400"/>
+            <a:off x="8412480" y="2743200"/>
+            <a:ext cx="3200400" cy="2286000"/>
           </a:xfrm>
           <a:prstGeom prst="roundRect">
             <a:avLst/>
@@ -4226,19 +4959,20 @@
           <a:lstStyle/>
           <a:p>
             <a:pPr algn="ctr"/>
-          </a:p>
-        </p:txBody>
-      </p:sp>
-      <p:sp>
-        <p:nvSpPr>
-          <p:cNvPr id="7" name="TextBox 6"/>
+            <a:endParaRPr/>
+          </a:p>
+        </p:txBody>
+      </p:sp>
+      <p:sp>
+        <p:nvSpPr>
+          <p:cNvPr id="11" name="TextBox 10"/>
           <p:cNvSpPr txBox="1"/>
           <p:nvPr/>
         </p:nvSpPr>
         <p:spPr>
           <a:xfrm>
-            <a:off x="6583680" y="1463040"/>
-            <a:ext cx="4754880" cy="365760"/>
+            <a:off x="8595360" y="2834640"/>
+            <a:ext cx="2926080" cy="365760"/>
           </a:xfrm>
           <a:prstGeom prst="rect">
             <a:avLst/>
@@ -4251,8 +4985,8 @@
           </a:bodyPr>
           <a:lstStyle/>
           <a:p>
-            <a:pPr algn="l">
-              <a:defRPr sz="2000" b="1">
+            <a:pPr algn="ctr">
+              <a:defRPr sz="1800" b="1">
                 <a:solidFill>
                   <a:srgbClr val="2ECC71"/>
                 </a:solidFill>
@@ -4260,21 +4994,21 @@
               </a:defRPr>
             </a:pPr>
             <a:r>
-              <a:t>Recommended Next Steps</a:t>
-            </a:r>
-          </a:p>
-        </p:txBody>
-      </p:sp>
-      <p:sp>
-        <p:nvSpPr>
-          <p:cNvPr id="8" name="TextBox 7"/>
+              <a:t>The Goal</a:t>
+            </a:r>
+          </a:p>
+        </p:txBody>
+      </p:sp>
+      <p:sp>
+        <p:nvSpPr>
+          <p:cNvPr id="12" name="TextBox 11"/>
           <p:cNvSpPr txBox="1"/>
           <p:nvPr/>
         </p:nvSpPr>
         <p:spPr>
           <a:xfrm>
-            <a:off x="6766560" y="2011680"/>
-            <a:ext cx="4572000" cy="2286000"/>
+            <a:off x="8595360" y="3291840"/>
+            <a:ext cx="2926080" cy="1645920"/>
           </a:xfrm>
           <a:prstGeom prst="rect">
             <a:avLst/>
@@ -4289,7 +5023,7 @@
           <a:p>
             <a:pPr>
               <a:spcAft>
-                <a:spcPts val="300"/>
+                <a:spcPts val="1000"/>
               </a:spcAft>
               <a:defRPr sz="1500">
                 <a:solidFill>
@@ -4299,13 +5033,13 @@
               </a:defRPr>
             </a:pPr>
             <a:r>
-              <a:t>• Deploy model in production with</a:t>
+              <a:t>Catch as much fraud as possible</a:t>
             </a:r>
           </a:p>
           <a:p>
             <a:pPr>
               <a:spcAft>
-                <a:spcPts val="300"/>
+                <a:spcPts val="1000"/>
               </a:spcAft>
               <a:defRPr sz="1500">
                 <a:solidFill>
@@ -4315,13 +5049,13 @@
               </a:defRPr>
             </a:pPr>
             <a:r>
-              <a:t>  real-time transaction scoring</a:t>
+              <a:t>Minimize false alarms</a:t>
             </a:r>
           </a:p>
           <a:p>
             <a:pPr>
               <a:spcAft>
-                <a:spcPts val="300"/>
+                <a:spcPts val="1000"/>
               </a:spcAft>
               <a:defRPr sz="1500">
                 <a:solidFill>
@@ -4330,11 +5064,14 @@
                 <a:latin typeface="Calibri"/>
               </a:defRPr>
             </a:pPr>
+            <a:r>
+              <a:t>Real-time decision making</a:t>
+            </a:r>
           </a:p>
           <a:p>
             <a:pPr>
               <a:spcAft>
-                <a:spcPts val="300"/>
+                <a:spcPts val="1000"/>
               </a:spcAft>
               <a:defRPr sz="1500">
                 <a:solidFill>
@@ -4344,113 +5081,7 @@
               </a:defRPr>
             </a:pPr>
             <a:r>
-              <a:t>• Set up automated monitoring to detect</a:t>
-            </a:r>
-          </a:p>
-          <a:p>
-            <a:pPr>
-              <a:spcAft>
-                <a:spcPts val="300"/>
-              </a:spcAft>
-              <a:defRPr sz="1500">
-                <a:solidFill>
-                  <a:srgbClr val="232F3E"/>
-                </a:solidFill>
-                <a:latin typeface="Calibri"/>
-              </a:defRPr>
-            </a:pPr>
-            <a:r>
-              <a:t>  when model performance degrades</a:t>
-            </a:r>
-          </a:p>
-          <a:p>
-            <a:pPr>
-              <a:spcAft>
-                <a:spcPts val="300"/>
-              </a:spcAft>
-              <a:defRPr sz="1500">
-                <a:solidFill>
-                  <a:srgbClr val="232F3E"/>
-                </a:solidFill>
-                <a:latin typeface="Calibri"/>
-              </a:defRPr>
-            </a:pPr>
-          </a:p>
-          <a:p>
-            <a:pPr>
-              <a:spcAft>
-                <a:spcPts val="300"/>
-              </a:spcAft>
-              <a:defRPr sz="1500">
-                <a:solidFill>
-                  <a:srgbClr val="232F3E"/>
-                </a:solidFill>
-                <a:latin typeface="Calibri"/>
-              </a:defRPr>
-            </a:pPr>
-            <a:r>
-              <a:t>• Run A/B test against current rule-based</a:t>
-            </a:r>
-          </a:p>
-          <a:p>
-            <a:pPr>
-              <a:spcAft>
-                <a:spcPts val="300"/>
-              </a:spcAft>
-              <a:defRPr sz="1500">
-                <a:solidFill>
-                  <a:srgbClr val="232F3E"/>
-                </a:solidFill>
-                <a:latin typeface="Calibri"/>
-              </a:defRPr>
-            </a:pPr>
-            <a:r>
-              <a:t>  fraud detection system</a:t>
-            </a:r>
-          </a:p>
-          <a:p>
-            <a:pPr>
-              <a:spcAft>
-                <a:spcPts val="300"/>
-              </a:spcAft>
-              <a:defRPr sz="1500">
-                <a:solidFill>
-                  <a:srgbClr val="232F3E"/>
-                </a:solidFill>
-                <a:latin typeface="Calibri"/>
-              </a:defRPr>
-            </a:pPr>
-          </a:p>
-          <a:p>
-            <a:pPr>
-              <a:spcAft>
-                <a:spcPts val="300"/>
-              </a:spcAft>
-              <a:defRPr sz="1500">
-                <a:solidFill>
-                  <a:srgbClr val="232F3E"/>
-                </a:solidFill>
-                <a:latin typeface="Calibri"/>
-              </a:defRPr>
-            </a:pPr>
-            <a:r>
-              <a:t>• Schedule quarterly model retraining</a:t>
-            </a:r>
-          </a:p>
-          <a:p>
-            <a:pPr>
-              <a:spcAft>
-                <a:spcPts val="300"/>
-              </a:spcAft>
-              <a:defRPr sz="1500">
-                <a:solidFill>
-                  <a:srgbClr val="232F3E"/>
-                </a:solidFill>
-                <a:latin typeface="Calibri"/>
-              </a:defRPr>
-            </a:pPr>
-            <a:r>
-              <a:t>  with latest transaction data</a:t>
+              <a:t>Fair treatment across all customers</a:t>
             </a:r>
           </a:p>
         </p:txBody>
@@ -4463,487 +5094,8 @@
 </p:sld>
 </file>
 
-<file path=ppt/slides/slide12.xml><?xml version="1.0" encoding="utf-8"?>
-<p:sld xmlns:a="http://schemas.openxmlformats.org/drawingml/2006/main" xmlns:p="http://schemas.openxmlformats.org/presentationml/2006/main" xmlns:r="http://schemas.openxmlformats.org/officeDocument/2006/relationships">
-  <p:cSld>
-    <p:bg>
-      <p:bgPr>
-        <a:solidFill>
-          <a:srgbClr val="1B2A4A"/>
-        </a:solidFill>
-        <a:effectLst/>
-      </p:bgPr>
-    </p:bg>
-    <p:spTree>
-      <p:nvGrpSpPr>
-        <p:cNvPr id="1" name=""/>
-        <p:cNvGrpSpPr/>
-        <p:nvPr/>
-      </p:nvGrpSpPr>
-      <p:grpSpPr/>
-      <p:sp>
-        <p:nvSpPr>
-          <p:cNvPr id="2" name="TextBox 1"/>
-          <p:cNvSpPr txBox="1"/>
-          <p:nvPr/>
-        </p:nvSpPr>
-        <p:spPr>
-          <a:xfrm>
-            <a:off x="914400" y="1371600"/>
-            <a:ext cx="10058400" cy="731520"/>
-          </a:xfrm>
-          <a:prstGeom prst="rect">
-            <a:avLst/>
-          </a:prstGeom>
-          <a:noFill/>
-        </p:spPr>
-        <p:txBody>
-          <a:bodyPr wrap="square">
-            <a:spAutoFit/>
-          </a:bodyPr>
-          <a:lstStyle/>
-          <a:p>
-            <a:pPr algn="ctr">
-              <a:defRPr sz="4000" b="1">
-                <a:solidFill>
-                  <a:srgbClr val="FFFFFF"/>
-                </a:solidFill>
-                <a:latin typeface="Calibri"/>
-              </a:defRPr>
-            </a:pPr>
-            <a:r>
-              <a:t>Summary</a:t>
-            </a:r>
-          </a:p>
-        </p:txBody>
-      </p:sp>
-      <p:sp>
-        <p:nvSpPr>
-          <p:cNvPr id="3" name="TextBox 2"/>
-          <p:cNvSpPr txBox="1"/>
-          <p:nvPr/>
-        </p:nvSpPr>
-        <p:spPr>
-          <a:xfrm>
-            <a:off x="914400" y="2560320"/>
-            <a:ext cx="10058400" cy="1371600"/>
-          </a:xfrm>
-          <a:prstGeom prst="rect">
-            <a:avLst/>
-          </a:prstGeom>
-          <a:noFill/>
-        </p:spPr>
-        <p:txBody>
-          <a:bodyPr wrap="square">
-            <a:spAutoFit/>
-          </a:bodyPr>
-          <a:lstStyle/>
-          <a:p>
-            <a:pPr algn="ctr">
-              <a:defRPr sz="2200" b="0">
-                <a:solidFill>
-                  <a:srgbClr val="FFFFFF"/>
-                </a:solidFill>
-                <a:latin typeface="Calibri"/>
-              </a:defRPr>
-            </a:pPr>
-            <a:r>
-              <a:t>We built an AI-powered fraud detection system that catches 88.7% of fraudulent transactions with 94.9% accuracy, while disrupting less than 0.03% of legitimate customers.</a:t>
-            </a:r>
-          </a:p>
-        </p:txBody>
-      </p:sp>
-      <p:sp>
-        <p:nvSpPr>
-          <p:cNvPr id="4" name="Rounded Rectangle 3"/>
-          <p:cNvSpPr/>
-          <p:nvPr/>
-        </p:nvSpPr>
-        <p:spPr>
-          <a:xfrm>
-            <a:off x="1371600" y="4114800"/>
-            <a:ext cx="2926080" cy="1371600"/>
-          </a:xfrm>
-          <a:prstGeom prst="roundRect">
-            <a:avLst/>
-          </a:prstGeom>
-          <a:solidFill>
-            <a:srgbClr val="243B5E"/>
-          </a:solidFill>
-          <a:ln>
-            <a:noFill/>
-          </a:ln>
-        </p:spPr>
-        <p:style>
-          <a:lnRef idx="1">
-            <a:schemeClr val="accent1"/>
-          </a:lnRef>
-          <a:fillRef idx="3">
-            <a:schemeClr val="accent1"/>
-          </a:fillRef>
-          <a:effectRef idx="2">
-            <a:schemeClr val="accent1"/>
-          </a:effectRef>
-          <a:fontRef idx="minor">
-            <a:schemeClr val="lt1"/>
-          </a:fontRef>
-        </p:style>
-        <p:txBody>
-          <a:bodyPr rtlCol="0" anchor="ctr"/>
-          <a:lstStyle/>
-          <a:p>
-            <a:pPr algn="ctr"/>
-          </a:p>
-        </p:txBody>
-      </p:sp>
-      <p:sp>
-        <p:nvSpPr>
-          <p:cNvPr id="5" name="TextBox 4"/>
-          <p:cNvSpPr txBox="1"/>
-          <p:nvPr/>
-        </p:nvSpPr>
-        <p:spPr>
-          <a:xfrm>
-            <a:off x="1371600" y="4206240"/>
-            <a:ext cx="2926080" cy="640080"/>
-          </a:xfrm>
-          <a:prstGeom prst="rect">
-            <a:avLst/>
-          </a:prstGeom>
-          <a:noFill/>
-        </p:spPr>
-        <p:txBody>
-          <a:bodyPr wrap="square">
-            <a:spAutoFit/>
-          </a:bodyPr>
-          <a:lstStyle/>
-          <a:p>
-            <a:pPr algn="ctr">
-              <a:defRPr sz="3600" b="1">
-                <a:solidFill>
-                  <a:srgbClr val="2ECC71"/>
-                </a:solidFill>
-                <a:latin typeface="Calibri"/>
-              </a:defRPr>
-            </a:pPr>
-            <a:r>
-              <a:t>88.7%</a:t>
-            </a:r>
-          </a:p>
-        </p:txBody>
-      </p:sp>
-      <p:sp>
-        <p:nvSpPr>
-          <p:cNvPr id="6" name="TextBox 5"/>
-          <p:cNvSpPr txBox="1"/>
-          <p:nvPr/>
-        </p:nvSpPr>
-        <p:spPr>
-          <a:xfrm>
-            <a:off x="1371600" y="4846320"/>
-            <a:ext cx="2926080" cy="457200"/>
-          </a:xfrm>
-          <a:prstGeom prst="rect">
-            <a:avLst/>
-          </a:prstGeom>
-          <a:noFill/>
-        </p:spPr>
-        <p:txBody>
-          <a:bodyPr wrap="square">
-            <a:spAutoFit/>
-          </a:bodyPr>
-          <a:lstStyle/>
-          <a:p>
-            <a:pPr algn="ctr">
-              <a:defRPr sz="1600" b="0">
-                <a:solidFill>
-                  <a:srgbClr val="FFFFFF"/>
-                </a:solidFill>
-                <a:latin typeface="Calibri"/>
-              </a:defRPr>
-            </a:pPr>
-            <a:r>
-              <a:t>Fraud Caught</a:t>
-            </a:r>
-          </a:p>
-        </p:txBody>
-      </p:sp>
-      <p:sp>
-        <p:nvSpPr>
-          <p:cNvPr id="7" name="Rounded Rectangle 6"/>
-          <p:cNvSpPr/>
-          <p:nvPr/>
-        </p:nvSpPr>
-        <p:spPr>
-          <a:xfrm>
-            <a:off x="4846320" y="4114800"/>
-            <a:ext cx="2926080" cy="1371600"/>
-          </a:xfrm>
-          <a:prstGeom prst="roundRect">
-            <a:avLst/>
-          </a:prstGeom>
-          <a:solidFill>
-            <a:srgbClr val="243B5E"/>
-          </a:solidFill>
-          <a:ln>
-            <a:noFill/>
-          </a:ln>
-        </p:spPr>
-        <p:style>
-          <a:lnRef idx="1">
-            <a:schemeClr val="accent1"/>
-          </a:lnRef>
-          <a:fillRef idx="3">
-            <a:schemeClr val="accent1"/>
-          </a:fillRef>
-          <a:effectRef idx="2">
-            <a:schemeClr val="accent1"/>
-          </a:effectRef>
-          <a:fontRef idx="minor">
-            <a:schemeClr val="lt1"/>
-          </a:fontRef>
-        </p:style>
-        <p:txBody>
-          <a:bodyPr rtlCol="0" anchor="ctr"/>
-          <a:lstStyle/>
-          <a:p>
-            <a:pPr algn="ctr"/>
-          </a:p>
-        </p:txBody>
-      </p:sp>
-      <p:sp>
-        <p:nvSpPr>
-          <p:cNvPr id="8" name="TextBox 7"/>
-          <p:cNvSpPr txBox="1"/>
-          <p:nvPr/>
-        </p:nvSpPr>
-        <p:spPr>
-          <a:xfrm>
-            <a:off x="4846320" y="4206240"/>
-            <a:ext cx="2926080" cy="640080"/>
-          </a:xfrm>
-          <a:prstGeom prst="rect">
-            <a:avLst/>
-          </a:prstGeom>
-          <a:noFill/>
-        </p:spPr>
-        <p:txBody>
-          <a:bodyPr wrap="square">
-            <a:spAutoFit/>
-          </a:bodyPr>
-          <a:lstStyle/>
-          <a:p>
-            <a:pPr algn="ctr">
-              <a:defRPr sz="3600" b="1">
-                <a:solidFill>
-                  <a:srgbClr val="00A3E0"/>
-                </a:solidFill>
-                <a:latin typeface="Calibri"/>
-              </a:defRPr>
-            </a:pPr>
-            <a:r>
-              <a:t>94.9%</a:t>
-            </a:r>
-          </a:p>
-        </p:txBody>
-      </p:sp>
-      <p:sp>
-        <p:nvSpPr>
-          <p:cNvPr id="9" name="TextBox 8"/>
-          <p:cNvSpPr txBox="1"/>
-          <p:nvPr/>
-        </p:nvSpPr>
-        <p:spPr>
-          <a:xfrm>
-            <a:off x="4846320" y="4846320"/>
-            <a:ext cx="2926080" cy="457200"/>
-          </a:xfrm>
-          <a:prstGeom prst="rect">
-            <a:avLst/>
-          </a:prstGeom>
-          <a:noFill/>
-        </p:spPr>
-        <p:txBody>
-          <a:bodyPr wrap="square">
-            <a:spAutoFit/>
-          </a:bodyPr>
-          <a:lstStyle/>
-          <a:p>
-            <a:pPr algn="ctr">
-              <a:defRPr sz="1600" b="0">
-                <a:solidFill>
-                  <a:srgbClr val="FFFFFF"/>
-                </a:solidFill>
-                <a:latin typeface="Calibri"/>
-              </a:defRPr>
-            </a:pPr>
-            <a:r>
-              <a:t>Alert Accuracy</a:t>
-            </a:r>
-          </a:p>
-        </p:txBody>
-      </p:sp>
-      <p:sp>
-        <p:nvSpPr>
-          <p:cNvPr id="10" name="Rounded Rectangle 9"/>
-          <p:cNvSpPr/>
-          <p:nvPr/>
-        </p:nvSpPr>
-        <p:spPr>
-          <a:xfrm>
-            <a:off x="8321040" y="4114800"/>
-            <a:ext cx="2926080" cy="1371600"/>
-          </a:xfrm>
-          <a:prstGeom prst="roundRect">
-            <a:avLst/>
-          </a:prstGeom>
-          <a:solidFill>
-            <a:srgbClr val="243B5E"/>
-          </a:solidFill>
-          <a:ln>
-            <a:noFill/>
-          </a:ln>
-        </p:spPr>
-        <p:style>
-          <a:lnRef idx="1">
-            <a:schemeClr val="accent1"/>
-          </a:lnRef>
-          <a:fillRef idx="3">
-            <a:schemeClr val="accent1"/>
-          </a:fillRef>
-          <a:effectRef idx="2">
-            <a:schemeClr val="accent1"/>
-          </a:effectRef>
-          <a:fontRef idx="minor">
-            <a:schemeClr val="lt1"/>
-          </a:fontRef>
-        </p:style>
-        <p:txBody>
-          <a:bodyPr rtlCol="0" anchor="ctr"/>
-          <a:lstStyle/>
-          <a:p>
-            <a:pPr algn="ctr"/>
-          </a:p>
-        </p:txBody>
-      </p:sp>
-      <p:sp>
-        <p:nvSpPr>
-          <p:cNvPr id="11" name="TextBox 10"/>
-          <p:cNvSpPr txBox="1"/>
-          <p:nvPr/>
-        </p:nvSpPr>
-        <p:spPr>
-          <a:xfrm>
-            <a:off x="8321040" y="4206240"/>
-            <a:ext cx="2926080" cy="640080"/>
-          </a:xfrm>
-          <a:prstGeom prst="rect">
-            <a:avLst/>
-          </a:prstGeom>
-          <a:noFill/>
-        </p:spPr>
-        <p:txBody>
-          <a:bodyPr wrap="square">
-            <a:spAutoFit/>
-          </a:bodyPr>
-          <a:lstStyle/>
-          <a:p>
-            <a:pPr algn="ctr">
-              <a:defRPr sz="3600" b="1">
-                <a:solidFill>
-                  <a:srgbClr val="FF9900"/>
-                </a:solidFill>
-                <a:latin typeface="Calibri"/>
-              </a:defRPr>
-            </a:pPr>
-            <a:r>
-              <a:t>99.97%</a:t>
-            </a:r>
-          </a:p>
-        </p:txBody>
-      </p:sp>
-      <p:sp>
-        <p:nvSpPr>
-          <p:cNvPr id="12" name="TextBox 11"/>
-          <p:cNvSpPr txBox="1"/>
-          <p:nvPr/>
-        </p:nvSpPr>
-        <p:spPr>
-          <a:xfrm>
-            <a:off x="8321040" y="4846320"/>
-            <a:ext cx="2926080" cy="457200"/>
-          </a:xfrm>
-          <a:prstGeom prst="rect">
-            <a:avLst/>
-          </a:prstGeom>
-          <a:noFill/>
-        </p:spPr>
-        <p:txBody>
-          <a:bodyPr wrap="square">
-            <a:spAutoFit/>
-          </a:bodyPr>
-          <a:lstStyle/>
-          <a:p>
-            <a:pPr algn="ctr">
-              <a:defRPr sz="1600" b="0">
-                <a:solidFill>
-                  <a:srgbClr val="FFFFFF"/>
-                </a:solidFill>
-                <a:latin typeface="Calibri"/>
-              </a:defRPr>
-            </a:pPr>
-            <a:r>
-              <a:t>Customers Unaffected</a:t>
-            </a:r>
-          </a:p>
-        </p:txBody>
-      </p:sp>
-      <p:sp>
-        <p:nvSpPr>
-          <p:cNvPr id="13" name="TextBox 12"/>
-          <p:cNvSpPr txBox="1"/>
-          <p:nvPr/>
-        </p:nvSpPr>
-        <p:spPr>
-          <a:xfrm>
-            <a:off x="914400" y="5943600"/>
-            <a:ext cx="10058400" cy="457200"/>
-          </a:xfrm>
-          <a:prstGeom prst="rect">
-            <a:avLst/>
-          </a:prstGeom>
-          <a:noFill/>
-        </p:spPr>
-        <p:txBody>
-          <a:bodyPr wrap="square">
-            <a:spAutoFit/>
-          </a:bodyPr>
-          <a:lstStyle/>
-          <a:p>
-            <a:pPr algn="ctr">
-              <a:defRPr sz="1800" b="0">
-                <a:solidFill>
-                  <a:srgbClr val="AABBCC"/>
-                </a:solidFill>
-                <a:latin typeface="Calibri"/>
-              </a:defRPr>
-            </a:pPr>
-            <a:r>
-              <a:t>The model is explainable, audited for fairness, and ready for production deployment.</a:t>
-            </a:r>
-          </a:p>
-        </p:txBody>
-      </p:sp>
-    </p:spTree>
-  </p:cSld>
-  <p:clrMapOvr>
-    <a:masterClrMapping/>
-  </p:clrMapOvr>
-</p:sld>
-</file>
-
-<file path=ppt/slides/slide2.xml><?xml version="1.0" encoding="utf-8"?>
-<p:sld xmlns:a="http://schemas.openxmlformats.org/drawingml/2006/main" xmlns:p="http://schemas.openxmlformats.org/presentationml/2006/main" xmlns:r="http://schemas.openxmlformats.org/officeDocument/2006/relationships">
+<file path=ppt/slides/slide3.xml><?xml version="1.0" encoding="utf-8"?>
+<p:sld xmlns:a="http://schemas.openxmlformats.org/drawingml/2006/main" xmlns:r="http://schemas.openxmlformats.org/officeDocument/2006/relationships" xmlns:p="http://schemas.openxmlformats.org/presentationml/2006/main">
   <p:cSld>
     <p:bg>
       <p:bgPr>
@@ -4959,7 +5111,14 @@
         <p:cNvGrpSpPr/>
         <p:nvPr/>
       </p:nvGrpSpPr>
-      <p:grpSpPr/>
+      <p:grpSpPr>
+        <a:xfrm>
+          <a:off x="0" y="0"/>
+          <a:ext cx="0" cy="0"/>
+          <a:chOff x="0" y="0"/>
+          <a:chExt cx="0" cy="0"/>
+        </a:xfrm>
+      </p:grpSpPr>
       <p:sp>
         <p:nvSpPr>
           <p:cNvPr id="2" name="Rounded Rectangle 1"/>
@@ -4996,7 +5155,7 @@
           </a:fontRef>
         </p:style>
         <p:txBody>
-          <a:bodyPr rtlCol="0" anchor="ctr" wrap="square"/>
+          <a:bodyPr wrap="square" rtlCol="0" anchor="ctr"/>
           <a:lstStyle/>
           <a:p>
             <a:pPr algn="ctr">
@@ -5008,7 +5167,7 @@
               </a:defRPr>
             </a:pPr>
             <a:r>
-              <a:t>The Challenge</a:t>
+              <a:t>Our Approach</a:t>
             </a:r>
           </a:p>
         </p:txBody>
@@ -5022,7 +5181,7 @@
         <p:spPr>
           <a:xfrm>
             <a:off x="731520" y="1188720"/>
-            <a:ext cx="10515600" cy="1097280"/>
+            <a:ext cx="10515600" cy="731520"/>
           </a:xfrm>
           <a:prstGeom prst="rect">
             <a:avLst/>
@@ -5044,7 +5203,7 @@
               </a:defRPr>
             </a:pPr>
             <a:r>
-              <a:t>Credit card fraud costs the financial industry billions annually. As digital payments grow, so do fraudulent attacks. Customers who are charged for purchases they didn't make lose trust. The challenge: catch fraud quickly without disrupting legitimate transactions.</a:t>
+              <a:t>We built an AI model that learns from millions of past transactions to identify patterns that distinguish fraudulent activity from legitimate purchases.</a:t>
             </a:r>
           </a:p>
         </p:txBody>
@@ -5057,14 +5216,14 @@
         </p:nvSpPr>
         <p:spPr>
           <a:xfrm>
-            <a:off x="731520" y="2743200"/>
-            <a:ext cx="3200400" cy="2286000"/>
+            <a:off x="731520" y="2560320"/>
+            <a:ext cx="2560320" cy="2286000"/>
           </a:xfrm>
           <a:prstGeom prst="roundRect">
             <a:avLst/>
           </a:prstGeom>
           <a:solidFill>
-            <a:srgbClr val="FDE8E8"/>
+            <a:srgbClr val="E8F4FD"/>
           </a:solidFill>
           <a:ln>
             <a:noFill/>
@@ -5089,6 +5248,7 @@
           <a:lstStyle/>
           <a:p>
             <a:pPr algn="ctr"/>
+            <a:endParaRPr/>
           </a:p>
         </p:txBody>
       </p:sp>
@@ -5100,8 +5260,8 @@
         </p:nvSpPr>
         <p:spPr>
           <a:xfrm>
-            <a:off x="914400" y="2834640"/>
-            <a:ext cx="2926080" cy="365760"/>
+            <a:off x="731520" y="2651760"/>
+            <a:ext cx="2560320" cy="731520"/>
           </a:xfrm>
           <a:prstGeom prst="rect">
             <a:avLst/>
@@ -5117,13 +5277,17 @@
             <a:pPr algn="ctr">
               <a:defRPr sz="1800" b="1">
                 <a:solidFill>
-                  <a:srgbClr val="E74C3C"/>
-                </a:solidFill>
-                <a:latin typeface="Calibri"/>
-              </a:defRPr>
-            </a:pPr>
-            <a:r>
-              <a:t>The Cost of Missed Fraud</a:t>
+                  <a:srgbClr val="00A3E0"/>
+                </a:solidFill>
+                <a:latin typeface="Calibri"/>
+              </a:defRPr>
+            </a:pPr>
+            <a:r>
+              <a:t>Analyze</a:t>
+            </a:r>
+            <a:br/>
+            <a:r>
+              <a:t>Historical Data</a:t>
             </a:r>
           </a:p>
         </p:txBody>
@@ -5136,8 +5300,8 @@
         </p:nvSpPr>
         <p:spPr>
           <a:xfrm>
-            <a:off x="914400" y="3291840"/>
-            <a:ext cx="2926080" cy="1645920"/>
+            <a:off x="731520" y="3474720"/>
+            <a:ext cx="2560320" cy="914400"/>
           </a:xfrm>
           <a:prstGeom prst="rect">
             <a:avLst/>
@@ -5150,11 +5314,8 @@
           </a:bodyPr>
           <a:lstStyle/>
           <a:p>
-            <a:pPr>
-              <a:spcAft>
-                <a:spcPts val="1000"/>
-              </a:spcAft>
-              <a:defRPr sz="1500">
+            <a:pPr algn="ctr">
+              <a:defRPr sz="1400" b="0">
                 <a:solidFill>
                   <a:srgbClr val="232F3E"/>
                 </a:solidFill>
@@ -5162,69 +5323,61 @@
               </a:defRPr>
             </a:pPr>
             <a:r>
-              <a:t>Financial losses to the company</a:t>
-            </a:r>
-          </a:p>
-          <a:p>
-            <a:pPr>
-              <a:spcAft>
-                <a:spcPts val="1000"/>
-              </a:spcAft>
-              <a:defRPr sz="1500">
-                <a:solidFill>
-                  <a:srgbClr val="232F3E"/>
-                </a:solidFill>
-                <a:latin typeface="Calibri"/>
-              </a:defRPr>
-            </a:pPr>
-            <a:r>
-              <a:t>Chargebacks and disputes</a:t>
-            </a:r>
-          </a:p>
-          <a:p>
-            <a:pPr>
-              <a:spcAft>
-                <a:spcPts val="1000"/>
-              </a:spcAft>
-              <a:defRPr sz="1500">
-                <a:solidFill>
-                  <a:srgbClr val="232F3E"/>
-                </a:solidFill>
-                <a:latin typeface="Calibri"/>
-              </a:defRPr>
-            </a:pPr>
-            <a:r>
-              <a:t>Damaged customer trust</a:t>
-            </a:r>
-          </a:p>
-          <a:p>
-            <a:pPr>
-              <a:spcAft>
-                <a:spcPts val="1000"/>
-              </a:spcAft>
-              <a:defRPr sz="1500">
-                <a:solidFill>
-                  <a:srgbClr val="232F3E"/>
-                </a:solidFill>
-                <a:latin typeface="Calibri"/>
-              </a:defRPr>
-            </a:pPr>
-            <a:r>
-              <a:t>Regulatory scrutiny</a:t>
-            </a:r>
-          </a:p>
-        </p:txBody>
-      </p:sp>
-      <p:sp>
-        <p:nvSpPr>
-          <p:cNvPr id="7" name="Rounded Rectangle 6"/>
+              <a:t>Study millions of</a:t>
+            </a:r>
+            <a:br/>
+            <a:r>
+              <a:t>past transactions</a:t>
+            </a:r>
+          </a:p>
+        </p:txBody>
+      </p:sp>
+      <p:sp>
+        <p:nvSpPr>
+          <p:cNvPr id="7" name="TextBox 6"/>
+          <p:cNvSpPr txBox="1"/>
+          <p:nvPr/>
+        </p:nvSpPr>
+        <p:spPr>
+          <a:xfrm>
+            <a:off x="3200400" y="3200400"/>
+            <a:ext cx="457200" cy="457200"/>
+          </a:xfrm>
+          <a:prstGeom prst="rect">
+            <a:avLst/>
+          </a:prstGeom>
+          <a:noFill/>
+        </p:spPr>
+        <p:txBody>
+          <a:bodyPr wrap="square">
+            <a:spAutoFit/>
+          </a:bodyPr>
+          <a:lstStyle/>
+          <a:p>
+            <a:pPr algn="ctr">
+              <a:defRPr sz="2800" b="1">
+                <a:solidFill>
+                  <a:srgbClr val="00A3E0"/>
+                </a:solidFill>
+                <a:latin typeface="Calibri"/>
+              </a:defRPr>
+            </a:pPr>
+            <a:r>
+              <a:t>→</a:t>
+            </a:r>
+          </a:p>
+        </p:txBody>
+      </p:sp>
+      <p:sp>
+        <p:nvSpPr>
+          <p:cNvPr id="8" name="Rounded Rectangle 7"/>
           <p:cNvSpPr/>
           <p:nvPr/>
         </p:nvSpPr>
         <p:spPr>
           <a:xfrm>
-            <a:off x="4572000" y="2743200"/>
-            <a:ext cx="3200400" cy="2286000"/>
+            <a:off x="3566160" y="2560320"/>
+            <a:ext cx="2560320" cy="2286000"/>
           </a:xfrm>
           <a:prstGeom prst="roundRect">
             <a:avLst/>
@@ -5255,19 +5408,20 @@
           <a:lstStyle/>
           <a:p>
             <a:pPr algn="ctr"/>
-          </a:p>
-        </p:txBody>
-      </p:sp>
-      <p:sp>
-        <p:nvSpPr>
-          <p:cNvPr id="8" name="TextBox 7"/>
+            <a:endParaRPr/>
+          </a:p>
+        </p:txBody>
+      </p:sp>
+      <p:sp>
+        <p:nvSpPr>
+          <p:cNvPr id="9" name="TextBox 8"/>
           <p:cNvSpPr txBox="1"/>
           <p:nvPr/>
         </p:nvSpPr>
         <p:spPr>
           <a:xfrm>
-            <a:off x="4754880" y="2834640"/>
-            <a:ext cx="2926080" cy="365760"/>
+            <a:off x="3566160" y="2651760"/>
+            <a:ext cx="2560320" cy="731520"/>
           </a:xfrm>
           <a:prstGeom prst="rect">
             <a:avLst/>
@@ -5289,21 +5443,25 @@
               </a:defRPr>
             </a:pPr>
             <a:r>
-              <a:t>The Cost of False Alarms</a:t>
-            </a:r>
-          </a:p>
-        </p:txBody>
-      </p:sp>
-      <p:sp>
-        <p:nvSpPr>
-          <p:cNvPr id="9" name="TextBox 8"/>
+              <a:t>Learn</a:t>
+            </a:r>
+            <a:br/>
+            <a:r>
+              <a:t>Fraud Patterns</a:t>
+            </a:r>
+          </a:p>
+        </p:txBody>
+      </p:sp>
+      <p:sp>
+        <p:nvSpPr>
+          <p:cNvPr id="10" name="TextBox 9"/>
           <p:cNvSpPr txBox="1"/>
           <p:nvPr/>
         </p:nvSpPr>
         <p:spPr>
           <a:xfrm>
-            <a:off x="4754880" y="3291840"/>
-            <a:ext cx="2926080" cy="1645920"/>
+            <a:off x="3566160" y="3474720"/>
+            <a:ext cx="2560320" cy="914400"/>
           </a:xfrm>
           <a:prstGeom prst="rect">
             <a:avLst/>
@@ -5316,11 +5474,8 @@
           </a:bodyPr>
           <a:lstStyle/>
           <a:p>
-            <a:pPr>
-              <a:spcAft>
-                <a:spcPts val="1000"/>
-              </a:spcAft>
-              <a:defRPr sz="1500">
+            <a:pPr algn="ctr">
+              <a:defRPr sz="1400" b="0">
                 <a:solidFill>
                   <a:srgbClr val="232F3E"/>
                 </a:solidFill>
@@ -5328,69 +5483,61 @@
               </a:defRPr>
             </a:pPr>
             <a:r>
-              <a:t>Legitimate purchases blocked</a:t>
-            </a:r>
-          </a:p>
-          <a:p>
-            <a:pPr>
-              <a:spcAft>
-                <a:spcPts val="1000"/>
-              </a:spcAft>
-              <a:defRPr sz="1500">
-                <a:solidFill>
-                  <a:srgbClr val="232F3E"/>
-                </a:solidFill>
-                <a:latin typeface="Calibri"/>
-              </a:defRPr>
-            </a:pPr>
-            <a:r>
-              <a:t>Frustrated customers</a:t>
-            </a:r>
-          </a:p>
-          <a:p>
-            <a:pPr>
-              <a:spcAft>
-                <a:spcPts val="1000"/>
-              </a:spcAft>
-              <a:defRPr sz="1500">
-                <a:solidFill>
-                  <a:srgbClr val="232F3E"/>
-                </a:solidFill>
-                <a:latin typeface="Calibri"/>
-              </a:defRPr>
-            </a:pPr>
-            <a:r>
-              <a:t>Increased call center volume</a:t>
-            </a:r>
-          </a:p>
-          <a:p>
-            <a:pPr>
-              <a:spcAft>
-                <a:spcPts val="1000"/>
-              </a:spcAft>
-              <a:defRPr sz="1500">
-                <a:solidFill>
-                  <a:srgbClr val="232F3E"/>
-                </a:solidFill>
-                <a:latin typeface="Calibri"/>
-              </a:defRPr>
-            </a:pPr>
-            <a:r>
-              <a:t>Customer churn</a:t>
-            </a:r>
-          </a:p>
-        </p:txBody>
-      </p:sp>
-      <p:sp>
-        <p:nvSpPr>
-          <p:cNvPr id="10" name="Rounded Rectangle 9"/>
+              <a:t>AI identifies what</a:t>
+            </a:r>
+            <a:br/>
+            <a:r>
+              <a:t>fraud looks like</a:t>
+            </a:r>
+          </a:p>
+        </p:txBody>
+      </p:sp>
+      <p:sp>
+        <p:nvSpPr>
+          <p:cNvPr id="11" name="TextBox 10"/>
+          <p:cNvSpPr txBox="1"/>
+          <p:nvPr/>
+        </p:nvSpPr>
+        <p:spPr>
+          <a:xfrm>
+            <a:off x="6035040" y="3200400"/>
+            <a:ext cx="457200" cy="457200"/>
+          </a:xfrm>
+          <a:prstGeom prst="rect">
+            <a:avLst/>
+          </a:prstGeom>
+          <a:noFill/>
+        </p:spPr>
+        <p:txBody>
+          <a:bodyPr wrap="square">
+            <a:spAutoFit/>
+          </a:bodyPr>
+          <a:lstStyle/>
+          <a:p>
+            <a:pPr algn="ctr">
+              <a:defRPr sz="2800" b="1">
+                <a:solidFill>
+                  <a:srgbClr val="00A3E0"/>
+                </a:solidFill>
+                <a:latin typeface="Calibri"/>
+              </a:defRPr>
+            </a:pPr>
+            <a:r>
+              <a:t>→</a:t>
+            </a:r>
+          </a:p>
+        </p:txBody>
+      </p:sp>
+      <p:sp>
+        <p:nvSpPr>
+          <p:cNvPr id="12" name="Rounded Rectangle 11"/>
           <p:cNvSpPr/>
           <p:nvPr/>
         </p:nvSpPr>
         <p:spPr>
           <a:xfrm>
-            <a:off x="8412480" y="2743200"/>
-            <a:ext cx="3200400" cy="2286000"/>
+            <a:off x="6400800" y="2560320"/>
+            <a:ext cx="2560320" cy="2286000"/>
           </a:xfrm>
           <a:prstGeom prst="roundRect">
             <a:avLst/>
@@ -5421,19 +5568,20 @@
           <a:lstStyle/>
           <a:p>
             <a:pPr algn="ctr"/>
-          </a:p>
-        </p:txBody>
-      </p:sp>
-      <p:sp>
-        <p:nvSpPr>
-          <p:cNvPr id="11" name="TextBox 10"/>
+            <a:endParaRPr/>
+          </a:p>
+        </p:txBody>
+      </p:sp>
+      <p:sp>
+        <p:nvSpPr>
+          <p:cNvPr id="13" name="TextBox 12"/>
           <p:cNvSpPr txBox="1"/>
           <p:nvPr/>
         </p:nvSpPr>
         <p:spPr>
           <a:xfrm>
-            <a:off x="8595360" y="2834640"/>
-            <a:ext cx="2926080" cy="365760"/>
+            <a:off x="6400800" y="2651760"/>
+            <a:ext cx="2560320" cy="731520"/>
           </a:xfrm>
           <a:prstGeom prst="rect">
             <a:avLst/>
@@ -5455,21 +5603,25 @@
               </a:defRPr>
             </a:pPr>
             <a:r>
-              <a:t>The Goal</a:t>
-            </a:r>
-          </a:p>
-        </p:txBody>
-      </p:sp>
-      <p:sp>
-        <p:nvSpPr>
-          <p:cNvPr id="12" name="TextBox 11"/>
+              <a:t>Score Every</a:t>
+            </a:r>
+            <a:br/>
+            <a:r>
+              <a:t>Transaction</a:t>
+            </a:r>
+          </a:p>
+        </p:txBody>
+      </p:sp>
+      <p:sp>
+        <p:nvSpPr>
+          <p:cNvPr id="14" name="TextBox 13"/>
           <p:cNvSpPr txBox="1"/>
           <p:nvPr/>
         </p:nvSpPr>
         <p:spPr>
           <a:xfrm>
-            <a:off x="8595360" y="3291840"/>
-            <a:ext cx="2926080" cy="1645920"/>
+            <a:off x="6400800" y="3474720"/>
+            <a:ext cx="2560320" cy="914400"/>
           </a:xfrm>
           <a:prstGeom prst="rect">
             <a:avLst/>
@@ -5482,11 +5634,8 @@
           </a:bodyPr>
           <a:lstStyle/>
           <a:p>
-            <a:pPr>
-              <a:spcAft>
-                <a:spcPts val="1000"/>
-              </a:spcAft>
-              <a:defRPr sz="1500">
+            <a:pPr algn="ctr">
+              <a:defRPr sz="1400" b="0">
                 <a:solidFill>
                   <a:srgbClr val="232F3E"/>
                 </a:solidFill>
@@ -5494,15 +5643,159 @@
               </a:defRPr>
             </a:pPr>
             <a:r>
-              <a:t>Catch as much fraud as possible</a:t>
-            </a:r>
-          </a:p>
-          <a:p>
-            <a:pPr>
-              <a:spcAft>
-                <a:spcPts val="1000"/>
-              </a:spcAft>
-              <a:defRPr sz="1500">
+              <a:t>Each transaction gets</a:t>
+            </a:r>
+            <a:br/>
+            <a:r>
+              <a:t>a fraud risk score</a:t>
+            </a:r>
+          </a:p>
+        </p:txBody>
+      </p:sp>
+      <p:sp>
+        <p:nvSpPr>
+          <p:cNvPr id="15" name="TextBox 14"/>
+          <p:cNvSpPr txBox="1"/>
+          <p:nvPr/>
+        </p:nvSpPr>
+        <p:spPr>
+          <a:xfrm>
+            <a:off x="8869680" y="3200400"/>
+            <a:ext cx="457200" cy="457200"/>
+          </a:xfrm>
+          <a:prstGeom prst="rect">
+            <a:avLst/>
+          </a:prstGeom>
+          <a:noFill/>
+        </p:spPr>
+        <p:txBody>
+          <a:bodyPr wrap="square">
+            <a:spAutoFit/>
+          </a:bodyPr>
+          <a:lstStyle/>
+          <a:p>
+            <a:pPr algn="ctr">
+              <a:defRPr sz="2800" b="1">
+                <a:solidFill>
+                  <a:srgbClr val="00A3E0"/>
+                </a:solidFill>
+                <a:latin typeface="Calibri"/>
+              </a:defRPr>
+            </a:pPr>
+            <a:r>
+              <a:t>→</a:t>
+            </a:r>
+          </a:p>
+        </p:txBody>
+      </p:sp>
+      <p:sp>
+        <p:nvSpPr>
+          <p:cNvPr id="16" name="Rounded Rectangle 15"/>
+          <p:cNvSpPr/>
+          <p:nvPr/>
+        </p:nvSpPr>
+        <p:spPr>
+          <a:xfrm>
+            <a:off x="9235440" y="2560320"/>
+            <a:ext cx="2560320" cy="2286000"/>
+          </a:xfrm>
+          <a:prstGeom prst="roundRect">
+            <a:avLst/>
+          </a:prstGeom>
+          <a:solidFill>
+            <a:srgbClr val="F0E8FD"/>
+          </a:solidFill>
+          <a:ln>
+            <a:noFill/>
+          </a:ln>
+        </p:spPr>
+        <p:style>
+          <a:lnRef idx="1">
+            <a:schemeClr val="accent1"/>
+          </a:lnRef>
+          <a:fillRef idx="3">
+            <a:schemeClr val="accent1"/>
+          </a:fillRef>
+          <a:effectRef idx="2">
+            <a:schemeClr val="accent1"/>
+          </a:effectRef>
+          <a:fontRef idx="minor">
+            <a:schemeClr val="lt1"/>
+          </a:fontRef>
+        </p:style>
+        <p:txBody>
+          <a:bodyPr rtlCol="0" anchor="ctr"/>
+          <a:lstStyle/>
+          <a:p>
+            <a:pPr algn="ctr"/>
+            <a:endParaRPr/>
+          </a:p>
+        </p:txBody>
+      </p:sp>
+      <p:sp>
+        <p:nvSpPr>
+          <p:cNvPr id="17" name="TextBox 16"/>
+          <p:cNvSpPr txBox="1"/>
+          <p:nvPr/>
+        </p:nvSpPr>
+        <p:spPr>
+          <a:xfrm>
+            <a:off x="9235440" y="2651760"/>
+            <a:ext cx="2560320" cy="731520"/>
+          </a:xfrm>
+          <a:prstGeom prst="rect">
+            <a:avLst/>
+          </a:prstGeom>
+          <a:noFill/>
+        </p:spPr>
+        <p:txBody>
+          <a:bodyPr wrap="square">
+            <a:spAutoFit/>
+          </a:bodyPr>
+          <a:lstStyle/>
+          <a:p>
+            <a:pPr algn="ctr">
+              <a:defRPr sz="1800" b="1">
+                <a:solidFill>
+                  <a:srgbClr val="8E44AD"/>
+                </a:solidFill>
+                <a:latin typeface="Calibri"/>
+              </a:defRPr>
+            </a:pPr>
+            <a:r>
+              <a:t>Flag</a:t>
+            </a:r>
+            <a:br/>
+            <a:r>
+              <a:t>Suspicious Activity</a:t>
+            </a:r>
+          </a:p>
+        </p:txBody>
+      </p:sp>
+      <p:sp>
+        <p:nvSpPr>
+          <p:cNvPr id="18" name="TextBox 17"/>
+          <p:cNvSpPr txBox="1"/>
+          <p:nvPr/>
+        </p:nvSpPr>
+        <p:spPr>
+          <a:xfrm>
+            <a:off x="9235440" y="3474720"/>
+            <a:ext cx="2560320" cy="914400"/>
+          </a:xfrm>
+          <a:prstGeom prst="rect">
+            <a:avLst/>
+          </a:prstGeom>
+          <a:noFill/>
+        </p:spPr>
+        <p:txBody>
+          <a:bodyPr wrap="square">
+            <a:spAutoFit/>
+          </a:bodyPr>
+          <a:lstStyle/>
+          <a:p>
+            <a:pPr algn="ctr">
+              <a:defRPr sz="1400" b="0">
                 <a:solidFill>
                   <a:srgbClr val="232F3E"/>
                 </a:solidFill>
@@ -5510,39 +5803,48 @@
               </a:defRPr>
             </a:pPr>
             <a:r>
-              <a:t>Minimize false alarms</a:t>
-            </a:r>
-          </a:p>
-          <a:p>
-            <a:pPr>
-              <a:spcAft>
-                <a:spcPts val="1000"/>
-              </a:spcAft>
-              <a:defRPr sz="1500">
-                <a:solidFill>
-                  <a:srgbClr val="232F3E"/>
-                </a:solidFill>
-                <a:latin typeface="Calibri"/>
-              </a:defRPr>
-            </a:pPr>
-            <a:r>
-              <a:t>Real-time decision making</a:t>
-            </a:r>
-          </a:p>
-          <a:p>
-            <a:pPr>
-              <a:spcAft>
-                <a:spcPts val="1000"/>
-              </a:spcAft>
-              <a:defRPr sz="1500">
-                <a:solidFill>
-                  <a:srgbClr val="232F3E"/>
-                </a:solidFill>
-                <a:latin typeface="Calibri"/>
-              </a:defRPr>
-            </a:pPr>
-            <a:r>
-              <a:t>Fair treatment across all customers</a:t>
+              <a:t>High-risk transactions</a:t>
+            </a:r>
+            <a:br/>
+            <a:r>
+              <a:t>are flagged for review</a:t>
+            </a:r>
+          </a:p>
+        </p:txBody>
+      </p:sp>
+      <p:sp>
+        <p:nvSpPr>
+          <p:cNvPr id="19" name="TextBox 18"/>
+          <p:cNvSpPr txBox="1"/>
+          <p:nvPr/>
+        </p:nvSpPr>
+        <p:spPr>
+          <a:xfrm>
+            <a:off x="731520" y="5303520"/>
+            <a:ext cx="10515600" cy="457200"/>
+          </a:xfrm>
+          <a:prstGeom prst="rect">
+            <a:avLst/>
+          </a:prstGeom>
+          <a:noFill/>
+        </p:spPr>
+        <p:txBody>
+          <a:bodyPr wrap="square">
+            <a:spAutoFit/>
+          </a:bodyPr>
+          <a:lstStyle/>
+          <a:p>
+            <a:pPr algn="l">
+              <a:defRPr sz="1600" b="0">
+                <a:solidFill>
+                  <a:srgbClr val="7F8C8D"/>
+                </a:solidFill>
+                <a:latin typeface="Calibri"/>
+              </a:defRPr>
+            </a:pPr>
+            <a:r>
+              <a:rPr dirty="0"/>
+              <a:t>The model evaluates 15 key signals per transaction including amount, merchant, time of day, location, and customer profile.</a:t>
             </a:r>
           </a:p>
         </p:txBody>
@@ -5555,8 +5857,8 @@
 </p:sld>
 </file>
 
-<file path=ppt/slides/slide3.xml><?xml version="1.0" encoding="utf-8"?>
-<p:sld xmlns:a="http://schemas.openxmlformats.org/drawingml/2006/main" xmlns:p="http://schemas.openxmlformats.org/presentationml/2006/main" xmlns:r="http://schemas.openxmlformats.org/officeDocument/2006/relationships">
+<file path=ppt/slides/slide4.xml><?xml version="1.0" encoding="utf-8"?>
+<p:sld xmlns:a="http://schemas.openxmlformats.org/drawingml/2006/main" xmlns:r="http://schemas.openxmlformats.org/officeDocument/2006/relationships" xmlns:p="http://schemas.openxmlformats.org/presentationml/2006/main">
   <p:cSld>
     <p:bg>
       <p:bgPr>
@@ -5572,7 +5874,14 @@
         <p:cNvGrpSpPr/>
         <p:nvPr/>
       </p:nvGrpSpPr>
-      <p:grpSpPr/>
+      <p:grpSpPr>
+        <a:xfrm>
+          <a:off x="0" y="0"/>
+          <a:ext cx="0" cy="0"/>
+          <a:chOff x="0" y="0"/>
+          <a:chExt cx="0" cy="0"/>
+        </a:xfrm>
+      </p:grpSpPr>
       <p:sp>
         <p:nvSpPr>
           <p:cNvPr id="2" name="Rounded Rectangle 1"/>
@@ -5609,7 +5918,7 @@
           </a:fontRef>
         </p:style>
         <p:txBody>
-          <a:bodyPr rtlCol="0" anchor="ctr" wrap="square"/>
+          <a:bodyPr wrap="square" rtlCol="0" anchor="ctr"/>
           <a:lstStyle/>
           <a:p>
             <a:pPr algn="ctr">
@@ -5621,7 +5930,7 @@
               </a:defRPr>
             </a:pPr>
             <a:r>
-              <a:t>Our Approach</a:t>
+              <a:t>What the AI Looks At</a:t>
             </a:r>
           </a:p>
         </p:txBody>
@@ -5634,8 +5943,8 @@
         </p:nvSpPr>
         <p:spPr>
           <a:xfrm>
-            <a:off x="731520" y="1188720"/>
-            <a:ext cx="10515600" cy="731520"/>
+            <a:off x="731520" y="1097280"/>
+            <a:ext cx="10515600" cy="548640"/>
           </a:xfrm>
           <a:prstGeom prst="rect">
             <a:avLst/>
@@ -5649,7 +5958,7 @@
           <a:lstStyle/>
           <a:p>
             <a:pPr algn="l">
-              <a:defRPr sz="2000" b="0">
+              <a:defRPr sz="1800" b="0">
                 <a:solidFill>
                   <a:srgbClr val="232F3E"/>
                 </a:solidFill>
@@ -5657,7 +5966,7 @@
               </a:defRPr>
             </a:pPr>
             <a:r>
-              <a:t>We built an AI model that learns from millions of past transactions to identify patterns that distinguish fraudulent activity from legitimate purchases.</a:t>
+              <a:t>The model analyzes 15 key signals from each transaction to determine fraud risk:</a:t>
             </a:r>
           </a:p>
         </p:txBody>
@@ -5670,8 +5979,8 @@
         </p:nvSpPr>
         <p:spPr>
           <a:xfrm>
-            <a:off x="731520" y="2560320"/>
-            <a:ext cx="2560320" cy="2286000"/>
+            <a:off x="731520" y="1828800"/>
+            <a:ext cx="2560320" cy="3200400"/>
           </a:xfrm>
           <a:prstGeom prst="roundRect">
             <a:avLst/>
@@ -5702,6 +6011,7 @@
           <a:lstStyle/>
           <a:p>
             <a:pPr algn="ctr"/>
+            <a:endParaRPr/>
           </a:p>
         </p:txBody>
       </p:sp>
@@ -5713,8 +6023,8 @@
         </p:nvSpPr>
         <p:spPr>
           <a:xfrm>
-            <a:off x="731520" y="2651760"/>
-            <a:ext cx="2560320" cy="731520"/>
+            <a:off x="731520" y="1920240"/>
+            <a:ext cx="2560320" cy="457200"/>
           </a:xfrm>
           <a:prstGeom prst="rect">
             <a:avLst/>
@@ -5736,11 +6046,7 @@
               </a:defRPr>
             </a:pPr>
             <a:r>
-              <a:t>Analyze</a:t>
-            </a:r>
-            <a:br/>
-            <a:r>
-              <a:t>Historical Data</a:t>
+              <a:t>Transaction Details</a:t>
             </a:r>
           </a:p>
         </p:txBody>
@@ -5753,8 +6059,8 @@
         </p:nvSpPr>
         <p:spPr>
           <a:xfrm>
-            <a:off x="731520" y="3474720"/>
-            <a:ext cx="2560320" cy="914400"/>
+            <a:off x="914400" y="2468880"/>
+            <a:ext cx="2286000" cy="2286000"/>
           </a:xfrm>
           <a:prstGeom prst="rect">
             <a:avLst/>
@@ -5767,8 +6073,11 @@
           </a:bodyPr>
           <a:lstStyle/>
           <a:p>
-            <a:pPr algn="ctr">
-              <a:defRPr sz="1400" b="0">
+            <a:pPr>
+              <a:spcAft>
+                <a:spcPts val="800"/>
+              </a:spcAft>
+              <a:defRPr sz="1400">
                 <a:solidFill>
                   <a:srgbClr val="232F3E"/>
                 </a:solidFill>
@@ -5776,61 +6085,53 @@
               </a:defRPr>
             </a:pPr>
             <a:r>
-              <a:t>Study millions of</a:t>
-            </a:r>
-            <a:br/>
-            <a:r>
-              <a:t>past transactions</a:t>
-            </a:r>
-          </a:p>
-        </p:txBody>
-      </p:sp>
-      <p:sp>
-        <p:nvSpPr>
-          <p:cNvPr id="7" name="TextBox 6"/>
-          <p:cNvSpPr txBox="1"/>
-          <p:nvPr/>
-        </p:nvSpPr>
-        <p:spPr>
-          <a:xfrm>
-            <a:off x="3200400" y="3200400"/>
-            <a:ext cx="457200" cy="457200"/>
-          </a:xfrm>
-          <a:prstGeom prst="rect">
-            <a:avLst/>
-          </a:prstGeom>
-          <a:noFill/>
-        </p:spPr>
-        <p:txBody>
-          <a:bodyPr wrap="square">
-            <a:spAutoFit/>
-          </a:bodyPr>
-          <a:lstStyle/>
-          <a:p>
-            <a:pPr algn="ctr">
-              <a:defRPr sz="2800" b="1">
-                <a:solidFill>
-                  <a:srgbClr val="00A3E0"/>
-                </a:solidFill>
-                <a:latin typeface="Calibri"/>
-              </a:defRPr>
-            </a:pPr>
-            <a:r>
-              <a:t>→</a:t>
-            </a:r>
-          </a:p>
-        </p:txBody>
-      </p:sp>
-      <p:sp>
-        <p:nvSpPr>
-          <p:cNvPr id="8" name="Rounded Rectangle 7"/>
+              <a:t>• How much was spent</a:t>
+            </a:r>
+          </a:p>
+          <a:p>
+            <a:pPr>
+              <a:spcAft>
+                <a:spcPts val="800"/>
+              </a:spcAft>
+              <a:defRPr sz="1400">
+                <a:solidFill>
+                  <a:srgbClr val="232F3E"/>
+                </a:solidFill>
+                <a:latin typeface="Calibri"/>
+              </a:defRPr>
+            </a:pPr>
+            <a:r>
+              <a:t>• What type of purchase</a:t>
+            </a:r>
+          </a:p>
+          <a:p>
+            <a:pPr>
+              <a:spcAft>
+                <a:spcPts val="800"/>
+              </a:spcAft>
+              <a:defRPr sz="1400">
+                <a:solidFill>
+                  <a:srgbClr val="232F3E"/>
+                </a:solidFill>
+                <a:latin typeface="Calibri"/>
+              </a:defRPr>
+            </a:pPr>
+            <a:r>
+              <a:t>• Which merchant</a:t>
+            </a:r>
+          </a:p>
+        </p:txBody>
+      </p:sp>
+      <p:sp>
+        <p:nvSpPr>
+          <p:cNvPr id="7" name="Rounded Rectangle 6"/>
           <p:cNvSpPr/>
           <p:nvPr/>
         </p:nvSpPr>
         <p:spPr>
           <a:xfrm>
-            <a:off x="3566160" y="2560320"/>
-            <a:ext cx="2560320" cy="2286000"/>
+            <a:off x="3566160" y="1828800"/>
+            <a:ext cx="2560320" cy="3200400"/>
           </a:xfrm>
           <a:prstGeom prst="roundRect">
             <a:avLst/>
@@ -5861,19 +6162,20 @@
           <a:lstStyle/>
           <a:p>
             <a:pPr algn="ctr"/>
-          </a:p>
-        </p:txBody>
-      </p:sp>
-      <p:sp>
-        <p:nvSpPr>
-          <p:cNvPr id="9" name="TextBox 8"/>
+            <a:endParaRPr/>
+          </a:p>
+        </p:txBody>
+      </p:sp>
+      <p:sp>
+        <p:nvSpPr>
+          <p:cNvPr id="8" name="TextBox 7"/>
           <p:cNvSpPr txBox="1"/>
           <p:nvPr/>
         </p:nvSpPr>
         <p:spPr>
           <a:xfrm>
-            <a:off x="3566160" y="2651760"/>
-            <a:ext cx="2560320" cy="731520"/>
+            <a:off x="3566160" y="1920240"/>
+            <a:ext cx="2560320" cy="457200"/>
           </a:xfrm>
           <a:prstGeom prst="rect">
             <a:avLst/>
@@ -5895,25 +6197,21 @@
               </a:defRPr>
             </a:pPr>
             <a:r>
-              <a:t>Learn</a:t>
-            </a:r>
-            <a:br/>
-            <a:r>
-              <a:t>Fraud Patterns</a:t>
-            </a:r>
-          </a:p>
-        </p:txBody>
-      </p:sp>
-      <p:sp>
-        <p:nvSpPr>
-          <p:cNvPr id="10" name="TextBox 9"/>
+              <a:t>Timing Patterns</a:t>
+            </a:r>
+          </a:p>
+        </p:txBody>
+      </p:sp>
+      <p:sp>
+        <p:nvSpPr>
+          <p:cNvPr id="9" name="TextBox 8"/>
           <p:cNvSpPr txBox="1"/>
           <p:nvPr/>
         </p:nvSpPr>
         <p:spPr>
           <a:xfrm>
-            <a:off x="3566160" y="3474720"/>
-            <a:ext cx="2560320" cy="914400"/>
+            <a:off x="3749040" y="2468880"/>
+            <a:ext cx="2286000" cy="2286000"/>
           </a:xfrm>
           <a:prstGeom prst="rect">
             <a:avLst/>
@@ -5926,8 +6224,11 @@
           </a:bodyPr>
           <a:lstStyle/>
           <a:p>
-            <a:pPr algn="ctr">
-              <a:defRPr sz="1400" b="0">
+            <a:pPr>
+              <a:spcAft>
+                <a:spcPts val="800"/>
+              </a:spcAft>
+              <a:defRPr sz="1400">
                 <a:solidFill>
                   <a:srgbClr val="232F3E"/>
                 </a:solidFill>
@@ -5935,61 +6236,53 @@
               </a:defRPr>
             </a:pPr>
             <a:r>
-              <a:t>AI identifies what</a:t>
-            </a:r>
-            <a:br/>
-            <a:r>
-              <a:t>fraud looks like</a:t>
-            </a:r>
-          </a:p>
-        </p:txBody>
-      </p:sp>
-      <p:sp>
-        <p:nvSpPr>
-          <p:cNvPr id="11" name="TextBox 10"/>
-          <p:cNvSpPr txBox="1"/>
-          <p:nvPr/>
-        </p:nvSpPr>
-        <p:spPr>
-          <a:xfrm>
-            <a:off x="6035040" y="3200400"/>
-            <a:ext cx="457200" cy="457200"/>
-          </a:xfrm>
-          <a:prstGeom prst="rect">
-            <a:avLst/>
-          </a:prstGeom>
-          <a:noFill/>
-        </p:spPr>
-        <p:txBody>
-          <a:bodyPr wrap="square">
-            <a:spAutoFit/>
-          </a:bodyPr>
-          <a:lstStyle/>
-          <a:p>
-            <a:pPr algn="ctr">
-              <a:defRPr sz="2800" b="1">
-                <a:solidFill>
-                  <a:srgbClr val="00A3E0"/>
-                </a:solidFill>
-                <a:latin typeface="Calibri"/>
-              </a:defRPr>
-            </a:pPr>
-            <a:r>
-              <a:t>→</a:t>
-            </a:r>
-          </a:p>
-        </p:txBody>
-      </p:sp>
-      <p:sp>
-        <p:nvSpPr>
-          <p:cNvPr id="12" name="Rounded Rectangle 11"/>
+              <a:t>• Time of day</a:t>
+            </a:r>
+          </a:p>
+          <a:p>
+            <a:pPr>
+              <a:spcAft>
+                <a:spcPts val="800"/>
+              </a:spcAft>
+              <a:defRPr sz="1400">
+                <a:solidFill>
+                  <a:srgbClr val="232F3E"/>
+                </a:solidFill>
+                <a:latin typeface="Calibri"/>
+              </a:defRPr>
+            </a:pPr>
+            <a:r>
+              <a:t>• Day of week</a:t>
+            </a:r>
+          </a:p>
+          <a:p>
+            <a:pPr>
+              <a:spcAft>
+                <a:spcPts val="800"/>
+              </a:spcAft>
+              <a:defRPr sz="1400">
+                <a:solidFill>
+                  <a:srgbClr val="232F3E"/>
+                </a:solidFill>
+                <a:latin typeface="Calibri"/>
+              </a:defRPr>
+            </a:pPr>
+            <a:r>
+              <a:t>• Month and season</a:t>
+            </a:r>
+          </a:p>
+        </p:txBody>
+      </p:sp>
+      <p:sp>
+        <p:nvSpPr>
+          <p:cNvPr id="10" name="Rounded Rectangle 9"/>
           <p:cNvSpPr/>
           <p:nvPr/>
         </p:nvSpPr>
         <p:spPr>
           <a:xfrm>
-            <a:off x="6400800" y="2560320"/>
-            <a:ext cx="2560320" cy="2286000"/>
+            <a:off x="6400800" y="1828800"/>
+            <a:ext cx="2560320" cy="3200400"/>
           </a:xfrm>
           <a:prstGeom prst="roundRect">
             <a:avLst/>
@@ -6020,19 +6313,20 @@
           <a:lstStyle/>
           <a:p>
             <a:pPr algn="ctr"/>
-          </a:p>
-        </p:txBody>
-      </p:sp>
-      <p:sp>
-        <p:nvSpPr>
-          <p:cNvPr id="13" name="TextBox 12"/>
+            <a:endParaRPr/>
+          </a:p>
+        </p:txBody>
+      </p:sp>
+      <p:sp>
+        <p:nvSpPr>
+          <p:cNvPr id="11" name="TextBox 10"/>
           <p:cNvSpPr txBox="1"/>
           <p:nvPr/>
         </p:nvSpPr>
         <p:spPr>
           <a:xfrm>
-            <a:off x="6400800" y="2651760"/>
-            <a:ext cx="2560320" cy="731520"/>
+            <a:off x="6400800" y="1920240"/>
+            <a:ext cx="2560320" cy="457200"/>
           </a:xfrm>
           <a:prstGeom prst="rect">
             <a:avLst/>
@@ -6054,25 +6348,21 @@
               </a:defRPr>
             </a:pPr>
             <a:r>
-              <a:t>Score Every</a:t>
-            </a:r>
-            <a:br/>
-            <a:r>
-              <a:t>Transaction</a:t>
-            </a:r>
-          </a:p>
-        </p:txBody>
-      </p:sp>
-      <p:sp>
-        <p:nvSpPr>
-          <p:cNvPr id="14" name="TextBox 13"/>
+              <a:t>Customer Profile</a:t>
+            </a:r>
+          </a:p>
+        </p:txBody>
+      </p:sp>
+      <p:sp>
+        <p:nvSpPr>
+          <p:cNvPr id="12" name="TextBox 11"/>
           <p:cNvSpPr txBox="1"/>
           <p:nvPr/>
         </p:nvSpPr>
         <p:spPr>
           <a:xfrm>
-            <a:off x="6400800" y="3474720"/>
-            <a:ext cx="2560320" cy="914400"/>
+            <a:off x="6583680" y="2468880"/>
+            <a:ext cx="2286000" cy="2286000"/>
           </a:xfrm>
           <a:prstGeom prst="rect">
             <a:avLst/>
@@ -6085,8 +6375,11 @@
           </a:bodyPr>
           <a:lstStyle/>
           <a:p>
-            <a:pPr algn="ctr">
-              <a:defRPr sz="1400" b="0">
+            <a:pPr>
+              <a:spcAft>
+                <a:spcPts val="800"/>
+              </a:spcAft>
+              <a:defRPr sz="1400">
                 <a:solidFill>
                   <a:srgbClr val="232F3E"/>
                 </a:solidFill>
@@ -6094,61 +6387,53 @@
               </a:defRPr>
             </a:pPr>
             <a:r>
-              <a:t>Each transaction gets</a:t>
-            </a:r>
-            <a:br/>
-            <a:r>
-              <a:t>a fraud risk score</a:t>
-            </a:r>
-          </a:p>
-        </p:txBody>
-      </p:sp>
-      <p:sp>
-        <p:nvSpPr>
-          <p:cNvPr id="15" name="TextBox 14"/>
-          <p:cNvSpPr txBox="1"/>
-          <p:nvPr/>
-        </p:nvSpPr>
-        <p:spPr>
-          <a:xfrm>
-            <a:off x="8869680" y="3200400"/>
-            <a:ext cx="457200" cy="457200"/>
-          </a:xfrm>
-          <a:prstGeom prst="rect">
-            <a:avLst/>
-          </a:prstGeom>
-          <a:noFill/>
-        </p:spPr>
-        <p:txBody>
-          <a:bodyPr wrap="square">
-            <a:spAutoFit/>
-          </a:bodyPr>
-          <a:lstStyle/>
-          <a:p>
-            <a:pPr algn="ctr">
-              <a:defRPr sz="2800" b="1">
-                <a:solidFill>
-                  <a:srgbClr val="00A3E0"/>
-                </a:solidFill>
-                <a:latin typeface="Calibri"/>
-              </a:defRPr>
-            </a:pPr>
-            <a:r>
-              <a:t>→</a:t>
-            </a:r>
-          </a:p>
-        </p:txBody>
-      </p:sp>
-      <p:sp>
-        <p:nvSpPr>
-          <p:cNvPr id="16" name="Rounded Rectangle 15"/>
+              <a:t>• Customer age</a:t>
+            </a:r>
+          </a:p>
+          <a:p>
+            <a:pPr>
+              <a:spcAft>
+                <a:spcPts val="800"/>
+              </a:spcAft>
+              <a:defRPr sz="1400">
+                <a:solidFill>
+                  <a:srgbClr val="232F3E"/>
+                </a:solidFill>
+                <a:latin typeface="Calibri"/>
+              </a:defRPr>
+            </a:pPr>
+            <a:r>
+              <a:t>• Location (city, state, ZIP)</a:t>
+            </a:r>
+          </a:p>
+          <a:p>
+            <a:pPr>
+              <a:spcAft>
+                <a:spcPts val="800"/>
+              </a:spcAft>
+              <a:defRPr sz="1400">
+                <a:solidFill>
+                  <a:srgbClr val="232F3E"/>
+                </a:solidFill>
+                <a:latin typeface="Calibri"/>
+              </a:defRPr>
+            </a:pPr>
+            <a:r>
+              <a:t>• City population size</a:t>
+            </a:r>
+          </a:p>
+        </p:txBody>
+      </p:sp>
+      <p:sp>
+        <p:nvSpPr>
+          <p:cNvPr id="13" name="Rounded Rectangle 12"/>
           <p:cNvSpPr/>
           <p:nvPr/>
         </p:nvSpPr>
         <p:spPr>
           <a:xfrm>
-            <a:off x="9235440" y="2560320"/>
-            <a:ext cx="2560320" cy="2286000"/>
+            <a:off x="9235440" y="1828800"/>
+            <a:ext cx="2560320" cy="3200400"/>
           </a:xfrm>
           <a:prstGeom prst="roundRect">
             <a:avLst/>
@@ -6179,19 +6464,20 @@
           <a:lstStyle/>
           <a:p>
             <a:pPr algn="ctr"/>
-          </a:p>
-        </p:txBody>
-      </p:sp>
-      <p:sp>
-        <p:nvSpPr>
-          <p:cNvPr id="17" name="TextBox 16"/>
+            <a:endParaRPr/>
+          </a:p>
+        </p:txBody>
+      </p:sp>
+      <p:sp>
+        <p:nvSpPr>
+          <p:cNvPr id="14" name="TextBox 13"/>
           <p:cNvSpPr txBox="1"/>
           <p:nvPr/>
         </p:nvSpPr>
         <p:spPr>
           <a:xfrm>
-            <a:off x="9235440" y="2651760"/>
-            <a:ext cx="2560320" cy="731520"/>
+            <a:off x="9235440" y="1920240"/>
+            <a:ext cx="2560320" cy="457200"/>
           </a:xfrm>
           <a:prstGeom prst="rect">
             <a:avLst/>
@@ -6213,25 +6499,21 @@
               </a:defRPr>
             </a:pPr>
             <a:r>
-              <a:t>Flag</a:t>
-            </a:r>
-            <a:br/>
-            <a:r>
-              <a:t>Suspicious Activity</a:t>
-            </a:r>
-          </a:p>
-        </p:txBody>
-      </p:sp>
-      <p:sp>
-        <p:nvSpPr>
-          <p:cNvPr id="18" name="TextBox 17"/>
+              <a:t>Behavioral Signals</a:t>
+            </a:r>
+          </a:p>
+        </p:txBody>
+      </p:sp>
+      <p:sp>
+        <p:nvSpPr>
+          <p:cNvPr id="15" name="TextBox 14"/>
           <p:cNvSpPr txBox="1"/>
           <p:nvPr/>
         </p:nvSpPr>
         <p:spPr>
           <a:xfrm>
-            <a:off x="9235440" y="3474720"/>
-            <a:ext cx="2560320" cy="914400"/>
+            <a:off x="9418320" y="2468880"/>
+            <a:ext cx="2286000" cy="2286000"/>
           </a:xfrm>
           <a:prstGeom prst="rect">
             <a:avLst/>
@@ -6244,8 +6526,11 @@
           </a:bodyPr>
           <a:lstStyle/>
           <a:p>
-            <a:pPr algn="ctr">
-              <a:defRPr sz="1400" b="0">
+            <a:pPr>
+              <a:spcAft>
+                <a:spcPts val="800"/>
+              </a:spcAft>
+              <a:defRPr sz="1400">
                 <a:solidFill>
                   <a:srgbClr val="232F3E"/>
                 </a:solidFill>
@@ -6253,18 +6538,46 @@
               </a:defRPr>
             </a:pPr>
             <a:r>
-              <a:t>High-risk transactions</a:t>
-            </a:r>
-            <a:br/>
-            <a:r>
-              <a:t>are flagged for review</a:t>
-            </a:r>
-          </a:p>
-        </p:txBody>
-      </p:sp>
-      <p:sp>
-        <p:nvSpPr>
-          <p:cNvPr id="19" name="TextBox 18"/>
+              <a:t>• Unusual spending amounts</a:t>
+            </a:r>
+          </a:p>
+          <a:p>
+            <a:pPr>
+              <a:spcAft>
+                <a:spcPts val="800"/>
+              </a:spcAft>
+              <a:defRPr sz="1400">
+                <a:solidFill>
+                  <a:srgbClr val="232F3E"/>
+                </a:solidFill>
+                <a:latin typeface="Calibri"/>
+              </a:defRPr>
+            </a:pPr>
+            <a:r>
+              <a:t>• Transactions at odd hours</a:t>
+            </a:r>
+          </a:p>
+          <a:p>
+            <a:pPr>
+              <a:spcAft>
+                <a:spcPts val="800"/>
+              </a:spcAft>
+              <a:defRPr sz="1400">
+                <a:solidFill>
+                  <a:srgbClr val="232F3E"/>
+                </a:solidFill>
+                <a:latin typeface="Calibri"/>
+              </a:defRPr>
+            </a:pPr>
+            <a:r>
+              <a:t>• Patterns across categories</a:t>
+            </a:r>
+          </a:p>
+        </p:txBody>
+      </p:sp>
+      <p:sp>
+        <p:nvSpPr>
+          <p:cNvPr id="16" name="TextBox 15"/>
           <p:cNvSpPr txBox="1"/>
           <p:nvPr/>
         </p:nvSpPr>
@@ -6285,7 +6598,7 @@
           <a:lstStyle/>
           <a:p>
             <a:pPr algn="l">
-              <a:defRPr sz="1600" b="0">
+              <a:defRPr sz="1500" b="0">
                 <a:solidFill>
                   <a:srgbClr val="7F8C8D"/>
                 </a:solidFill>
@@ -6293,7 +6606,7 @@
               </a:defRPr>
             </a:pPr>
             <a:r>
-              <a:t>The model evaluates 15 key signals per transaction including amount, merchant, time of day, location, and customer profile.</a:t>
+              <a:t>These signals were selected from a larger set using statistical analysis to identify the most predictive factors.</a:t>
             </a:r>
           </a:p>
         </p:txBody>
@@ -6306,8 +6619,8 @@
 </p:sld>
 </file>
 
-<file path=ppt/slides/slide4.xml><?xml version="1.0" encoding="utf-8"?>
-<p:sld xmlns:a="http://schemas.openxmlformats.org/drawingml/2006/main" xmlns:p="http://schemas.openxmlformats.org/presentationml/2006/main" xmlns:r="http://schemas.openxmlformats.org/officeDocument/2006/relationships">
+<file path=ppt/slides/slide5.xml><?xml version="1.0" encoding="utf-8"?>
+<p:sld xmlns:a="http://schemas.openxmlformats.org/drawingml/2006/main" xmlns:r="http://schemas.openxmlformats.org/officeDocument/2006/relationships" xmlns:p="http://schemas.openxmlformats.org/presentationml/2006/main">
   <p:cSld>
     <p:bg>
       <p:bgPr>
@@ -6323,7 +6636,14 @@
         <p:cNvGrpSpPr/>
         <p:nvPr/>
       </p:nvGrpSpPr>
-      <p:grpSpPr/>
+      <p:grpSpPr>
+        <a:xfrm>
+          <a:off x="0" y="0"/>
+          <a:ext cx="0" cy="0"/>
+          <a:chOff x="0" y="0"/>
+          <a:chExt cx="0" cy="0"/>
+        </a:xfrm>
+      </p:grpSpPr>
       <p:sp>
         <p:nvSpPr>
           <p:cNvPr id="2" name="Rounded Rectangle 1"/>
@@ -6360,7 +6680,7 @@
           </a:fontRef>
         </p:style>
         <p:txBody>
-          <a:bodyPr rtlCol="0" anchor="ctr" wrap="square"/>
+          <a:bodyPr wrap="square" rtlCol="0" anchor="ctr"/>
           <a:lstStyle/>
           <a:p>
             <a:pPr algn="ctr">
@@ -6372,63 +6692,27 @@
               </a:defRPr>
             </a:pPr>
             <a:r>
-              <a:t>What the AI Looks At</a:t>
-            </a:r>
-          </a:p>
-        </p:txBody>
-      </p:sp>
-      <p:sp>
-        <p:nvSpPr>
-          <p:cNvPr id="3" name="TextBox 2"/>
-          <p:cNvSpPr txBox="1"/>
-          <p:nvPr/>
-        </p:nvSpPr>
-        <p:spPr>
-          <a:xfrm>
-            <a:off x="731520" y="1097280"/>
-            <a:ext cx="10515600" cy="548640"/>
-          </a:xfrm>
-          <a:prstGeom prst="rect">
-            <a:avLst/>
-          </a:prstGeom>
-          <a:noFill/>
-        </p:spPr>
-        <p:txBody>
-          <a:bodyPr wrap="square">
-            <a:spAutoFit/>
-          </a:bodyPr>
-          <a:lstStyle/>
-          <a:p>
-            <a:pPr algn="l">
-              <a:defRPr sz="1800" b="0">
-                <a:solidFill>
-                  <a:srgbClr val="232F3E"/>
-                </a:solidFill>
-                <a:latin typeface="Calibri"/>
-              </a:defRPr>
-            </a:pPr>
-            <a:r>
-              <a:t>The model analyzes 15 key signals from each transaction to determine fraud risk:</a:t>
-            </a:r>
-          </a:p>
-        </p:txBody>
-      </p:sp>
-      <p:sp>
-        <p:nvSpPr>
-          <p:cNvPr id="4" name="Rounded Rectangle 3"/>
+              <a:t>Results at a Glance</a:t>
+            </a:r>
+          </a:p>
+        </p:txBody>
+      </p:sp>
+      <p:sp>
+        <p:nvSpPr>
+          <p:cNvPr id="3" name="Rounded Rectangle 2"/>
           <p:cNvSpPr/>
           <p:nvPr/>
         </p:nvSpPr>
         <p:spPr>
           <a:xfrm>
-            <a:off x="731520" y="1828800"/>
-            <a:ext cx="2560320" cy="3200400"/>
+            <a:off x="731520" y="1371600"/>
+            <a:ext cx="3474720" cy="2743200"/>
           </a:xfrm>
           <a:prstGeom prst="roundRect">
             <a:avLst/>
           </a:prstGeom>
           <a:solidFill>
-            <a:srgbClr val="E8F4FD"/>
+            <a:srgbClr val="F8F9FA"/>
           </a:solidFill>
           <a:ln>
             <a:noFill/>
@@ -6453,19 +6737,20 @@
           <a:lstStyle/>
           <a:p>
             <a:pPr algn="ctr"/>
-          </a:p>
-        </p:txBody>
-      </p:sp>
-      <p:sp>
-        <p:nvSpPr>
-          <p:cNvPr id="5" name="TextBox 4"/>
+            <a:endParaRPr/>
+          </a:p>
+        </p:txBody>
+      </p:sp>
+      <p:sp>
+        <p:nvSpPr>
+          <p:cNvPr id="4" name="TextBox 3"/>
           <p:cNvSpPr txBox="1"/>
           <p:nvPr/>
         </p:nvSpPr>
         <p:spPr>
           <a:xfrm>
-            <a:off x="731520" y="1920240"/>
-            <a:ext cx="2560320" cy="457200"/>
+            <a:off x="731520" y="1554480"/>
+            <a:ext cx="3474720" cy="365760"/>
           </a:xfrm>
           <a:prstGeom prst="rect">
             <a:avLst/>
@@ -6481,27 +6766,27 @@
             <a:pPr algn="ctr">
               <a:defRPr sz="1800" b="1">
                 <a:solidFill>
-                  <a:srgbClr val="00A3E0"/>
-                </a:solidFill>
-                <a:latin typeface="Calibri"/>
-              </a:defRPr>
-            </a:pPr>
-            <a:r>
-              <a:t>Transaction Details</a:t>
-            </a:r>
-          </a:p>
-        </p:txBody>
-      </p:sp>
-      <p:sp>
-        <p:nvSpPr>
-          <p:cNvPr id="6" name="TextBox 5"/>
+                  <a:srgbClr val="232F3E"/>
+                </a:solidFill>
+                <a:latin typeface="Calibri"/>
+              </a:defRPr>
+            </a:pPr>
+            <a:r>
+              <a:t>Fraud Detected</a:t>
+            </a:r>
+          </a:p>
+        </p:txBody>
+      </p:sp>
+      <p:sp>
+        <p:nvSpPr>
+          <p:cNvPr id="5" name="TextBox 4"/>
           <p:cNvSpPr txBox="1"/>
           <p:nvPr/>
         </p:nvSpPr>
         <p:spPr>
           <a:xfrm>
-            <a:off x="914400" y="2468880"/>
-            <a:ext cx="2286000" cy="2286000"/>
+            <a:off x="731520" y="2011680"/>
+            <a:ext cx="3474720" cy="731520"/>
           </a:xfrm>
           <a:prstGeom prst="rect">
             <a:avLst/>
@@ -6514,51 +6799,56 @@
           </a:bodyPr>
           <a:lstStyle/>
           <a:p>
-            <a:pPr>
-              <a:spcAft>
-                <a:spcPts val="800"/>
-              </a:spcAft>
-              <a:defRPr sz="1400">
-                <a:solidFill>
-                  <a:srgbClr val="232F3E"/>
-                </a:solidFill>
-                <a:latin typeface="Calibri"/>
-              </a:defRPr>
-            </a:pPr>
-            <a:r>
-              <a:t>• How much was spent</a:t>
-            </a:r>
-          </a:p>
-          <a:p>
-            <a:pPr>
-              <a:spcAft>
-                <a:spcPts val="800"/>
-              </a:spcAft>
-              <a:defRPr sz="1400">
-                <a:solidFill>
-                  <a:srgbClr val="232F3E"/>
-                </a:solidFill>
-                <a:latin typeface="Calibri"/>
-              </a:defRPr>
-            </a:pPr>
-            <a:r>
-              <a:t>• What type of purchase</a:t>
-            </a:r>
-          </a:p>
-          <a:p>
-            <a:pPr>
-              <a:spcAft>
-                <a:spcPts val="800"/>
-              </a:spcAft>
-              <a:defRPr sz="1400">
-                <a:solidFill>
-                  <a:srgbClr val="232F3E"/>
-                </a:solidFill>
-                <a:latin typeface="Calibri"/>
-              </a:defRPr>
-            </a:pPr>
-            <a:r>
-              <a:t>• Which merchant</a:t>
+            <a:pPr algn="ctr">
+              <a:defRPr sz="4800" b="1">
+                <a:solidFill>
+                  <a:srgbClr val="2ECC71"/>
+                </a:solidFill>
+                <a:latin typeface="Calibri"/>
+              </a:defRPr>
+            </a:pPr>
+            <a:r>
+              <a:t>88.7%</a:t>
+            </a:r>
+          </a:p>
+        </p:txBody>
+      </p:sp>
+      <p:sp>
+        <p:nvSpPr>
+          <p:cNvPr id="6" name="TextBox 5"/>
+          <p:cNvSpPr txBox="1"/>
+          <p:nvPr/>
+        </p:nvSpPr>
+        <p:spPr>
+          <a:xfrm>
+            <a:off x="731520" y="2926080"/>
+            <a:ext cx="3474720" cy="731520"/>
+          </a:xfrm>
+          <a:prstGeom prst="rect">
+            <a:avLst/>
+          </a:prstGeom>
+          <a:noFill/>
+        </p:spPr>
+        <p:txBody>
+          <a:bodyPr wrap="square">
+            <a:spAutoFit/>
+          </a:bodyPr>
+          <a:lstStyle/>
+          <a:p>
+            <a:pPr algn="ctr">
+              <a:defRPr sz="1400" b="0">
+                <a:solidFill>
+                  <a:srgbClr val="7F8C8D"/>
+                </a:solidFill>
+                <a:latin typeface="Calibri"/>
+              </a:defRPr>
+            </a:pPr>
+            <a:r>
+              <a:t>of fraudulent transactions</a:t>
+            </a:r>
+            <a:br/>
+            <a:r>
+              <a:t>caught by the model</a:t>
             </a:r>
           </a:p>
         </p:txBody>
@@ -6571,14 +6861,14 @@
         </p:nvSpPr>
         <p:spPr>
           <a:xfrm>
-            <a:off x="3566160" y="1828800"/>
-            <a:ext cx="2560320" cy="3200400"/>
+            <a:off x="4480559" y="1371600"/>
+            <a:ext cx="3474720" cy="2743200"/>
           </a:xfrm>
           <a:prstGeom prst="roundRect">
             <a:avLst/>
           </a:prstGeom>
           <a:solidFill>
-            <a:srgbClr val="FDF2E8"/>
+            <a:srgbClr val="F8F9FA"/>
           </a:solidFill>
           <a:ln>
             <a:noFill/>
@@ -6603,6 +6893,7 @@
           <a:lstStyle/>
           <a:p>
             <a:pPr algn="ctr"/>
+            <a:endParaRPr/>
           </a:p>
         </p:txBody>
       </p:sp>
@@ -6614,8 +6905,8 @@
         </p:nvSpPr>
         <p:spPr>
           <a:xfrm>
-            <a:off x="3566160" y="1920240"/>
-            <a:ext cx="2560320" cy="457200"/>
+            <a:off x="4480559" y="1554480"/>
+            <a:ext cx="3474720" cy="365760"/>
           </a:xfrm>
           <a:prstGeom prst="rect">
             <a:avLst/>
@@ -6631,13 +6922,13 @@
             <a:pPr algn="ctr">
               <a:defRPr sz="1800" b="1">
                 <a:solidFill>
-                  <a:srgbClr val="FF9900"/>
-                </a:solidFill>
-                <a:latin typeface="Calibri"/>
-              </a:defRPr>
-            </a:pPr>
-            <a:r>
-              <a:t>Timing Patterns</a:t>
+                  <a:srgbClr val="232F3E"/>
+                </a:solidFill>
+                <a:latin typeface="Calibri"/>
+              </a:defRPr>
+            </a:pPr>
+            <a:r>
+              <a:t>Accuracy</a:t>
             </a:r>
           </a:p>
         </p:txBody>
@@ -6650,8 +6941,8 @@
         </p:nvSpPr>
         <p:spPr>
           <a:xfrm>
-            <a:off x="3749040" y="2468880"/>
-            <a:ext cx="2286000" cy="2286000"/>
+            <a:off x="4480559" y="2011680"/>
+            <a:ext cx="3474720" cy="731520"/>
           </a:xfrm>
           <a:prstGeom prst="rect">
             <a:avLst/>
@@ -6664,71 +6955,76 @@
           </a:bodyPr>
           <a:lstStyle/>
           <a:p>
-            <a:pPr>
-              <a:spcAft>
-                <a:spcPts val="800"/>
-              </a:spcAft>
-              <a:defRPr sz="1400">
-                <a:solidFill>
-                  <a:srgbClr val="232F3E"/>
-                </a:solidFill>
-                <a:latin typeface="Calibri"/>
-              </a:defRPr>
-            </a:pPr>
-            <a:r>
-              <a:t>• Time of day</a:t>
-            </a:r>
-          </a:p>
-          <a:p>
-            <a:pPr>
-              <a:spcAft>
-                <a:spcPts val="800"/>
-              </a:spcAft>
-              <a:defRPr sz="1400">
-                <a:solidFill>
-                  <a:srgbClr val="232F3E"/>
-                </a:solidFill>
-                <a:latin typeface="Calibri"/>
-              </a:defRPr>
-            </a:pPr>
-            <a:r>
-              <a:t>• Day of week</a:t>
-            </a:r>
-          </a:p>
-          <a:p>
-            <a:pPr>
-              <a:spcAft>
-                <a:spcPts val="800"/>
-              </a:spcAft>
-              <a:defRPr sz="1400">
-                <a:solidFill>
-                  <a:srgbClr val="232F3E"/>
-                </a:solidFill>
-                <a:latin typeface="Calibri"/>
-              </a:defRPr>
-            </a:pPr>
-            <a:r>
-              <a:t>• Month and season</a:t>
-            </a:r>
-          </a:p>
-        </p:txBody>
-      </p:sp>
-      <p:sp>
-        <p:nvSpPr>
-          <p:cNvPr id="10" name="Rounded Rectangle 9"/>
+            <a:pPr algn="ctr">
+              <a:defRPr sz="4800" b="1">
+                <a:solidFill>
+                  <a:srgbClr val="00A3E0"/>
+                </a:solidFill>
+                <a:latin typeface="Calibri"/>
+              </a:defRPr>
+            </a:pPr>
+            <a:r>
+              <a:t>94.9%</a:t>
+            </a:r>
+          </a:p>
+        </p:txBody>
+      </p:sp>
+      <p:sp>
+        <p:nvSpPr>
+          <p:cNvPr id="10" name="TextBox 9"/>
+          <p:cNvSpPr txBox="1"/>
+          <p:nvPr/>
+        </p:nvSpPr>
+        <p:spPr>
+          <a:xfrm>
+            <a:off x="4480559" y="2926080"/>
+            <a:ext cx="3474720" cy="731520"/>
+          </a:xfrm>
+          <a:prstGeom prst="rect">
+            <a:avLst/>
+          </a:prstGeom>
+          <a:noFill/>
+        </p:spPr>
+        <p:txBody>
+          <a:bodyPr wrap="square">
+            <a:spAutoFit/>
+          </a:bodyPr>
+          <a:lstStyle/>
+          <a:p>
+            <a:pPr algn="ctr">
+              <a:defRPr sz="1400" b="0">
+                <a:solidFill>
+                  <a:srgbClr val="7F8C8D"/>
+                </a:solidFill>
+                <a:latin typeface="Calibri"/>
+              </a:defRPr>
+            </a:pPr>
+            <a:r>
+              <a:t>of fraud alerts are</a:t>
+            </a:r>
+            <a:br/>
+            <a:r>
+              <a:t>actual fraud (not false alarms)</a:t>
+            </a:r>
+          </a:p>
+        </p:txBody>
+      </p:sp>
+      <p:sp>
+        <p:nvSpPr>
+          <p:cNvPr id="11" name="Rounded Rectangle 10"/>
           <p:cNvSpPr/>
           <p:nvPr/>
         </p:nvSpPr>
         <p:spPr>
           <a:xfrm>
-            <a:off x="6400800" y="1828800"/>
-            <a:ext cx="2560320" cy="3200400"/>
+            <a:off x="8229600" y="1371600"/>
+            <a:ext cx="3474720" cy="2743200"/>
           </a:xfrm>
           <a:prstGeom prst="roundRect">
             <a:avLst/>
           </a:prstGeom>
           <a:solidFill>
-            <a:srgbClr val="E8FDEE"/>
+            <a:srgbClr val="F8F9FA"/>
           </a:solidFill>
           <a:ln>
             <a:noFill/>
@@ -6753,19 +7049,20 @@
           <a:lstStyle/>
           <a:p>
             <a:pPr algn="ctr"/>
-          </a:p>
-        </p:txBody>
-      </p:sp>
-      <p:sp>
-        <p:nvSpPr>
-          <p:cNvPr id="11" name="TextBox 10"/>
+            <a:endParaRPr/>
+          </a:p>
+        </p:txBody>
+      </p:sp>
+      <p:sp>
+        <p:nvSpPr>
+          <p:cNvPr id="12" name="TextBox 11"/>
           <p:cNvSpPr txBox="1"/>
           <p:nvPr/>
         </p:nvSpPr>
         <p:spPr>
           <a:xfrm>
-            <a:off x="6400800" y="1920240"/>
-            <a:ext cx="2560320" cy="457200"/>
+            <a:off x="8229600" y="1554480"/>
+            <a:ext cx="3474720" cy="365760"/>
           </a:xfrm>
           <a:prstGeom prst="rect">
             <a:avLst/>
@@ -6781,27 +7078,27 @@
             <a:pPr algn="ctr">
               <a:defRPr sz="1800" b="1">
                 <a:solidFill>
-                  <a:srgbClr val="2ECC71"/>
-                </a:solidFill>
-                <a:latin typeface="Calibri"/>
-              </a:defRPr>
-            </a:pPr>
-            <a:r>
-              <a:t>Customer Profile</a:t>
-            </a:r>
-          </a:p>
-        </p:txBody>
-      </p:sp>
-      <p:sp>
-        <p:nvSpPr>
-          <p:cNvPr id="12" name="TextBox 11"/>
+                  <a:srgbClr val="232F3E"/>
+                </a:solidFill>
+                <a:latin typeface="Calibri"/>
+              </a:defRPr>
+            </a:pPr>
+            <a:r>
+              <a:t>Overall Accuracy</a:t>
+            </a:r>
+          </a:p>
+        </p:txBody>
+      </p:sp>
+      <p:sp>
+        <p:nvSpPr>
+          <p:cNvPr id="13" name="TextBox 12"/>
           <p:cNvSpPr txBox="1"/>
           <p:nvPr/>
         </p:nvSpPr>
         <p:spPr>
           <a:xfrm>
-            <a:off x="6583680" y="2468880"/>
-            <a:ext cx="2286000" cy="2286000"/>
+            <a:off x="8229600" y="2011680"/>
+            <a:ext cx="3474720" cy="731520"/>
           </a:xfrm>
           <a:prstGeom prst="rect">
             <a:avLst/>
@@ -6814,95 +7111,17 @@
           </a:bodyPr>
           <a:lstStyle/>
           <a:p>
-            <a:pPr>
-              <a:spcAft>
-                <a:spcPts val="800"/>
-              </a:spcAft>
-              <a:defRPr sz="1400">
-                <a:solidFill>
-                  <a:srgbClr val="232F3E"/>
-                </a:solidFill>
-                <a:latin typeface="Calibri"/>
-              </a:defRPr>
-            </a:pPr>
-            <a:r>
-              <a:t>• Customer age</a:t>
-            </a:r>
-          </a:p>
-          <a:p>
-            <a:pPr>
-              <a:spcAft>
-                <a:spcPts val="800"/>
-              </a:spcAft>
-              <a:defRPr sz="1400">
-                <a:solidFill>
-                  <a:srgbClr val="232F3E"/>
-                </a:solidFill>
-                <a:latin typeface="Calibri"/>
-              </a:defRPr>
-            </a:pPr>
-            <a:r>
-              <a:t>• Location (city, state, ZIP)</a:t>
-            </a:r>
-          </a:p>
-          <a:p>
-            <a:pPr>
-              <a:spcAft>
-                <a:spcPts val="800"/>
-              </a:spcAft>
-              <a:defRPr sz="1400">
-                <a:solidFill>
-                  <a:srgbClr val="232F3E"/>
-                </a:solidFill>
-                <a:latin typeface="Calibri"/>
-              </a:defRPr>
-            </a:pPr>
-            <a:r>
-              <a:t>• City population size</a:t>
-            </a:r>
-          </a:p>
-        </p:txBody>
-      </p:sp>
-      <p:sp>
-        <p:nvSpPr>
-          <p:cNvPr id="13" name="Rounded Rectangle 12"/>
-          <p:cNvSpPr/>
-          <p:nvPr/>
-        </p:nvSpPr>
-        <p:spPr>
-          <a:xfrm>
-            <a:off x="9235440" y="1828800"/>
-            <a:ext cx="2560320" cy="3200400"/>
-          </a:xfrm>
-          <a:prstGeom prst="roundRect">
-            <a:avLst/>
-          </a:prstGeom>
-          <a:solidFill>
-            <a:srgbClr val="F0E8FD"/>
-          </a:solidFill>
-          <a:ln>
-            <a:noFill/>
-          </a:ln>
-        </p:spPr>
-        <p:style>
-          <a:lnRef idx="1">
-            <a:schemeClr val="accent1"/>
-          </a:lnRef>
-          <a:fillRef idx="3">
-            <a:schemeClr val="accent1"/>
-          </a:fillRef>
-          <a:effectRef idx="2">
-            <a:schemeClr val="accent1"/>
-          </a:effectRef>
-          <a:fontRef idx="minor">
-            <a:schemeClr val="lt1"/>
-          </a:fontRef>
-        </p:style>
-        <p:txBody>
-          <a:bodyPr rtlCol="0" anchor="ctr"/>
-          <a:lstStyle/>
-          <a:p>
-            <a:pPr algn="ctr"/>
+            <a:pPr algn="ctr">
+              <a:defRPr sz="4800" b="1">
+                <a:solidFill>
+                  <a:srgbClr val="8E44AD"/>
+                </a:solidFill>
+                <a:latin typeface="Calibri"/>
+              </a:defRPr>
+            </a:pPr>
+            <a:r>
+              <a:t>99.9%</a:t>
+            </a:r>
           </a:p>
         </p:txBody>
       </p:sp>
@@ -6914,8 +7133,8 @@
         </p:nvSpPr>
         <p:spPr>
           <a:xfrm>
-            <a:off x="9235440" y="1920240"/>
-            <a:ext cx="2560320" cy="457200"/>
+            <a:off x="8229600" y="2926080"/>
+            <a:ext cx="3474720" cy="731520"/>
           </a:xfrm>
           <a:prstGeom prst="rect">
             <a:avLst/>
@@ -6929,15 +7148,19 @@
           <a:lstStyle/>
           <a:p>
             <a:pPr algn="ctr">
-              <a:defRPr sz="1800" b="1">
-                <a:solidFill>
-                  <a:srgbClr val="8E44AD"/>
-                </a:solidFill>
-                <a:latin typeface="Calibri"/>
-              </a:defRPr>
-            </a:pPr>
-            <a:r>
-              <a:t>Behavioral Signals</a:t>
+              <a:defRPr sz="1400" b="0">
+                <a:solidFill>
+                  <a:srgbClr val="7F8C8D"/>
+                </a:solidFill>
+                <a:latin typeface="Calibri"/>
+              </a:defRPr>
+            </a:pPr>
+            <a:r>
+              <a:t>of all transactions</a:t>
+            </a:r>
+            <a:br/>
+            <a:r>
+              <a:t>correctly classified</a:t>
             </a:r>
           </a:p>
         </p:txBody>
@@ -6950,8 +7173,8 @@
         </p:nvSpPr>
         <p:spPr>
           <a:xfrm>
-            <a:off x="9418320" y="2468880"/>
-            <a:ext cx="2286000" cy="2286000"/>
+            <a:off x="731520" y="4572000"/>
+            <a:ext cx="10515600" cy="731520"/>
           </a:xfrm>
           <a:prstGeom prst="rect">
             <a:avLst/>
@@ -6964,11 +7187,8 @@
           </a:bodyPr>
           <a:lstStyle/>
           <a:p>
-            <a:pPr>
-              <a:spcAft>
-                <a:spcPts val="800"/>
-              </a:spcAft>
-              <a:defRPr sz="1400">
+            <a:pPr algn="l">
+              <a:defRPr sz="1700" b="0">
                 <a:solidFill>
                   <a:srgbClr val="232F3E"/>
                 </a:solidFill>
@@ -6976,75 +7196,7 @@
               </a:defRPr>
             </a:pPr>
             <a:r>
-              <a:t>• Unusual spending amounts</a:t>
-            </a:r>
-          </a:p>
-          <a:p>
-            <a:pPr>
-              <a:spcAft>
-                <a:spcPts val="800"/>
-              </a:spcAft>
-              <a:defRPr sz="1400">
-                <a:solidFill>
-                  <a:srgbClr val="232F3E"/>
-                </a:solidFill>
-                <a:latin typeface="Calibri"/>
-              </a:defRPr>
-            </a:pPr>
-            <a:r>
-              <a:t>• Transactions at odd hours</a:t>
-            </a:r>
-          </a:p>
-          <a:p>
-            <a:pPr>
-              <a:spcAft>
-                <a:spcPts val="800"/>
-              </a:spcAft>
-              <a:defRPr sz="1400">
-                <a:solidFill>
-                  <a:srgbClr val="232F3E"/>
-                </a:solidFill>
-                <a:latin typeface="Calibri"/>
-              </a:defRPr>
-            </a:pPr>
-            <a:r>
-              <a:t>• Patterns across categories</a:t>
-            </a:r>
-          </a:p>
-        </p:txBody>
-      </p:sp>
-      <p:sp>
-        <p:nvSpPr>
-          <p:cNvPr id="16" name="TextBox 15"/>
-          <p:cNvSpPr txBox="1"/>
-          <p:nvPr/>
-        </p:nvSpPr>
-        <p:spPr>
-          <a:xfrm>
-            <a:off x="731520" y="5303520"/>
-            <a:ext cx="10515600" cy="457200"/>
-          </a:xfrm>
-          <a:prstGeom prst="rect">
-            <a:avLst/>
-          </a:prstGeom>
-          <a:noFill/>
-        </p:spPr>
-        <p:txBody>
-          <a:bodyPr wrap="square">
-            <a:spAutoFit/>
-          </a:bodyPr>
-          <a:lstStyle/>
-          <a:p>
-            <a:pPr algn="l">
-              <a:defRPr sz="1500" b="0">
-                <a:solidFill>
-                  <a:srgbClr val="7F8C8D"/>
-                </a:solidFill>
-                <a:latin typeface="Calibri"/>
-              </a:defRPr>
-            </a:pPr>
-            <a:r>
-              <a:t>These signals were selected from a larger set using statistical analysis to identify the most predictive factors.</a:t>
+              <a:t>Out of 259,335 test transactions containing 1,501 fraud cases, the model correctly identified 1,331 fraudulent transactions while generating only 72 false alarms.</a:t>
             </a:r>
           </a:p>
         </p:txBody>
@@ -7057,8 +7209,8 @@
 </p:sld>
 </file>
 
-<file path=ppt/slides/slide5.xml><?xml version="1.0" encoding="utf-8"?>
-<p:sld xmlns:a="http://schemas.openxmlformats.org/drawingml/2006/main" xmlns:p="http://schemas.openxmlformats.org/presentationml/2006/main" xmlns:r="http://schemas.openxmlformats.org/officeDocument/2006/relationships">
+<file path=ppt/slides/slide6.xml><?xml version="1.0" encoding="utf-8"?>
+<p:sld xmlns:a="http://schemas.openxmlformats.org/drawingml/2006/main" xmlns:r="http://schemas.openxmlformats.org/officeDocument/2006/relationships" xmlns:p="http://schemas.openxmlformats.org/presentationml/2006/main">
   <p:cSld>
     <p:bg>
       <p:bgPr>
@@ -7074,7 +7226,14 @@
         <p:cNvGrpSpPr/>
         <p:nvPr/>
       </p:nvGrpSpPr>
-      <p:grpSpPr/>
+      <p:grpSpPr>
+        <a:xfrm>
+          <a:off x="0" y="0"/>
+          <a:ext cx="0" cy="0"/>
+          <a:chOff x="0" y="0"/>
+          <a:chExt cx="0" cy="0"/>
+        </a:xfrm>
+      </p:grpSpPr>
       <p:sp>
         <p:nvSpPr>
           <p:cNvPr id="2" name="Rounded Rectangle 1"/>
@@ -7111,7 +7270,7 @@
           </a:fontRef>
         </p:style>
         <p:txBody>
-          <a:bodyPr rtlCol="0" anchor="ctr" wrap="square"/>
+          <a:bodyPr wrap="square" rtlCol="0" anchor="ctr"/>
           <a:lstStyle/>
           <a:p>
             <a:pPr algn="ctr">
@@ -7123,27 +7282,63 @@
               </a:defRPr>
             </a:pPr>
             <a:r>
-              <a:t>Results at a Glance</a:t>
-            </a:r>
-          </a:p>
-        </p:txBody>
-      </p:sp>
-      <p:sp>
-        <p:nvSpPr>
-          <p:cNvPr id="3" name="Rounded Rectangle 2"/>
+              <a:t>How We Improved the Model</a:t>
+            </a:r>
+          </a:p>
+        </p:txBody>
+      </p:sp>
+      <p:sp>
+        <p:nvSpPr>
+          <p:cNvPr id="3" name="TextBox 2"/>
+          <p:cNvSpPr txBox="1"/>
+          <p:nvPr/>
+        </p:nvSpPr>
+        <p:spPr>
+          <a:xfrm>
+            <a:off x="731520" y="1097280"/>
+            <a:ext cx="10515600" cy="731520"/>
+          </a:xfrm>
+          <a:prstGeom prst="rect">
+            <a:avLst/>
+          </a:prstGeom>
+          <a:noFill/>
+        </p:spPr>
+        <p:txBody>
+          <a:bodyPr wrap="square">
+            <a:spAutoFit/>
+          </a:bodyPr>
+          <a:lstStyle/>
+          <a:p>
+            <a:pPr algn="l">
+              <a:defRPr sz="1800" b="0">
+                <a:solidFill>
+                  <a:srgbClr val="232F3E"/>
+                </a:solidFill>
+                <a:latin typeface="Calibri"/>
+              </a:defRPr>
+            </a:pPr>
+            <a:r>
+              <a:t>We tested 10 different AI approaches and fine-tuned the best performer. The optimization dramatically reduced false alarms while maintaining fraud detection.</a:t>
+            </a:r>
+          </a:p>
+        </p:txBody>
+      </p:sp>
+      <p:sp>
+        <p:nvSpPr>
+          <p:cNvPr id="4" name="Rounded Rectangle 3"/>
           <p:cNvSpPr/>
           <p:nvPr/>
         </p:nvSpPr>
         <p:spPr>
           <a:xfrm>
-            <a:off x="731520" y="1371600"/>
-            <a:ext cx="3474720" cy="2743200"/>
+            <a:off x="731520" y="2286000"/>
+            <a:ext cx="5029200" cy="2743200"/>
           </a:xfrm>
           <a:prstGeom prst="roundRect">
             <a:avLst/>
           </a:prstGeom>
           <a:solidFill>
-            <a:srgbClr val="F8F9FA"/>
+            <a:srgbClr val="FDF2E8"/>
           </a:solidFill>
           <a:ln>
             <a:noFill/>
@@ -7168,19 +7363,20 @@
           <a:lstStyle/>
           <a:p>
             <a:pPr algn="ctr"/>
-          </a:p>
-        </p:txBody>
-      </p:sp>
-      <p:sp>
-        <p:nvSpPr>
-          <p:cNvPr id="4" name="TextBox 3"/>
+            <a:endParaRPr/>
+          </a:p>
+        </p:txBody>
+      </p:sp>
+      <p:sp>
+        <p:nvSpPr>
+          <p:cNvPr id="5" name="TextBox 4"/>
           <p:cNvSpPr txBox="1"/>
           <p:nvPr/>
         </p:nvSpPr>
         <p:spPr>
           <a:xfrm>
-            <a:off x="731520" y="1554480"/>
-            <a:ext cx="3474720" cy="365760"/>
+            <a:off x="914400" y="2377440"/>
+            <a:ext cx="4754880" cy="365760"/>
           </a:xfrm>
           <a:prstGeom prst="rect">
             <a:avLst/>
@@ -7194,29 +7390,29 @@
           <a:lstStyle/>
           <a:p>
             <a:pPr algn="ctr">
-              <a:defRPr sz="1800" b="1">
-                <a:solidFill>
-                  <a:srgbClr val="232F3E"/>
-                </a:solidFill>
-                <a:latin typeface="Calibri"/>
-              </a:defRPr>
-            </a:pPr>
-            <a:r>
-              <a:t>Fraud Detected</a:t>
-            </a:r>
-          </a:p>
-        </p:txBody>
-      </p:sp>
-      <p:sp>
-        <p:nvSpPr>
-          <p:cNvPr id="5" name="TextBox 4"/>
+              <a:defRPr sz="2000" b="1">
+                <a:solidFill>
+                  <a:srgbClr val="FF9900"/>
+                </a:solidFill>
+                <a:latin typeface="Calibri"/>
+              </a:defRPr>
+            </a:pPr>
+            <a:r>
+              <a:t>Before Optimization</a:t>
+            </a:r>
+          </a:p>
+        </p:txBody>
+      </p:sp>
+      <p:sp>
+        <p:nvSpPr>
+          <p:cNvPr id="6" name="TextBox 5"/>
           <p:cNvSpPr txBox="1"/>
           <p:nvPr/>
         </p:nvSpPr>
         <p:spPr>
           <a:xfrm>
-            <a:off x="731520" y="2011680"/>
-            <a:ext cx="3474720" cy="731520"/>
+            <a:off x="1097280" y="2926080"/>
+            <a:ext cx="4572000" cy="1828800"/>
           </a:xfrm>
           <a:prstGeom prst="rect">
             <a:avLst/>
@@ -7229,56 +7425,97 @@
           </a:bodyPr>
           <a:lstStyle/>
           <a:p>
-            <a:pPr algn="ctr">
-              <a:defRPr sz="4800" b="1">
-                <a:solidFill>
-                  <a:srgbClr val="2ECC71"/>
-                </a:solidFill>
-                <a:latin typeface="Calibri"/>
-              </a:defRPr>
-            </a:pPr>
-            <a:r>
-              <a:t>88.7%</a:t>
-            </a:r>
-          </a:p>
-        </p:txBody>
-      </p:sp>
-      <p:sp>
-        <p:nvSpPr>
-          <p:cNvPr id="6" name="TextBox 5"/>
-          <p:cNvSpPr txBox="1"/>
-          <p:nvPr/>
-        </p:nvSpPr>
-        <p:spPr>
-          <a:xfrm>
-            <a:off x="731520" y="2926080"/>
-            <a:ext cx="3474720" cy="731520"/>
-          </a:xfrm>
-          <a:prstGeom prst="rect">
-            <a:avLst/>
-          </a:prstGeom>
-          <a:noFill/>
-        </p:spPr>
-        <p:txBody>
-          <a:bodyPr wrap="square">
-            <a:spAutoFit/>
-          </a:bodyPr>
-          <a:lstStyle/>
-          <a:p>
-            <a:pPr algn="ctr">
-              <a:defRPr sz="1400" b="0">
-                <a:solidFill>
-                  <a:srgbClr val="7F8C8D"/>
-                </a:solidFill>
-                <a:latin typeface="Calibri"/>
-              </a:defRPr>
-            </a:pPr>
-            <a:r>
-              <a:t>of fraudulent transactions</a:t>
-            </a:r>
-            <a:br/>
-            <a:r>
-              <a:t>caught by the model</a:t>
+            <a:pPr>
+              <a:spcAft>
+                <a:spcPts val="600"/>
+              </a:spcAft>
+              <a:defRPr sz="1600">
+                <a:solidFill>
+                  <a:srgbClr val="232F3E"/>
+                </a:solidFill>
+                <a:latin typeface="Calibri"/>
+              </a:defRPr>
+            </a:pPr>
+            <a:r>
+              <a:t>89.1% of fraud detected</a:t>
+            </a:r>
+          </a:p>
+          <a:p>
+            <a:pPr>
+              <a:spcAft>
+                <a:spcPts val="600"/>
+              </a:spcAft>
+              <a:defRPr sz="1600">
+                <a:solidFill>
+                  <a:srgbClr val="232F3E"/>
+                </a:solidFill>
+                <a:latin typeface="Calibri"/>
+              </a:defRPr>
+            </a:pPr>
+            <a:r>
+              <a:t>81.8% alert accuracy</a:t>
+            </a:r>
+          </a:p>
+          <a:p>
+            <a:pPr>
+              <a:spcAft>
+                <a:spcPts val="600"/>
+              </a:spcAft>
+              <a:defRPr sz="1600">
+                <a:solidFill>
+                  <a:srgbClr val="232F3E"/>
+                </a:solidFill>
+                <a:latin typeface="Calibri"/>
+              </a:defRPr>
+            </a:pPr>
+            <a:r>
+              <a:t>More false alarms disrupting customers</a:t>
+            </a:r>
+          </a:p>
+          <a:p>
+            <a:pPr>
+              <a:spcAft>
+                <a:spcPts val="600"/>
+              </a:spcAft>
+              <a:defRPr sz="1600">
+                <a:solidFill>
+                  <a:srgbClr val="232F3E"/>
+                </a:solidFill>
+                <a:latin typeface="Calibri"/>
+              </a:defRPr>
+            </a:pPr>
+            <a:endParaRPr/>
+          </a:p>
+          <a:p>
+            <a:pPr>
+              <a:spcAft>
+                <a:spcPts val="600"/>
+              </a:spcAft>
+              <a:defRPr sz="1600">
+                <a:solidFill>
+                  <a:srgbClr val="232F3E"/>
+                </a:solidFill>
+                <a:latin typeface="Calibri"/>
+              </a:defRPr>
+            </a:pPr>
+            <a:r>
+              <a:t>Good at catching fraud, but too many</a:t>
+            </a:r>
+          </a:p>
+          <a:p>
+            <a:pPr>
+              <a:spcAft>
+                <a:spcPts val="600"/>
+              </a:spcAft>
+              <a:defRPr sz="1600">
+                <a:solidFill>
+                  <a:srgbClr val="232F3E"/>
+                </a:solidFill>
+                <a:latin typeface="Calibri"/>
+              </a:defRPr>
+            </a:pPr>
+            <a:r>
+              <a:t>legitimate transactions were flagged</a:t>
             </a:r>
           </a:p>
         </p:txBody>
@@ -7291,14 +7528,14 @@
         </p:nvSpPr>
         <p:spPr>
           <a:xfrm>
-            <a:off x="4480559" y="1371600"/>
-            <a:ext cx="3474720" cy="2743200"/>
+            <a:off x="6400800" y="2286000"/>
+            <a:ext cx="5029200" cy="2743200"/>
           </a:xfrm>
           <a:prstGeom prst="roundRect">
             <a:avLst/>
           </a:prstGeom>
           <a:solidFill>
-            <a:srgbClr val="F8F9FA"/>
+            <a:srgbClr val="E8FDEE"/>
           </a:solidFill>
           <a:ln>
             <a:noFill/>
@@ -7323,6 +7560,7 @@
           <a:lstStyle/>
           <a:p>
             <a:pPr algn="ctr"/>
+            <a:endParaRPr/>
           </a:p>
         </p:txBody>
       </p:sp>
@@ -7334,8 +7572,8 @@
         </p:nvSpPr>
         <p:spPr>
           <a:xfrm>
-            <a:off x="4480559" y="1554480"/>
-            <a:ext cx="3474720" cy="365760"/>
+            <a:off x="6583680" y="2377440"/>
+            <a:ext cx="4754880" cy="365760"/>
           </a:xfrm>
           <a:prstGeom prst="rect">
             <a:avLst/>
@@ -7349,15 +7587,15 @@
           <a:lstStyle/>
           <a:p>
             <a:pPr algn="ctr">
-              <a:defRPr sz="1800" b="1">
-                <a:solidFill>
-                  <a:srgbClr val="232F3E"/>
-                </a:solidFill>
-                <a:latin typeface="Calibri"/>
-              </a:defRPr>
-            </a:pPr>
-            <a:r>
-              <a:t>Accuracy</a:t>
+              <a:defRPr sz="2000" b="1">
+                <a:solidFill>
+                  <a:srgbClr val="2ECC71"/>
+                </a:solidFill>
+                <a:latin typeface="Calibri"/>
+              </a:defRPr>
+            </a:pPr>
+            <a:r>
+              <a:t>After Optimization</a:t>
             </a:r>
           </a:p>
         </p:txBody>
@@ -7370,8 +7608,8 @@
         </p:nvSpPr>
         <p:spPr>
           <a:xfrm>
-            <a:off x="4480559" y="2011680"/>
-            <a:ext cx="3474720" cy="731520"/>
+            <a:off x="6766560" y="2926080"/>
+            <a:ext cx="4572000" cy="1828800"/>
           </a:xfrm>
           <a:prstGeom prst="rect">
             <a:avLst/>
@@ -7384,76 +7622,117 @@
           </a:bodyPr>
           <a:lstStyle/>
           <a:p>
-            <a:pPr algn="ctr">
-              <a:defRPr sz="4800" b="1">
-                <a:solidFill>
-                  <a:srgbClr val="00A3E0"/>
-                </a:solidFill>
-                <a:latin typeface="Calibri"/>
-              </a:defRPr>
-            </a:pPr>
-            <a:r>
-              <a:t>94.9%</a:t>
-            </a:r>
-          </a:p>
-        </p:txBody>
-      </p:sp>
-      <p:sp>
-        <p:nvSpPr>
-          <p:cNvPr id="10" name="TextBox 9"/>
-          <p:cNvSpPr txBox="1"/>
-          <p:nvPr/>
-        </p:nvSpPr>
-        <p:spPr>
-          <a:xfrm>
-            <a:off x="4480559" y="2926080"/>
-            <a:ext cx="3474720" cy="731520"/>
-          </a:xfrm>
-          <a:prstGeom prst="rect">
-            <a:avLst/>
-          </a:prstGeom>
-          <a:noFill/>
-        </p:spPr>
-        <p:txBody>
-          <a:bodyPr wrap="square">
-            <a:spAutoFit/>
-          </a:bodyPr>
-          <a:lstStyle/>
-          <a:p>
-            <a:pPr algn="ctr">
-              <a:defRPr sz="1400" b="0">
-                <a:solidFill>
-                  <a:srgbClr val="7F8C8D"/>
-                </a:solidFill>
-                <a:latin typeface="Calibri"/>
-              </a:defRPr>
-            </a:pPr>
-            <a:r>
-              <a:t>of fraud alerts are</a:t>
-            </a:r>
-            <a:br/>
-            <a:r>
-              <a:t>actual fraud (not false alarms)</a:t>
-            </a:r>
-          </a:p>
-        </p:txBody>
-      </p:sp>
-      <p:sp>
-        <p:nvSpPr>
-          <p:cNvPr id="11" name="Rounded Rectangle 10"/>
+            <a:pPr>
+              <a:spcAft>
+                <a:spcPts val="600"/>
+              </a:spcAft>
+              <a:defRPr sz="1600">
+                <a:solidFill>
+                  <a:srgbClr val="232F3E"/>
+                </a:solidFill>
+                <a:latin typeface="Calibri"/>
+              </a:defRPr>
+            </a:pPr>
+            <a:r>
+              <a:t>88.7% of fraud detected</a:t>
+            </a:r>
+          </a:p>
+          <a:p>
+            <a:pPr>
+              <a:spcAft>
+                <a:spcPts val="600"/>
+              </a:spcAft>
+              <a:defRPr sz="1600">
+                <a:solidFill>
+                  <a:srgbClr val="232F3E"/>
+                </a:solidFill>
+                <a:latin typeface="Calibri"/>
+              </a:defRPr>
+            </a:pPr>
+            <a:r>
+              <a:t>94.9% alert accuracy</a:t>
+            </a:r>
+          </a:p>
+          <a:p>
+            <a:pPr>
+              <a:spcAft>
+                <a:spcPts val="600"/>
+              </a:spcAft>
+              <a:defRPr sz="1600">
+                <a:solidFill>
+                  <a:srgbClr val="232F3E"/>
+                </a:solidFill>
+                <a:latin typeface="Calibri"/>
+              </a:defRPr>
+            </a:pPr>
+            <a:r>
+              <a:t>Far fewer false alarms</a:t>
+            </a:r>
+          </a:p>
+          <a:p>
+            <a:pPr>
+              <a:spcAft>
+                <a:spcPts val="600"/>
+              </a:spcAft>
+              <a:defRPr sz="1600">
+                <a:solidFill>
+                  <a:srgbClr val="232F3E"/>
+                </a:solidFill>
+                <a:latin typeface="Calibri"/>
+              </a:defRPr>
+            </a:pPr>
+            <a:endParaRPr/>
+          </a:p>
+          <a:p>
+            <a:pPr>
+              <a:spcAft>
+                <a:spcPts val="600"/>
+              </a:spcAft>
+              <a:defRPr sz="1600">
+                <a:solidFill>
+                  <a:srgbClr val="232F3E"/>
+                </a:solidFill>
+                <a:latin typeface="Calibri"/>
+              </a:defRPr>
+            </a:pPr>
+            <a:r>
+              <a:t>Nearly the same fraud detection with</a:t>
+            </a:r>
+          </a:p>
+          <a:p>
+            <a:pPr>
+              <a:spcAft>
+                <a:spcPts val="600"/>
+              </a:spcAft>
+              <a:defRPr sz="1600">
+                <a:solidFill>
+                  <a:srgbClr val="232F3E"/>
+                </a:solidFill>
+                <a:latin typeface="Calibri"/>
+              </a:defRPr>
+            </a:pPr>
+            <a:r>
+              <a:t>dramatically better precision</a:t>
+            </a:r>
+          </a:p>
+        </p:txBody>
+      </p:sp>
+      <p:sp>
+        <p:nvSpPr>
+          <p:cNvPr id="10" name="Rounded Rectangle 9"/>
           <p:cNvSpPr/>
           <p:nvPr/>
         </p:nvSpPr>
         <p:spPr>
           <a:xfrm>
-            <a:off x="8229600" y="1371600"/>
-            <a:ext cx="3474720" cy="2743200"/>
+            <a:off x="731520" y="5303520"/>
+            <a:ext cx="10515600" cy="731520"/>
           </a:xfrm>
           <a:prstGeom prst="roundRect">
             <a:avLst/>
           </a:prstGeom>
           <a:solidFill>
-            <a:srgbClr val="F8F9FA"/>
+            <a:srgbClr val="E8F4FD"/>
           </a:solidFill>
           <a:ln>
             <a:noFill/>
@@ -7474,33 +7753,7 @@
           </a:fontRef>
         </p:style>
         <p:txBody>
-          <a:bodyPr rtlCol="0" anchor="ctr"/>
-          <a:lstStyle/>
-          <a:p>
-            <a:pPr algn="ctr"/>
-          </a:p>
-        </p:txBody>
-      </p:sp>
-      <p:sp>
-        <p:nvSpPr>
-          <p:cNvPr id="12" name="TextBox 11"/>
-          <p:cNvSpPr txBox="1"/>
-          <p:nvPr/>
-        </p:nvSpPr>
-        <p:spPr>
-          <a:xfrm>
-            <a:off x="8229600" y="1554480"/>
-            <a:ext cx="3474720" cy="365760"/>
-          </a:xfrm>
-          <a:prstGeom prst="rect">
-            <a:avLst/>
-          </a:prstGeom>
-          <a:noFill/>
-        </p:spPr>
-        <p:txBody>
-          <a:bodyPr wrap="square">
-            <a:spAutoFit/>
-          </a:bodyPr>
+          <a:bodyPr wrap="square" rtlCol="0" anchor="ctr"/>
           <a:lstStyle/>
           <a:p>
             <a:pPr algn="ctr">
@@ -7512,119 +7765,7 @@
               </a:defRPr>
             </a:pPr>
             <a:r>
-              <a:t>Overall Accuracy</a:t>
-            </a:r>
-          </a:p>
-        </p:txBody>
-      </p:sp>
-      <p:sp>
-        <p:nvSpPr>
-          <p:cNvPr id="13" name="TextBox 12"/>
-          <p:cNvSpPr txBox="1"/>
-          <p:nvPr/>
-        </p:nvSpPr>
-        <p:spPr>
-          <a:xfrm>
-            <a:off x="8229600" y="2011680"/>
-            <a:ext cx="3474720" cy="731520"/>
-          </a:xfrm>
-          <a:prstGeom prst="rect">
-            <a:avLst/>
-          </a:prstGeom>
-          <a:noFill/>
-        </p:spPr>
-        <p:txBody>
-          <a:bodyPr wrap="square">
-            <a:spAutoFit/>
-          </a:bodyPr>
-          <a:lstStyle/>
-          <a:p>
-            <a:pPr algn="ctr">
-              <a:defRPr sz="4800" b="1">
-                <a:solidFill>
-                  <a:srgbClr val="8E44AD"/>
-                </a:solidFill>
-                <a:latin typeface="Calibri"/>
-              </a:defRPr>
-            </a:pPr>
-            <a:r>
-              <a:t>99.9%</a:t>
-            </a:r>
-          </a:p>
-        </p:txBody>
-      </p:sp>
-      <p:sp>
-        <p:nvSpPr>
-          <p:cNvPr id="14" name="TextBox 13"/>
-          <p:cNvSpPr txBox="1"/>
-          <p:nvPr/>
-        </p:nvSpPr>
-        <p:spPr>
-          <a:xfrm>
-            <a:off x="8229600" y="2926080"/>
-            <a:ext cx="3474720" cy="731520"/>
-          </a:xfrm>
-          <a:prstGeom prst="rect">
-            <a:avLst/>
-          </a:prstGeom>
-          <a:noFill/>
-        </p:spPr>
-        <p:txBody>
-          <a:bodyPr wrap="square">
-            <a:spAutoFit/>
-          </a:bodyPr>
-          <a:lstStyle/>
-          <a:p>
-            <a:pPr algn="ctr">
-              <a:defRPr sz="1400" b="0">
-                <a:solidFill>
-                  <a:srgbClr val="7F8C8D"/>
-                </a:solidFill>
-                <a:latin typeface="Calibri"/>
-              </a:defRPr>
-            </a:pPr>
-            <a:r>
-              <a:t>of all transactions</a:t>
-            </a:r>
-            <a:br/>
-            <a:r>
-              <a:t>correctly classified</a:t>
-            </a:r>
-          </a:p>
-        </p:txBody>
-      </p:sp>
-      <p:sp>
-        <p:nvSpPr>
-          <p:cNvPr id="15" name="TextBox 14"/>
-          <p:cNvSpPr txBox="1"/>
-          <p:nvPr/>
-        </p:nvSpPr>
-        <p:spPr>
-          <a:xfrm>
-            <a:off x="731520" y="4572000"/>
-            <a:ext cx="10515600" cy="731520"/>
-          </a:xfrm>
-          <a:prstGeom prst="rect">
-            <a:avLst/>
-          </a:prstGeom>
-          <a:noFill/>
-        </p:spPr>
-        <p:txBody>
-          <a:bodyPr wrap="square">
-            <a:spAutoFit/>
-          </a:bodyPr>
-          <a:lstStyle/>
-          <a:p>
-            <a:pPr algn="l">
-              <a:defRPr sz="1700" b="0">
-                <a:solidFill>
-                  <a:srgbClr val="232F3E"/>
-                </a:solidFill>
-                <a:latin typeface="Calibri"/>
-              </a:defRPr>
-            </a:pPr>
-            <a:r>
-              <a:t>Out of 259,335 test transactions containing 1,501 fraud cases, the model correctly identified 1,331 fraudulent transactions while generating only 72 false alarms.</a:t>
+              <a:t>Result: 16% improvement in alert accuracy with less than 1% reduction in fraud detection</a:t>
             </a:r>
           </a:p>
         </p:txBody>
@@ -7637,8 +7778,8 @@
 </p:sld>
 </file>
 
-<file path=ppt/slides/slide6.xml><?xml version="1.0" encoding="utf-8"?>
-<p:sld xmlns:a="http://schemas.openxmlformats.org/drawingml/2006/main" xmlns:p="http://schemas.openxmlformats.org/presentationml/2006/main" xmlns:r="http://schemas.openxmlformats.org/officeDocument/2006/relationships">
+<file path=ppt/slides/slide7.xml><?xml version="1.0" encoding="utf-8"?>
+<p:sld xmlns:a="http://schemas.openxmlformats.org/drawingml/2006/main" xmlns:r="http://schemas.openxmlformats.org/officeDocument/2006/relationships" xmlns:p="http://schemas.openxmlformats.org/presentationml/2006/main">
   <p:cSld>
     <p:bg>
       <p:bgPr>
@@ -7654,7 +7795,14 @@
         <p:cNvGrpSpPr/>
         <p:nvPr/>
       </p:nvGrpSpPr>
-      <p:grpSpPr/>
+      <p:grpSpPr>
+        <a:xfrm>
+          <a:off x="0" y="0"/>
+          <a:ext cx="0" cy="0"/>
+          <a:chOff x="0" y="0"/>
+          <a:chExt cx="0" cy="0"/>
+        </a:xfrm>
+      </p:grpSpPr>
       <p:sp>
         <p:nvSpPr>
           <p:cNvPr id="2" name="Rounded Rectangle 1"/>
@@ -7691,7 +7839,7 @@
           </a:fontRef>
         </p:style>
         <p:txBody>
-          <a:bodyPr rtlCol="0" anchor="ctr" wrap="square"/>
+          <a:bodyPr wrap="square" rtlCol="0" anchor="ctr"/>
           <a:lstStyle/>
           <a:p>
             <a:pPr algn="ctr">
@@ -7703,7 +7851,16 @@
               </a:defRPr>
             </a:pPr>
             <a:r>
-              <a:t>What This Means in Practice</a:t>
+              <a:rPr dirty="0"/>
+              <a:t>Fairness </a:t>
+            </a:r>
+            <a:r>
+              <a:rPr lang="en-US" dirty="0"/>
+              <a:t>: </a:t>
+            </a:r>
+            <a:r>
+              <a:rPr dirty="0"/>
+              <a:t>Protecting All Customers Equally</a:t>
             </a:r>
           </a:p>
         </p:txBody>
@@ -7717,7 +7874,7 @@
         <p:spPr>
           <a:xfrm>
             <a:off x="731520" y="1097280"/>
-            <a:ext cx="10515600" cy="548640"/>
+            <a:ext cx="10515600" cy="731520"/>
           </a:xfrm>
           <a:prstGeom prst="rect">
             <a:avLst/>
@@ -7731,7 +7888,7 @@
           <a:lstStyle/>
           <a:p>
             <a:pPr algn="l">
-              <a:defRPr sz="2000" b="1">
+              <a:defRPr sz="1800" b="0">
                 <a:solidFill>
                   <a:srgbClr val="232F3E"/>
                 </a:solidFill>
@@ -7739,7 +7896,7 @@
               </a:defRPr>
             </a:pPr>
             <a:r>
-              <a:t>For every 259,335 transactions processed:</a:t>
+              <a:t>We audited the model to ensure it treats all customer groups fairly, regardless of gender or age. No customer segment should be disproportionately affected by missed fraud or false alarms.</a:t>
             </a:r>
           </a:p>
         </p:txBody>
@@ -7752,8 +7909,8 @@
         </p:nvSpPr>
         <p:spPr>
           <a:xfrm>
-            <a:off x="731520" y="2011680"/>
-            <a:ext cx="5029200" cy="1371600"/>
+            <a:off x="731520" y="2286000"/>
+            <a:ext cx="5029200" cy="2286000"/>
           </a:xfrm>
           <a:prstGeom prst="roundRect">
             <a:avLst/>
@@ -7784,6 +7941,7 @@
           <a:lstStyle/>
           <a:p>
             <a:pPr algn="ctr"/>
+            <a:endParaRPr/>
           </a:p>
         </p:txBody>
       </p:sp>
@@ -7795,7 +7953,7 @@
         </p:nvSpPr>
         <p:spPr>
           <a:xfrm>
-            <a:off x="914400" y="2103120"/>
+            <a:off x="914400" y="2377440"/>
             <a:ext cx="4754880" cy="365760"/>
           </a:xfrm>
           <a:prstGeom prst="rect">
@@ -7818,7 +7976,7 @@
               </a:defRPr>
             </a:pPr>
             <a:r>
-              <a:t>Fraud Caught</a:t>
+              <a:t>Gender Fairness</a:t>
             </a:r>
           </a:p>
         </p:txBody>
@@ -7831,8 +7989,8 @@
         </p:nvSpPr>
         <p:spPr>
           <a:xfrm>
-            <a:off x="914400" y="2560320"/>
-            <a:ext cx="4754880" cy="548640"/>
+            <a:off x="1097280" y="2926080"/>
+            <a:ext cx="4572000" cy="1371600"/>
           </a:xfrm>
           <a:prstGeom prst="rect">
             <a:avLst/>
@@ -7845,8 +8003,11 @@
           </a:bodyPr>
           <a:lstStyle/>
           <a:p>
-            <a:pPr algn="ctr">
-              <a:defRPr sz="1800" b="0">
+            <a:pPr>
+              <a:spcAft>
+                <a:spcPts val="800"/>
+              </a:spcAft>
+              <a:defRPr sz="1600">
                 <a:solidFill>
                   <a:srgbClr val="232F3E"/>
                 </a:solidFill>
@@ -7854,7 +8015,67 @@
               </a:defRPr>
             </a:pPr>
             <a:r>
-              <a:t>1,331 fraudulent transactions stopped</a:t>
+              <a:rPr dirty="0"/>
+              <a:t>✓  Female fraud detection: 88.4%</a:t>
+            </a:r>
+          </a:p>
+          <a:p>
+            <a:pPr>
+              <a:spcAft>
+                <a:spcPts val="800"/>
+              </a:spcAft>
+              <a:defRPr sz="1600">
+                <a:solidFill>
+                  <a:srgbClr val="232F3E"/>
+                </a:solidFill>
+                <a:latin typeface="Calibri"/>
+              </a:defRPr>
+            </a:pPr>
+            <a:r>
+              <a:rPr dirty="0"/>
+              <a:t>✓  Male fraud detection: 89.0%</a:t>
+            </a:r>
+          </a:p>
+          <a:p>
+            <a:pPr>
+              <a:spcAft>
+                <a:spcPts val="800"/>
+              </a:spcAft>
+              <a:defRPr sz="1600">
+                <a:solidFill>
+                  <a:srgbClr val="232F3E"/>
+                </a:solidFill>
+                <a:latin typeface="Calibri"/>
+              </a:defRPr>
+            </a:pPr>
+            <a:r>
+              <a:rPr dirty="0"/>
+              <a:t>✓  Minimal difference </a:t>
+            </a:r>
+            <a:r>
+              <a:rPr lang="en-US" dirty="0"/>
+              <a:t>and </a:t>
+            </a:r>
+            <a:r>
+              <a:rPr dirty="0"/>
+              <a:t>model is fair</a:t>
+            </a:r>
+          </a:p>
+          <a:p>
+            <a:pPr>
+              <a:spcAft>
+                <a:spcPts val="800"/>
+              </a:spcAft>
+              <a:defRPr sz="1600">
+                <a:solidFill>
+                  <a:srgbClr val="232F3E"/>
+                </a:solidFill>
+                <a:latin typeface="Calibri"/>
+              </a:defRPr>
+            </a:pPr>
+            <a:r>
+              <a:rPr dirty="0"/>
+              <a:t>✓  Near-zero false alarm rate for both</a:t>
             </a:r>
           </a:p>
         </p:txBody>
@@ -7867,238 +8088,8 @@
         </p:nvSpPr>
         <p:spPr>
           <a:xfrm>
-            <a:off x="6400800" y="2011680"/>
-            <a:ext cx="5029200" cy="1371600"/>
-          </a:xfrm>
-          <a:prstGeom prst="roundRect">
-            <a:avLst/>
-          </a:prstGeom>
-          <a:solidFill>
-            <a:srgbClr val="FDE8E8"/>
-          </a:solidFill>
-          <a:ln>
-            <a:noFill/>
-          </a:ln>
-        </p:spPr>
-        <p:style>
-          <a:lnRef idx="1">
-            <a:schemeClr val="accent1"/>
-          </a:lnRef>
-          <a:fillRef idx="3">
-            <a:schemeClr val="accent1"/>
-          </a:fillRef>
-          <a:effectRef idx="2">
-            <a:schemeClr val="accent1"/>
-          </a:effectRef>
-          <a:fontRef idx="minor">
-            <a:schemeClr val="lt1"/>
-          </a:fontRef>
-        </p:style>
-        <p:txBody>
-          <a:bodyPr rtlCol="0" anchor="ctr"/>
-          <a:lstStyle/>
-          <a:p>
-            <a:pPr algn="ctr"/>
-          </a:p>
-        </p:txBody>
-      </p:sp>
-      <p:sp>
-        <p:nvSpPr>
-          <p:cNvPr id="8" name="TextBox 7"/>
-          <p:cNvSpPr txBox="1"/>
-          <p:nvPr/>
-        </p:nvSpPr>
-        <p:spPr>
-          <a:xfrm>
-            <a:off x="6583680" y="2103120"/>
-            <a:ext cx="4754880" cy="365760"/>
-          </a:xfrm>
-          <a:prstGeom prst="rect">
-            <a:avLst/>
-          </a:prstGeom>
-          <a:noFill/>
-        </p:spPr>
-        <p:txBody>
-          <a:bodyPr wrap="square">
-            <a:spAutoFit/>
-          </a:bodyPr>
-          <a:lstStyle/>
-          <a:p>
-            <a:pPr algn="ctr">
-              <a:defRPr sz="2000" b="1">
-                <a:solidFill>
-                  <a:srgbClr val="E74C3C"/>
-                </a:solidFill>
-                <a:latin typeface="Calibri"/>
-              </a:defRPr>
-            </a:pPr>
-            <a:r>
-              <a:t>Fraud Missed</a:t>
-            </a:r>
-          </a:p>
-        </p:txBody>
-      </p:sp>
-      <p:sp>
-        <p:nvSpPr>
-          <p:cNvPr id="9" name="TextBox 8"/>
-          <p:cNvSpPr txBox="1"/>
-          <p:nvPr/>
-        </p:nvSpPr>
-        <p:spPr>
-          <a:xfrm>
-            <a:off x="6583680" y="2560320"/>
-            <a:ext cx="4754880" cy="548640"/>
-          </a:xfrm>
-          <a:prstGeom prst="rect">
-            <a:avLst/>
-          </a:prstGeom>
-          <a:noFill/>
-        </p:spPr>
-        <p:txBody>
-          <a:bodyPr wrap="square">
-            <a:spAutoFit/>
-          </a:bodyPr>
-          <a:lstStyle/>
-          <a:p>
-            <a:pPr algn="ctr">
-              <a:defRPr sz="1800" b="0">
-                <a:solidFill>
-                  <a:srgbClr val="232F3E"/>
-                </a:solidFill>
-                <a:latin typeface="Calibri"/>
-              </a:defRPr>
-            </a:pPr>
-            <a:r>
-              <a:t>170 fraudulent transactions slipped through</a:t>
-            </a:r>
-          </a:p>
-        </p:txBody>
-      </p:sp>
-      <p:sp>
-        <p:nvSpPr>
-          <p:cNvPr id="10" name="Rounded Rectangle 9"/>
-          <p:cNvSpPr/>
-          <p:nvPr/>
-        </p:nvSpPr>
-        <p:spPr>
-          <a:xfrm>
-            <a:off x="731520" y="3840480"/>
-            <a:ext cx="5029200" cy="1371600"/>
-          </a:xfrm>
-          <a:prstGeom prst="roundRect">
-            <a:avLst/>
-          </a:prstGeom>
-          <a:solidFill>
-            <a:srgbClr val="FDF2E8"/>
-          </a:solidFill>
-          <a:ln>
-            <a:noFill/>
-          </a:ln>
-        </p:spPr>
-        <p:style>
-          <a:lnRef idx="1">
-            <a:schemeClr val="accent1"/>
-          </a:lnRef>
-          <a:fillRef idx="3">
-            <a:schemeClr val="accent1"/>
-          </a:fillRef>
-          <a:effectRef idx="2">
-            <a:schemeClr val="accent1"/>
-          </a:effectRef>
-          <a:fontRef idx="minor">
-            <a:schemeClr val="lt1"/>
-          </a:fontRef>
-        </p:style>
-        <p:txBody>
-          <a:bodyPr rtlCol="0" anchor="ctr"/>
-          <a:lstStyle/>
-          <a:p>
-            <a:pPr algn="ctr"/>
-          </a:p>
-        </p:txBody>
-      </p:sp>
-      <p:sp>
-        <p:nvSpPr>
-          <p:cNvPr id="11" name="TextBox 10"/>
-          <p:cNvSpPr txBox="1"/>
-          <p:nvPr/>
-        </p:nvSpPr>
-        <p:spPr>
-          <a:xfrm>
-            <a:off x="914400" y="3931920"/>
-            <a:ext cx="4754880" cy="365760"/>
-          </a:xfrm>
-          <a:prstGeom prst="rect">
-            <a:avLst/>
-          </a:prstGeom>
-          <a:noFill/>
-        </p:spPr>
-        <p:txBody>
-          <a:bodyPr wrap="square">
-            <a:spAutoFit/>
-          </a:bodyPr>
-          <a:lstStyle/>
-          <a:p>
-            <a:pPr algn="ctr">
-              <a:defRPr sz="2000" b="1">
-                <a:solidFill>
-                  <a:srgbClr val="FF9900"/>
-                </a:solidFill>
-                <a:latin typeface="Calibri"/>
-              </a:defRPr>
-            </a:pPr>
-            <a:r>
-              <a:t>False Alarms</a:t>
-            </a:r>
-          </a:p>
-        </p:txBody>
-      </p:sp>
-      <p:sp>
-        <p:nvSpPr>
-          <p:cNvPr id="12" name="TextBox 11"/>
-          <p:cNvSpPr txBox="1"/>
-          <p:nvPr/>
-        </p:nvSpPr>
-        <p:spPr>
-          <a:xfrm>
-            <a:off x="914400" y="4389120"/>
-            <a:ext cx="4754880" cy="548640"/>
-          </a:xfrm>
-          <a:prstGeom prst="rect">
-            <a:avLst/>
-          </a:prstGeom>
-          <a:noFill/>
-        </p:spPr>
-        <p:txBody>
-          <a:bodyPr wrap="square">
-            <a:spAutoFit/>
-          </a:bodyPr>
-          <a:lstStyle/>
-          <a:p>
-            <a:pPr algn="ctr">
-              <a:defRPr sz="1800" b="0">
-                <a:solidFill>
-                  <a:srgbClr val="232F3E"/>
-                </a:solidFill>
-                <a:latin typeface="Calibri"/>
-              </a:defRPr>
-            </a:pPr>
-            <a:r>
-              <a:t>Only 72 legitimate transactions incorrectly flagged</a:t>
-            </a:r>
-          </a:p>
-        </p:txBody>
-      </p:sp>
-      <p:sp>
-        <p:nvSpPr>
-          <p:cNvPr id="13" name="Rounded Rectangle 12"/>
-          <p:cNvSpPr/>
-          <p:nvPr/>
-        </p:nvSpPr>
-        <p:spPr>
-          <a:xfrm>
-            <a:off x="6400800" y="3840480"/>
-            <a:ext cx="5029200" cy="1371600"/>
+            <a:off x="6400800" y="2286000"/>
+            <a:ext cx="5029200" cy="2286000"/>
           </a:xfrm>
           <a:prstGeom prst="roundRect">
             <a:avLst/>
@@ -8129,18 +8120,19 @@
           <a:lstStyle/>
           <a:p>
             <a:pPr algn="ctr"/>
-          </a:p>
-        </p:txBody>
-      </p:sp>
-      <p:sp>
-        <p:nvSpPr>
-          <p:cNvPr id="14" name="TextBox 13"/>
+            <a:endParaRPr/>
+          </a:p>
+        </p:txBody>
+      </p:sp>
+      <p:sp>
+        <p:nvSpPr>
+          <p:cNvPr id="8" name="TextBox 7"/>
           <p:cNvSpPr txBox="1"/>
           <p:nvPr/>
         </p:nvSpPr>
         <p:spPr>
           <a:xfrm>
-            <a:off x="6583680" y="3931920"/>
+            <a:off x="6583680" y="2377440"/>
             <a:ext cx="4754880" cy="365760"/>
           </a:xfrm>
           <a:prstGeom prst="rect">
@@ -8163,21 +8155,21 @@
               </a:defRPr>
             </a:pPr>
             <a:r>
-              <a:t>Smooth Sailing</a:t>
-            </a:r>
-          </a:p>
-        </p:txBody>
-      </p:sp>
-      <p:sp>
-        <p:nvSpPr>
-          <p:cNvPr id="15" name="TextBox 14"/>
+              <a:t>Age Group Fairness</a:t>
+            </a:r>
+          </a:p>
+        </p:txBody>
+      </p:sp>
+      <p:sp>
+        <p:nvSpPr>
+          <p:cNvPr id="9" name="TextBox 8"/>
           <p:cNvSpPr txBox="1"/>
           <p:nvPr/>
         </p:nvSpPr>
         <p:spPr>
           <a:xfrm>
-            <a:off x="6583680" y="4389120"/>
-            <a:ext cx="4754880" cy="548640"/>
+            <a:off x="6766560" y="2926080"/>
+            <a:ext cx="4572000" cy="1371600"/>
           </a:xfrm>
           <a:prstGeom prst="rect">
             <a:avLst/>
@@ -8190,8 +8182,11 @@
           </a:bodyPr>
           <a:lstStyle/>
           <a:p>
-            <a:pPr algn="ctr">
-              <a:defRPr sz="1800" b="0">
+            <a:pPr>
+              <a:spcAft>
+                <a:spcPts val="800"/>
+              </a:spcAft>
+              <a:defRPr sz="1600">
                 <a:solidFill>
                   <a:srgbClr val="232F3E"/>
                 </a:solidFill>
@@ -8199,21 +8194,69 @@
               </a:defRPr>
             </a:pPr>
             <a:r>
-              <a:t>257,762 legitimate transactions processed normally</a:t>
-            </a:r>
-          </a:p>
-        </p:txBody>
-      </p:sp>
-      <p:sp>
-        <p:nvSpPr>
-          <p:cNvPr id="16" name="TextBox 15"/>
+              <a:t>✓  Under 25: 87.1% detection</a:t>
+            </a:r>
+          </a:p>
+          <a:p>
+            <a:pPr>
+              <a:spcAft>
+                <a:spcPts val="800"/>
+              </a:spcAft>
+              <a:defRPr sz="1600">
+                <a:solidFill>
+                  <a:srgbClr val="232F3E"/>
+                </a:solidFill>
+                <a:latin typeface="Calibri"/>
+              </a:defRPr>
+            </a:pPr>
+            <a:r>
+              <a:t>✓  25-45: 85.0% detection</a:t>
+            </a:r>
+          </a:p>
+          <a:p>
+            <a:pPr>
+              <a:spcAft>
+                <a:spcPts val="800"/>
+              </a:spcAft>
+              <a:defRPr sz="1600">
+                <a:solidFill>
+                  <a:srgbClr val="232F3E"/>
+                </a:solidFill>
+                <a:latin typeface="Calibri"/>
+              </a:defRPr>
+            </a:pPr>
+            <a:r>
+              <a:t>✓  45-65: 90.2% detection</a:t>
+            </a:r>
+          </a:p>
+          <a:p>
+            <a:pPr>
+              <a:spcAft>
+                <a:spcPts val="800"/>
+              </a:spcAft>
+              <a:defRPr sz="1600">
+                <a:solidFill>
+                  <a:srgbClr val="232F3E"/>
+                </a:solidFill>
+                <a:latin typeface="Calibri"/>
+              </a:defRPr>
+            </a:pPr>
+            <a:r>
+              <a:t>✓  65+: 93.3% detection</a:t>
+            </a:r>
+          </a:p>
+        </p:txBody>
+      </p:sp>
+      <p:sp>
+        <p:nvSpPr>
+          <p:cNvPr id="10" name="TextBox 9"/>
           <p:cNvSpPr txBox="1"/>
           <p:nvPr/>
         </p:nvSpPr>
         <p:spPr>
           <a:xfrm>
-            <a:off x="731520" y="5669280"/>
-            <a:ext cx="10515600" cy="457200"/>
+            <a:off x="731520" y="4846320"/>
+            <a:ext cx="10515600" cy="731520"/>
           </a:xfrm>
           <a:prstGeom prst="rect">
             <a:avLst/>
@@ -8227,15 +8270,77 @@
           <a:lstStyle/>
           <a:p>
             <a:pPr algn="l">
-              <a:defRPr sz="1700" b="1">
-                <a:solidFill>
-                  <a:srgbClr val="2ECC71"/>
-                </a:solidFill>
-                <a:latin typeface="Calibri"/>
-              </a:defRPr>
-            </a:pPr>
-            <a:r>
-              <a:t>This means 99.97% of legitimate customers experience zero disruption from the fraud detection system.</a:t>
+              <a:defRPr sz="1600" b="0">
+                <a:solidFill>
+                  <a:srgbClr val="232F3E"/>
+                </a:solidFill>
+                <a:latin typeface="Calibri"/>
+              </a:defRPr>
+            </a:pPr>
+            <a:r>
+              <a:t>Younger customers have slightly lower detection rates. We recommend additional monitoring and targeted improvements for this group to ensure equitable protection.</a:t>
+            </a:r>
+          </a:p>
+        </p:txBody>
+      </p:sp>
+      <p:sp>
+        <p:nvSpPr>
+          <p:cNvPr id="11" name="Rounded Rectangle 10"/>
+          <p:cNvSpPr/>
+          <p:nvPr/>
+        </p:nvSpPr>
+        <p:spPr>
+          <a:xfrm>
+            <a:off x="731520" y="5669280"/>
+            <a:ext cx="10515600" cy="548640"/>
+          </a:xfrm>
+          <a:prstGeom prst="roundRect">
+            <a:avLst/>
+          </a:prstGeom>
+          <a:solidFill>
+            <a:srgbClr val="E8FDEE"/>
+          </a:solidFill>
+          <a:ln>
+            <a:noFill/>
+          </a:ln>
+        </p:spPr>
+        <p:style>
+          <a:lnRef idx="1">
+            <a:schemeClr val="accent1"/>
+          </a:lnRef>
+          <a:fillRef idx="3">
+            <a:schemeClr val="accent1"/>
+          </a:fillRef>
+          <a:effectRef idx="2">
+            <a:schemeClr val="accent1"/>
+          </a:effectRef>
+          <a:fontRef idx="minor">
+            <a:schemeClr val="lt1"/>
+          </a:fontRef>
+        </p:style>
+        <p:txBody>
+          <a:bodyPr wrap="square" rtlCol="0" anchor="ctr"/>
+          <a:lstStyle/>
+          <a:p>
+            <a:pPr algn="ctr">
+              <a:defRPr sz="1500" b="1">
+                <a:solidFill>
+                  <a:srgbClr val="232F3E"/>
+                </a:solidFill>
+                <a:latin typeface="Calibri"/>
+              </a:defRPr>
+            </a:pPr>
+            <a:r>
+              <a:rPr dirty="0"/>
+              <a:t>False alarm rates are near zero across all demographics </a:t>
+            </a:r>
+            <a:r>
+              <a:rPr lang="en-US" dirty="0"/>
+              <a:t>and </a:t>
+            </a:r>
+            <a:r>
+              <a:rPr dirty="0"/>
+              <a:t>legitimate customers are rarely disrupted.</a:t>
             </a:r>
           </a:p>
         </p:txBody>
@@ -8248,8 +8353,8 @@
 </p:sld>
 </file>
 
-<file path=ppt/slides/slide7.xml><?xml version="1.0" encoding="utf-8"?>
-<p:sld xmlns:a="http://schemas.openxmlformats.org/drawingml/2006/main" xmlns:p="http://schemas.openxmlformats.org/presentationml/2006/main" xmlns:r="http://schemas.openxmlformats.org/officeDocument/2006/relationships">
+<file path=ppt/slides/slide8.xml><?xml version="1.0" encoding="utf-8"?>
+<p:sld xmlns:a="http://schemas.openxmlformats.org/drawingml/2006/main" xmlns:r="http://schemas.openxmlformats.org/officeDocument/2006/relationships" xmlns:p="http://schemas.openxmlformats.org/presentationml/2006/main">
   <p:cSld>
     <p:bg>
       <p:bgPr>
@@ -8265,7 +8370,14 @@
         <p:cNvGrpSpPr/>
         <p:nvPr/>
       </p:nvGrpSpPr>
-      <p:grpSpPr/>
+      <p:grpSpPr>
+        <a:xfrm>
+          <a:off x="0" y="0"/>
+          <a:ext cx="0" cy="0"/>
+          <a:chOff x="0" y="0"/>
+          <a:chExt cx="0" cy="0"/>
+        </a:xfrm>
+      </p:grpSpPr>
       <p:sp>
         <p:nvSpPr>
           <p:cNvPr id="2" name="Rounded Rectangle 1"/>
@@ -8302,7 +8414,7 @@
           </a:fontRef>
         </p:style>
         <p:txBody>
-          <a:bodyPr rtlCol="0" anchor="ctr" wrap="square"/>
+          <a:bodyPr wrap="square" rtlCol="0" anchor="ctr"/>
           <a:lstStyle/>
           <a:p>
             <a:pPr algn="ctr">
@@ -8314,7 +8426,7 @@
               </a:defRPr>
             </a:pPr>
             <a:r>
-              <a:t>How We Improved the Model</a:t>
+              <a:t>How the Model Makes Decisions</a:t>
             </a:r>
           </a:p>
         </p:txBody>
@@ -8350,7 +8462,7 @@
               </a:defRPr>
             </a:pPr>
             <a:r>
-              <a:t>We tested 10 different AI approaches and fine-tuned the best performer. The optimization dramatically reduced false alarms while maintaining fraud detection.</a:t>
+              <a:t>The AI model is not a black box. We can explain exactly why each transaction was flagged or approved. This transparency is critical for regulatory compliance and customer trust.</a:t>
             </a:r>
           </a:p>
         </p:txBody>
@@ -8364,13 +8476,13 @@
         <p:spPr>
           <a:xfrm>
             <a:off x="731520" y="2286000"/>
-            <a:ext cx="5029200" cy="2743200"/>
+            <a:ext cx="5029200" cy="3200400"/>
           </a:xfrm>
           <a:prstGeom prst="roundRect">
             <a:avLst/>
           </a:prstGeom>
           <a:solidFill>
-            <a:srgbClr val="FDF2E8"/>
+            <a:srgbClr val="FDE8E8"/>
           </a:solidFill>
           <a:ln>
             <a:noFill/>
@@ -8395,6 +8507,7 @@
           <a:lstStyle/>
           <a:p>
             <a:pPr algn="ctr"/>
+            <a:endParaRPr/>
           </a:p>
         </p:txBody>
       </p:sp>
@@ -8407,7 +8520,7 @@
         <p:spPr>
           <a:xfrm>
             <a:off x="914400" y="2377440"/>
-            <a:ext cx="4754880" cy="365760"/>
+            <a:ext cx="4754880" cy="457200"/>
           </a:xfrm>
           <a:prstGeom prst="rect">
             <a:avLst/>
@@ -8423,13 +8536,13 @@
             <a:pPr algn="ctr">
               <a:defRPr sz="2000" b="1">
                 <a:solidFill>
-                  <a:srgbClr val="FF9900"/>
-                </a:solidFill>
-                <a:latin typeface="Calibri"/>
-              </a:defRPr>
-            </a:pPr>
-            <a:r>
-              <a:t>Before Optimization</a:t>
+                  <a:srgbClr val="E74C3C"/>
+                </a:solidFill>
+                <a:latin typeface="Calibri"/>
+              </a:defRPr>
+            </a:pPr>
+            <a:r>
+              <a:t>Example: Flagged as Fraud</a:t>
             </a:r>
           </a:p>
         </p:txBody>
@@ -8442,8 +8555,8 @@
         </p:nvSpPr>
         <p:spPr>
           <a:xfrm>
-            <a:off x="1097280" y="2926080"/>
-            <a:ext cx="4572000" cy="1828800"/>
+            <a:off x="1097280" y="3017520"/>
+            <a:ext cx="4572000" cy="2286000"/>
           </a:xfrm>
           <a:prstGeom prst="rect">
             <a:avLst/>
@@ -8460,7 +8573,7 @@
               <a:spcAft>
                 <a:spcPts val="600"/>
               </a:spcAft>
-              <a:defRPr sz="1600">
+              <a:defRPr sz="1500">
                 <a:solidFill>
                   <a:srgbClr val="232F3E"/>
                 </a:solidFill>
@@ -8468,7 +8581,7 @@
               </a:defRPr>
             </a:pPr>
             <a:r>
-              <a:t>89.1% of fraud detected</a:t>
+              <a:t>→  Unusually high transaction amount</a:t>
             </a:r>
           </a:p>
           <a:p>
@@ -8476,7 +8589,7 @@
               <a:spcAft>
                 <a:spcPts val="600"/>
               </a:spcAft>
-              <a:defRPr sz="1600">
+              <a:defRPr sz="1500">
                 <a:solidFill>
                   <a:srgbClr val="232F3E"/>
                 </a:solidFill>
@@ -8484,7 +8597,7 @@
               </a:defRPr>
             </a:pPr>
             <a:r>
-              <a:t>81.8% alert accuracy</a:t>
+              <a:t>→  Purchase at 3 AM (unusual hour)</a:t>
             </a:r>
           </a:p>
           <a:p>
@@ -8492,7 +8605,7 @@
               <a:spcAft>
                 <a:spcPts val="600"/>
               </a:spcAft>
-              <a:defRPr sz="1600">
+              <a:defRPr sz="1500">
                 <a:solidFill>
                   <a:srgbClr val="232F3E"/>
                 </a:solidFill>
@@ -8500,7 +8613,7 @@
               </a:defRPr>
             </a:pPr>
             <a:r>
-              <a:t>More false alarms disrupting customers</a:t>
+              <a:t>→  Merchant category rarely used</a:t>
             </a:r>
           </a:p>
           <a:p>
@@ -8508,36 +8621,37 @@
               <a:spcAft>
                 <a:spcPts val="600"/>
               </a:spcAft>
-              <a:defRPr sz="1600">
+              <a:defRPr sz="1500">
                 <a:solidFill>
                   <a:srgbClr val="232F3E"/>
                 </a:solidFill>
                 <a:latin typeface="Calibri"/>
               </a:defRPr>
             </a:pPr>
+            <a:r>
+              <a:t>→  Different city than usual</a:t>
+            </a:r>
           </a:p>
           <a:p>
             <a:pPr>
               <a:spcAft>
                 <a:spcPts val="600"/>
               </a:spcAft>
-              <a:defRPr sz="1600">
+              <a:defRPr sz="1500">
                 <a:solidFill>
                   <a:srgbClr val="232F3E"/>
                 </a:solidFill>
                 <a:latin typeface="Calibri"/>
               </a:defRPr>
             </a:pPr>
-            <a:r>
-              <a:t>Good at catching fraud, but too many</a:t>
-            </a:r>
+            <a:endParaRPr/>
           </a:p>
           <a:p>
             <a:pPr>
               <a:spcAft>
                 <a:spcPts val="600"/>
               </a:spcAft>
-              <a:defRPr sz="1600">
+              <a:defRPr sz="1500">
                 <a:solidFill>
                   <a:srgbClr val="232F3E"/>
                 </a:solidFill>
@@ -8545,7 +8659,23 @@
               </a:defRPr>
             </a:pPr>
             <a:r>
-              <a:t>legitimate transactions were flagged</a:t>
+              <a:t>Multiple risk signals combined to</a:t>
+            </a:r>
+          </a:p>
+          <a:p>
+            <a:pPr>
+              <a:spcAft>
+                <a:spcPts val="600"/>
+              </a:spcAft>
+              <a:defRPr sz="1500">
+                <a:solidFill>
+                  <a:srgbClr val="232F3E"/>
+                </a:solidFill>
+                <a:latin typeface="Calibri"/>
+              </a:defRPr>
+            </a:pPr>
+            <a:r>
+              <a:t>push the score above the threshold</a:t>
             </a:r>
           </a:p>
         </p:txBody>
@@ -8559,7 +8689,7 @@
         <p:spPr>
           <a:xfrm>
             <a:off x="6400800" y="2286000"/>
-            <a:ext cx="5029200" cy="2743200"/>
+            <a:ext cx="5029200" cy="3200400"/>
           </a:xfrm>
           <a:prstGeom prst="roundRect">
             <a:avLst/>
@@ -8590,6 +8720,7 @@
           <a:lstStyle/>
           <a:p>
             <a:pPr algn="ctr"/>
+            <a:endParaRPr/>
           </a:p>
         </p:txBody>
       </p:sp>
@@ -8602,7 +8733,7 @@
         <p:spPr>
           <a:xfrm>
             <a:off x="6583680" y="2377440"/>
-            <a:ext cx="4754880" cy="365760"/>
+            <a:ext cx="4754880" cy="457200"/>
           </a:xfrm>
           <a:prstGeom prst="rect">
             <a:avLst/>
@@ -8624,7 +8755,7 @@
               </a:defRPr>
             </a:pPr>
             <a:r>
-              <a:t>After Optimization</a:t>
+              <a:t>Example: Approved as Legitimate</a:t>
             </a:r>
           </a:p>
         </p:txBody>
@@ -8637,8 +8768,8 @@
         </p:nvSpPr>
         <p:spPr>
           <a:xfrm>
-            <a:off x="6766560" y="2926080"/>
-            <a:ext cx="4572000" cy="1828800"/>
+            <a:off x="6766560" y="3017520"/>
+            <a:ext cx="4572000" cy="2286000"/>
           </a:xfrm>
           <a:prstGeom prst="rect">
             <a:avLst/>
@@ -8655,7 +8786,7 @@
               <a:spcAft>
                 <a:spcPts val="600"/>
               </a:spcAft>
-              <a:defRPr sz="1600">
+              <a:defRPr sz="1500">
                 <a:solidFill>
                   <a:srgbClr val="232F3E"/>
                 </a:solidFill>
@@ -8663,7 +8794,7 @@
               </a:defRPr>
             </a:pPr>
             <a:r>
-              <a:t>88.7% of fraud detected</a:t>
+              <a:t>→  Normal transaction amount</a:t>
             </a:r>
           </a:p>
           <a:p>
@@ -8671,7 +8802,7 @@
               <a:spcAft>
                 <a:spcPts val="600"/>
               </a:spcAft>
-              <a:defRPr sz="1600">
+              <a:defRPr sz="1500">
                 <a:solidFill>
                   <a:srgbClr val="232F3E"/>
                 </a:solidFill>
@@ -8679,7 +8810,7 @@
               </a:defRPr>
             </a:pPr>
             <a:r>
-              <a:t>94.9% alert accuracy</a:t>
+              <a:t>→  Purchase during business hours</a:t>
             </a:r>
           </a:p>
           <a:p>
@@ -8687,7 +8818,7 @@
               <a:spcAft>
                 <a:spcPts val="600"/>
               </a:spcAft>
-              <a:defRPr sz="1600">
+              <a:defRPr sz="1500">
                 <a:solidFill>
                   <a:srgbClr val="232F3E"/>
                 </a:solidFill>
@@ -8695,7 +8826,7 @@
               </a:defRPr>
             </a:pPr>
             <a:r>
-              <a:t>Far fewer false alarms</a:t>
+              <a:t>→  Familiar merchant category</a:t>
             </a:r>
           </a:p>
           <a:p>
@@ -8703,36 +8834,37 @@
               <a:spcAft>
                 <a:spcPts val="600"/>
               </a:spcAft>
-              <a:defRPr sz="1600">
+              <a:defRPr sz="1500">
                 <a:solidFill>
                   <a:srgbClr val="232F3E"/>
                 </a:solidFill>
                 <a:latin typeface="Calibri"/>
               </a:defRPr>
             </a:pPr>
+            <a:r>
+              <a:t>→  Customer's home city</a:t>
+            </a:r>
           </a:p>
           <a:p>
             <a:pPr>
               <a:spcAft>
                 <a:spcPts val="600"/>
               </a:spcAft>
-              <a:defRPr sz="1600">
+              <a:defRPr sz="1500">
                 <a:solidFill>
                   <a:srgbClr val="232F3E"/>
                 </a:solidFill>
                 <a:latin typeface="Calibri"/>
               </a:defRPr>
             </a:pPr>
-            <a:r>
-              <a:t>Nearly the same fraud detection with</a:t>
-            </a:r>
+            <a:endParaRPr/>
           </a:p>
           <a:p>
             <a:pPr>
               <a:spcAft>
                 <a:spcPts val="600"/>
               </a:spcAft>
-              <a:defRPr sz="1600">
+              <a:defRPr sz="1500">
                 <a:solidFill>
                   <a:srgbClr val="232F3E"/>
                 </a:solidFill>
@@ -8740,52 +8872,15 @@
               </a:defRPr>
             </a:pPr>
             <a:r>
-              <a:t>dramatically better precision</a:t>
-            </a:r>
-          </a:p>
-        </p:txBody>
-      </p:sp>
-      <p:sp>
-        <p:nvSpPr>
-          <p:cNvPr id="10" name="Rounded Rectangle 9"/>
-          <p:cNvSpPr/>
-          <p:nvPr/>
-        </p:nvSpPr>
-        <p:spPr>
-          <a:xfrm>
-            <a:off x="731520" y="5303520"/>
-            <a:ext cx="10515600" cy="731520"/>
-          </a:xfrm>
-          <a:prstGeom prst="roundRect">
-            <a:avLst/>
-          </a:prstGeom>
-          <a:solidFill>
-            <a:srgbClr val="E8F4FD"/>
-          </a:solidFill>
-          <a:ln>
-            <a:noFill/>
-          </a:ln>
-        </p:spPr>
-        <p:style>
-          <a:lnRef idx="1">
-            <a:schemeClr val="accent1"/>
-          </a:lnRef>
-          <a:fillRef idx="3">
-            <a:schemeClr val="accent1"/>
-          </a:fillRef>
-          <a:effectRef idx="2">
-            <a:schemeClr val="accent1"/>
-          </a:effectRef>
-          <a:fontRef idx="minor">
-            <a:schemeClr val="lt1"/>
-          </a:fontRef>
-        </p:style>
-        <p:txBody>
-          <a:bodyPr rtlCol="0" anchor="ctr" wrap="square"/>
-          <a:lstStyle/>
-          <a:p>
-            <a:pPr algn="ctr">
-              <a:defRPr sz="1800" b="1">
+              <a:t>All signals consistent with normal</a:t>
+            </a:r>
+          </a:p>
+          <a:p>
+            <a:pPr>
+              <a:spcAft>
+                <a:spcPts val="600"/>
+              </a:spcAft>
+              <a:defRPr sz="1500">
                 <a:solidFill>
                   <a:srgbClr val="232F3E"/>
                 </a:solidFill>
@@ -8793,7 +8888,60 @@
               </a:defRPr>
             </a:pPr>
             <a:r>
-              <a:t>Result: 16% improvement in alert accuracy with less than 1% reduction in fraud detection</a:t>
+              <a:t>spending behavior</a:t>
+            </a:r>
+          </a:p>
+        </p:txBody>
+      </p:sp>
+      <p:sp>
+        <p:nvSpPr>
+          <p:cNvPr id="10" name="TextBox 9"/>
+          <p:cNvSpPr txBox="1"/>
+          <p:nvPr/>
+        </p:nvSpPr>
+        <p:spPr>
+          <a:xfrm>
+            <a:off x="731520" y="5760720"/>
+            <a:ext cx="10515600" cy="584775"/>
+          </a:xfrm>
+          <a:prstGeom prst="rect">
+            <a:avLst/>
+          </a:prstGeom>
+          <a:noFill/>
+        </p:spPr>
+        <p:txBody>
+          <a:bodyPr wrap="square">
+            <a:spAutoFit/>
+          </a:bodyPr>
+          <a:lstStyle/>
+          <a:p>
+            <a:pPr>
+              <a:defRPr sz="1600" b="0">
+                <a:solidFill>
+                  <a:srgbClr val="7F8C8D"/>
+                </a:solidFill>
+                <a:latin typeface="Calibri"/>
+              </a:defRPr>
+            </a:pPr>
+            <a:r>
+              <a:rPr dirty="0"/>
+              <a:t>Every decision can be traced back to specific factors</a:t>
+            </a:r>
+            <a:r>
+              <a:rPr lang="en-US" dirty="0"/>
+              <a:t> </a:t>
+            </a:r>
+            <a:r>
+              <a:rPr dirty="0"/>
+              <a:t>enabling audit trails and dispute resolution.</a:t>
+            </a:r>
+            <a:r>
+              <a:rPr lang="en-US" dirty="0"/>
+              <a:t> </a:t>
+            </a:r>
+            <a:r>
+              <a:rPr lang="en-PH" dirty="0"/>
+              <a:t>The model is explainable, audited for fairness, and ready for production deployment.</a:t>
             </a:r>
           </a:p>
         </p:txBody>
@@ -8806,8 +8954,8 @@
 </p:sld>
 </file>
 
-<file path=ppt/slides/slide8.xml><?xml version="1.0" encoding="utf-8"?>
-<p:sld xmlns:a="http://schemas.openxmlformats.org/drawingml/2006/main" xmlns:p="http://schemas.openxmlformats.org/presentationml/2006/main" xmlns:r="http://schemas.openxmlformats.org/officeDocument/2006/relationships">
+<file path=ppt/slides/slide9.xml><?xml version="1.0" encoding="utf-8"?>
+<p:sld xmlns:a="http://schemas.openxmlformats.org/drawingml/2006/main" xmlns:r="http://schemas.openxmlformats.org/officeDocument/2006/relationships" xmlns:p="http://schemas.openxmlformats.org/presentationml/2006/main">
   <p:cSld>
     <p:bg>
       <p:bgPr>
@@ -8823,7 +8971,14 @@
         <p:cNvGrpSpPr/>
         <p:nvPr/>
       </p:nvGrpSpPr>
-      <p:grpSpPr/>
+      <p:grpSpPr>
+        <a:xfrm>
+          <a:off x="0" y="0"/>
+          <a:ext cx="0" cy="0"/>
+          <a:chOff x="0" y="0"/>
+          <a:chExt cx="0" cy="0"/>
+        </a:xfrm>
+      </p:grpSpPr>
       <p:sp>
         <p:nvSpPr>
           <p:cNvPr id="2" name="Rounded Rectangle 1"/>
@@ -8860,7 +9015,7 @@
           </a:fontRef>
         </p:style>
         <p:txBody>
-          <a:bodyPr rtlCol="0" anchor="ctr" wrap="square"/>
+          <a:bodyPr wrap="square" rtlCol="0" anchor="ctr"/>
           <a:lstStyle/>
           <a:p>
             <a:pPr algn="ctr">
@@ -8872,57 +9027,21 @@
               </a:defRPr>
             </a:pPr>
             <a:r>
-              <a:t>Fairness — Protecting All Customers Equally</a:t>
-            </a:r>
-          </a:p>
-        </p:txBody>
-      </p:sp>
-      <p:sp>
-        <p:nvSpPr>
-          <p:cNvPr id="3" name="TextBox 2"/>
-          <p:cNvSpPr txBox="1"/>
-          <p:nvPr/>
-        </p:nvSpPr>
-        <p:spPr>
-          <a:xfrm>
-            <a:off x="731520" y="1097280"/>
-            <a:ext cx="10515600" cy="731520"/>
-          </a:xfrm>
-          <a:prstGeom prst="rect">
-            <a:avLst/>
-          </a:prstGeom>
-          <a:noFill/>
-        </p:spPr>
-        <p:txBody>
-          <a:bodyPr wrap="square">
-            <a:spAutoFit/>
-          </a:bodyPr>
-          <a:lstStyle/>
-          <a:p>
-            <a:pPr algn="l">
-              <a:defRPr sz="1800" b="0">
-                <a:solidFill>
-                  <a:srgbClr val="232F3E"/>
-                </a:solidFill>
-                <a:latin typeface="Calibri"/>
-              </a:defRPr>
-            </a:pPr>
-            <a:r>
-              <a:t>We audited the model to ensure it treats all customer groups fairly, regardless of gender or age. No customer segment should be disproportionately affected by missed fraud or false alarms.</a:t>
-            </a:r>
-          </a:p>
-        </p:txBody>
-      </p:sp>
-      <p:sp>
-        <p:nvSpPr>
-          <p:cNvPr id="4" name="Rounded Rectangle 3"/>
+              <a:t>Expected Business Impact</a:t>
+            </a:r>
+          </a:p>
+        </p:txBody>
+      </p:sp>
+      <p:sp>
+        <p:nvSpPr>
+          <p:cNvPr id="3" name="Rounded Rectangle 2"/>
           <p:cNvSpPr/>
           <p:nvPr/>
         </p:nvSpPr>
         <p:spPr>
           <a:xfrm>
-            <a:off x="731520" y="2286000"/>
-            <a:ext cx="5029200" cy="2286000"/>
+            <a:off x="457200" y="1371600"/>
+            <a:ext cx="2651760" cy="3200400"/>
           </a:xfrm>
           <a:prstGeom prst="roundRect">
             <a:avLst/>
@@ -8953,19 +9072,20 @@
           <a:lstStyle/>
           <a:p>
             <a:pPr algn="ctr"/>
-          </a:p>
-        </p:txBody>
-      </p:sp>
-      <p:sp>
-        <p:nvSpPr>
-          <p:cNvPr id="5" name="TextBox 4"/>
+            <a:endParaRPr/>
+          </a:p>
+        </p:txBody>
+      </p:sp>
+      <p:sp>
+        <p:nvSpPr>
+          <p:cNvPr id="4" name="TextBox 3"/>
           <p:cNvSpPr txBox="1"/>
           <p:nvPr/>
         </p:nvSpPr>
         <p:spPr>
           <a:xfrm>
-            <a:off x="914400" y="2377440"/>
-            <a:ext cx="4754880" cy="365760"/>
+            <a:off x="457200" y="1554480"/>
+            <a:ext cx="2651760" cy="731520"/>
           </a:xfrm>
           <a:prstGeom prst="rect">
             <a:avLst/>
@@ -8987,21 +9107,25 @@
               </a:defRPr>
             </a:pPr>
             <a:r>
-              <a:t>Gender Fairness</a:t>
-            </a:r>
-          </a:p>
-        </p:txBody>
-      </p:sp>
-      <p:sp>
-        <p:nvSpPr>
-          <p:cNvPr id="6" name="TextBox 5"/>
+              <a:t>Reduced</a:t>
+            </a:r>
+            <a:br/>
+            <a:r>
+              <a:t>Fraud Losses</a:t>
+            </a:r>
+          </a:p>
+        </p:txBody>
+      </p:sp>
+      <p:sp>
+        <p:nvSpPr>
+          <p:cNvPr id="5" name="TextBox 4"/>
           <p:cNvSpPr txBox="1"/>
           <p:nvPr/>
         </p:nvSpPr>
         <p:spPr>
           <a:xfrm>
-            <a:off x="1097280" y="2926080"/>
-            <a:ext cx="4572000" cy="1371600"/>
+            <a:off x="457200" y="2560320"/>
+            <a:ext cx="2651760" cy="1371600"/>
           </a:xfrm>
           <a:prstGeom prst="rect">
             <a:avLst/>
@@ -9014,11 +9138,8 @@
           </a:bodyPr>
           <a:lstStyle/>
           <a:p>
-            <a:pPr>
-              <a:spcAft>
-                <a:spcPts val="800"/>
-              </a:spcAft>
-              <a:defRPr sz="1600">
+            <a:pPr algn="ctr">
+              <a:defRPr sz="1500" b="0">
                 <a:solidFill>
                   <a:srgbClr val="232F3E"/>
                 </a:solidFill>
@@ -9026,69 +9147,29 @@
               </a:defRPr>
             </a:pPr>
             <a:r>
-              <a:t>✓  Female fraud detection: 88.4%</a:t>
-            </a:r>
-          </a:p>
-          <a:p>
-            <a:pPr>
-              <a:spcAft>
-                <a:spcPts val="800"/>
-              </a:spcAft>
-              <a:defRPr sz="1600">
-                <a:solidFill>
-                  <a:srgbClr val="232F3E"/>
-                </a:solidFill>
-                <a:latin typeface="Calibri"/>
-              </a:defRPr>
-            </a:pPr>
-            <a:r>
-              <a:t>✓  Male fraud detection: 89.0%</a:t>
-            </a:r>
-          </a:p>
-          <a:p>
-            <a:pPr>
-              <a:spcAft>
-                <a:spcPts val="800"/>
-              </a:spcAft>
-              <a:defRPr sz="1600">
-                <a:solidFill>
-                  <a:srgbClr val="232F3E"/>
-                </a:solidFill>
-                <a:latin typeface="Calibri"/>
-              </a:defRPr>
-            </a:pPr>
-            <a:r>
-              <a:t>✓  Minimal difference — model is fair</a:t>
-            </a:r>
-          </a:p>
-          <a:p>
-            <a:pPr>
-              <a:spcAft>
-                <a:spcPts val="800"/>
-              </a:spcAft>
-              <a:defRPr sz="1600">
-                <a:solidFill>
-                  <a:srgbClr val="232F3E"/>
-                </a:solidFill>
-                <a:latin typeface="Calibri"/>
-              </a:defRPr>
-            </a:pPr>
-            <a:r>
-              <a:t>✓  Near-zero false alarm rate for both</a:t>
-            </a:r>
-          </a:p>
-        </p:txBody>
-      </p:sp>
-      <p:sp>
-        <p:nvSpPr>
-          <p:cNvPr id="7" name="Rounded Rectangle 6"/>
+              <a:t>88.7% of fraud</a:t>
+            </a:r>
+            <a:br/>
+            <a:r>
+              <a:t>caught before</a:t>
+            </a:r>
+            <a:br/>
+            <a:r>
+              <a:t>it costs money</a:t>
+            </a:r>
+          </a:p>
+        </p:txBody>
+      </p:sp>
+      <p:sp>
+        <p:nvSpPr>
+          <p:cNvPr id="6" name="Rounded Rectangle 5"/>
           <p:cNvSpPr/>
           <p:nvPr/>
         </p:nvSpPr>
         <p:spPr>
           <a:xfrm>
-            <a:off x="6400800" y="2286000"/>
-            <a:ext cx="5029200" cy="2286000"/>
+            <a:off x="3383280" y="1371600"/>
+            <a:ext cx="2651760" cy="3200400"/>
           </a:xfrm>
           <a:prstGeom prst="roundRect">
             <a:avLst/>
@@ -9119,19 +9200,20 @@
           <a:lstStyle/>
           <a:p>
             <a:pPr algn="ctr"/>
-          </a:p>
-        </p:txBody>
-      </p:sp>
-      <p:sp>
-        <p:nvSpPr>
-          <p:cNvPr id="8" name="TextBox 7"/>
+            <a:endParaRPr/>
+          </a:p>
+        </p:txBody>
+      </p:sp>
+      <p:sp>
+        <p:nvSpPr>
+          <p:cNvPr id="7" name="TextBox 6"/>
           <p:cNvSpPr txBox="1"/>
           <p:nvPr/>
         </p:nvSpPr>
         <p:spPr>
           <a:xfrm>
-            <a:off x="6583680" y="2377440"/>
-            <a:ext cx="4754880" cy="365760"/>
+            <a:off x="3383280" y="1554480"/>
+            <a:ext cx="2651760" cy="731520"/>
           </a:xfrm>
           <a:prstGeom prst="rect">
             <a:avLst/>
@@ -9153,21 +9235,25 @@
               </a:defRPr>
             </a:pPr>
             <a:r>
-              <a:t>Age Group Fairness</a:t>
-            </a:r>
-          </a:p>
-        </p:txBody>
-      </p:sp>
-      <p:sp>
-        <p:nvSpPr>
-          <p:cNvPr id="9" name="TextBox 8"/>
+              <a:t>Fewer Customer</a:t>
+            </a:r>
+            <a:br/>
+            <a:r>
+              <a:t>Complaints</a:t>
+            </a:r>
+          </a:p>
+        </p:txBody>
+      </p:sp>
+      <p:sp>
+        <p:nvSpPr>
+          <p:cNvPr id="8" name="TextBox 7"/>
           <p:cNvSpPr txBox="1"/>
           <p:nvPr/>
         </p:nvSpPr>
         <p:spPr>
           <a:xfrm>
-            <a:off x="6766560" y="2926080"/>
-            <a:ext cx="4572000" cy="1371600"/>
+            <a:off x="3383280" y="2560320"/>
+            <a:ext cx="2651760" cy="1371600"/>
           </a:xfrm>
           <a:prstGeom prst="rect">
             <a:avLst/>
@@ -9180,11 +9266,8 @@
           </a:bodyPr>
           <a:lstStyle/>
           <a:p>
-            <a:pPr>
-              <a:spcAft>
-                <a:spcPts val="800"/>
-              </a:spcAft>
-              <a:defRPr sz="1600">
+            <a:pPr algn="ctr">
+              <a:defRPr sz="1500" b="0">
                 <a:solidFill>
                   <a:srgbClr val="232F3E"/>
                 </a:solidFill>
@@ -9192,111 +9275,35 @@
               </a:defRPr>
             </a:pPr>
             <a:r>
-              <a:t>✓  Under 25: 87.1% detection</a:t>
-            </a:r>
-          </a:p>
-          <a:p>
-            <a:pPr>
-              <a:spcAft>
-                <a:spcPts val="800"/>
-              </a:spcAft>
-              <a:defRPr sz="1600">
-                <a:solidFill>
-                  <a:srgbClr val="232F3E"/>
-                </a:solidFill>
-                <a:latin typeface="Calibri"/>
-              </a:defRPr>
-            </a:pPr>
-            <a:r>
-              <a:t>✓  25-45: 85.0% detection</a:t>
-            </a:r>
-          </a:p>
-          <a:p>
-            <a:pPr>
-              <a:spcAft>
-                <a:spcPts val="800"/>
-              </a:spcAft>
-              <a:defRPr sz="1600">
-                <a:solidFill>
-                  <a:srgbClr val="232F3E"/>
-                </a:solidFill>
-                <a:latin typeface="Calibri"/>
-              </a:defRPr>
-            </a:pPr>
-            <a:r>
-              <a:t>✓  45-65: 90.2% detection</a:t>
-            </a:r>
-          </a:p>
-          <a:p>
-            <a:pPr>
-              <a:spcAft>
-                <a:spcPts val="800"/>
-              </a:spcAft>
-              <a:defRPr sz="1600">
-                <a:solidFill>
-                  <a:srgbClr val="232F3E"/>
-                </a:solidFill>
-                <a:latin typeface="Calibri"/>
-              </a:defRPr>
-            </a:pPr>
-            <a:r>
-              <a:t>✓  65+: 93.3% detection</a:t>
-            </a:r>
-          </a:p>
-        </p:txBody>
-      </p:sp>
-      <p:sp>
-        <p:nvSpPr>
-          <p:cNvPr id="10" name="TextBox 9"/>
-          <p:cNvSpPr txBox="1"/>
-          <p:nvPr/>
-        </p:nvSpPr>
-        <p:spPr>
-          <a:xfrm>
-            <a:off x="731520" y="4846320"/>
-            <a:ext cx="10515600" cy="731520"/>
-          </a:xfrm>
-          <a:prstGeom prst="rect">
-            <a:avLst/>
-          </a:prstGeom>
-          <a:noFill/>
-        </p:spPr>
-        <p:txBody>
-          <a:bodyPr wrap="square">
-            <a:spAutoFit/>
-          </a:bodyPr>
-          <a:lstStyle/>
-          <a:p>
-            <a:pPr algn="l">
-              <a:defRPr sz="1600" b="0">
-                <a:solidFill>
-                  <a:srgbClr val="232F3E"/>
-                </a:solidFill>
-                <a:latin typeface="Calibri"/>
-              </a:defRPr>
-            </a:pPr>
-            <a:r>
-              <a:t>Younger customers have slightly lower detection rates. We recommend additional monitoring and targeted improvements for this group to ensure equitable protection.</a:t>
-            </a:r>
-          </a:p>
-        </p:txBody>
-      </p:sp>
-      <p:sp>
-        <p:nvSpPr>
-          <p:cNvPr id="11" name="Rounded Rectangle 10"/>
+              <a:t>Only 0.03% of</a:t>
+            </a:r>
+            <a:br/>
+            <a:r>
+              <a:t>legitimate transactions</a:t>
+            </a:r>
+            <a:br/>
+            <a:r>
+              <a:t>incorrectly flagged</a:t>
+            </a:r>
+          </a:p>
+        </p:txBody>
+      </p:sp>
+      <p:sp>
+        <p:nvSpPr>
+          <p:cNvPr id="9" name="Rounded Rectangle 8"/>
           <p:cNvSpPr/>
           <p:nvPr/>
         </p:nvSpPr>
         <p:spPr>
           <a:xfrm>
-            <a:off x="731520" y="5669280"/>
-            <a:ext cx="10515600" cy="548640"/>
+            <a:off x="6309360" y="1371600"/>
+            <a:ext cx="2651760" cy="3200400"/>
           </a:xfrm>
           <a:prstGeom prst="roundRect">
             <a:avLst/>
           </a:prstGeom>
           <a:solidFill>
-            <a:srgbClr val="E8FDEE"/>
+            <a:srgbClr val="FDF2E8"/>
           </a:solidFill>
           <a:ln>
             <a:noFill/>
@@ -9317,11 +9324,78 @@
           </a:fontRef>
         </p:style>
         <p:txBody>
-          <a:bodyPr rtlCol="0" anchor="ctr" wrap="square"/>
+          <a:bodyPr rtlCol="0" anchor="ctr"/>
+          <a:lstStyle/>
+          <a:p>
+            <a:pPr algn="ctr"/>
+            <a:endParaRPr/>
+          </a:p>
+        </p:txBody>
+      </p:sp>
+      <p:sp>
+        <p:nvSpPr>
+          <p:cNvPr id="10" name="TextBox 9"/>
+          <p:cNvSpPr txBox="1"/>
+          <p:nvPr/>
+        </p:nvSpPr>
+        <p:spPr>
+          <a:xfrm>
+            <a:off x="6309360" y="1554480"/>
+            <a:ext cx="2651760" cy="731520"/>
+          </a:xfrm>
+          <a:prstGeom prst="rect">
+            <a:avLst/>
+          </a:prstGeom>
+          <a:noFill/>
+        </p:spPr>
+        <p:txBody>
+          <a:bodyPr wrap="square">
+            <a:spAutoFit/>
+          </a:bodyPr>
           <a:lstStyle/>
           <a:p>
             <a:pPr algn="ctr">
-              <a:defRPr sz="1500" b="1">
+              <a:defRPr sz="2000" b="1">
+                <a:solidFill>
+                  <a:srgbClr val="FF9900"/>
+                </a:solidFill>
+                <a:latin typeface="Calibri"/>
+              </a:defRPr>
+            </a:pPr>
+            <a:r>
+              <a:t>Faster</a:t>
+            </a:r>
+            <a:br/>
+            <a:r>
+              <a:t>Resolution</a:t>
+            </a:r>
+          </a:p>
+        </p:txBody>
+      </p:sp>
+      <p:sp>
+        <p:nvSpPr>
+          <p:cNvPr id="11" name="TextBox 10"/>
+          <p:cNvSpPr txBox="1"/>
+          <p:nvPr/>
+        </p:nvSpPr>
+        <p:spPr>
+          <a:xfrm>
+            <a:off x="6309360" y="2560320"/>
+            <a:ext cx="2651760" cy="1371600"/>
+          </a:xfrm>
+          <a:prstGeom prst="rect">
+            <a:avLst/>
+          </a:prstGeom>
+          <a:noFill/>
+        </p:spPr>
+        <p:txBody>
+          <a:bodyPr wrap="square">
+            <a:spAutoFit/>
+          </a:bodyPr>
+          <a:lstStyle/>
+          <a:p>
+            <a:pPr algn="ctr">
+              <a:defRPr sz="1500" b="0">
                 <a:solidFill>
                   <a:srgbClr val="232F3E"/>
                 </a:solidFill>
@@ -9329,53 +9403,35 @@
               </a:defRPr>
             </a:pPr>
             <a:r>
-              <a:t>False alarm rates are near zero across all demographics — legitimate customers are rarely disrupted.</a:t>
-            </a:r>
-          </a:p>
-        </p:txBody>
-      </p:sp>
-    </p:spTree>
-  </p:cSld>
-  <p:clrMapOvr>
-    <a:masterClrMapping/>
-  </p:clrMapOvr>
-</p:sld>
-</file>
-
-<file path=ppt/slides/slide9.xml><?xml version="1.0" encoding="utf-8"?>
-<p:sld xmlns:a="http://schemas.openxmlformats.org/drawingml/2006/main" xmlns:p="http://schemas.openxmlformats.org/presentationml/2006/main" xmlns:r="http://schemas.openxmlformats.org/officeDocument/2006/relationships">
-  <p:cSld>
-    <p:bg>
-      <p:bgPr>
-        <a:solidFill>
-          <a:srgbClr val="FFFFFF"/>
-        </a:solidFill>
-        <a:effectLst/>
-      </p:bgPr>
-    </p:bg>
-    <p:spTree>
-      <p:nvGrpSpPr>
-        <p:cNvPr id="1" name=""/>
-        <p:cNvGrpSpPr/>
-        <p:nvPr/>
-      </p:nvGrpSpPr>
-      <p:grpSpPr/>
-      <p:sp>
-        <p:nvSpPr>
-          <p:cNvPr id="2" name="Rounded Rectangle 1"/>
+              <a:t>Automated scoring</a:t>
+            </a:r>
+            <a:br/>
+            <a:r>
+              <a:t>reduces manual</a:t>
+            </a:r>
+            <a:br/>
+            <a:r>
+              <a:t>review workload</a:t>
+            </a:r>
+          </a:p>
+        </p:txBody>
+      </p:sp>
+      <p:sp>
+        <p:nvSpPr>
+          <p:cNvPr id="12" name="Rounded Rectangle 11"/>
           <p:cNvSpPr/>
           <p:nvPr/>
         </p:nvSpPr>
         <p:spPr>
           <a:xfrm>
-            <a:off x="0" y="0"/>
-            <a:ext cx="12191695" cy="822960"/>
+            <a:off x="9235440" y="1371600"/>
+            <a:ext cx="2651760" cy="3200400"/>
           </a:xfrm>
           <a:prstGeom prst="roundRect">
             <a:avLst/>
           </a:prstGeom>
           <a:solidFill>
-            <a:srgbClr val="1B2A4A"/>
+            <a:srgbClr val="F0E8FD"/>
           </a:solidFill>
           <a:ln>
             <a:noFill/>
@@ -9396,33 +9452,24 @@
           </a:fontRef>
         </p:style>
         <p:txBody>
-          <a:bodyPr rtlCol="0" anchor="ctr" wrap="square"/>
-          <a:lstStyle/>
-          <a:p>
-            <a:pPr algn="ctr">
-              <a:defRPr sz="2800" b="1">
-                <a:solidFill>
-                  <a:srgbClr val="FFFFFF"/>
-                </a:solidFill>
-                <a:latin typeface="Calibri"/>
-              </a:defRPr>
-            </a:pPr>
-            <a:r>
-              <a:t>How the Model Makes Decisions</a:t>
-            </a:r>
-          </a:p>
-        </p:txBody>
-      </p:sp>
-      <p:sp>
-        <p:nvSpPr>
-          <p:cNvPr id="3" name="TextBox 2"/>
+          <a:bodyPr rtlCol="0" anchor="ctr"/>
+          <a:lstStyle/>
+          <a:p>
+            <a:pPr algn="ctr"/>
+            <a:endParaRPr/>
+          </a:p>
+        </p:txBody>
+      </p:sp>
+      <p:sp>
+        <p:nvSpPr>
+          <p:cNvPr id="13" name="TextBox 12"/>
           <p:cNvSpPr txBox="1"/>
           <p:nvPr/>
         </p:nvSpPr>
         <p:spPr>
           <a:xfrm>
-            <a:off x="731520" y="1097280"/>
-            <a:ext cx="10515600" cy="731520"/>
+            <a:off x="9235440" y="1554480"/>
+            <a:ext cx="2651760" cy="731520"/>
           </a:xfrm>
           <a:prstGeom prst="rect">
             <a:avLst/>
@@ -9435,73 +9482,34 @@
           </a:bodyPr>
           <a:lstStyle/>
           <a:p>
-            <a:pPr algn="l">
-              <a:defRPr sz="1800" b="0">
-                <a:solidFill>
-                  <a:srgbClr val="232F3E"/>
-                </a:solidFill>
-                <a:latin typeface="Calibri"/>
-              </a:defRPr>
-            </a:pPr>
-            <a:r>
-              <a:t>The AI model is not a black box. We can explain exactly why each transaction was flagged or approved. This transparency is critical for regulatory compliance and customer trust.</a:t>
-            </a:r>
-          </a:p>
-        </p:txBody>
-      </p:sp>
-      <p:sp>
-        <p:nvSpPr>
-          <p:cNvPr id="4" name="Rounded Rectangle 3"/>
-          <p:cNvSpPr/>
-          <p:nvPr/>
-        </p:nvSpPr>
-        <p:spPr>
-          <a:xfrm>
-            <a:off x="731520" y="2286000"/>
-            <a:ext cx="5029200" cy="3200400"/>
-          </a:xfrm>
-          <a:prstGeom prst="roundRect">
-            <a:avLst/>
-          </a:prstGeom>
-          <a:solidFill>
-            <a:srgbClr val="FDE8E8"/>
-          </a:solidFill>
-          <a:ln>
-            <a:noFill/>
-          </a:ln>
-        </p:spPr>
-        <p:style>
-          <a:lnRef idx="1">
-            <a:schemeClr val="accent1"/>
-          </a:lnRef>
-          <a:fillRef idx="3">
-            <a:schemeClr val="accent1"/>
-          </a:fillRef>
-          <a:effectRef idx="2">
-            <a:schemeClr val="accent1"/>
-          </a:effectRef>
-          <a:fontRef idx="minor">
-            <a:schemeClr val="lt1"/>
-          </a:fontRef>
-        </p:style>
-        <p:txBody>
-          <a:bodyPr rtlCol="0" anchor="ctr"/>
-          <a:lstStyle/>
-          <a:p>
-            <a:pPr algn="ctr"/>
-          </a:p>
-        </p:txBody>
-      </p:sp>
-      <p:sp>
-        <p:nvSpPr>
-          <p:cNvPr id="5" name="TextBox 4"/>
+            <a:pPr algn="ctr">
+              <a:defRPr sz="2000" b="1">
+                <a:solidFill>
+                  <a:srgbClr val="8E44AD"/>
+                </a:solidFill>
+                <a:latin typeface="Calibri"/>
+              </a:defRPr>
+            </a:pPr>
+            <a:r>
+              <a:t>Regulatory</a:t>
+            </a:r>
+            <a:br/>
+            <a:r>
+              <a:t>Compliance</a:t>
+            </a:r>
+          </a:p>
+        </p:txBody>
+      </p:sp>
+      <p:sp>
+        <p:nvSpPr>
+          <p:cNvPr id="14" name="TextBox 13"/>
           <p:cNvSpPr txBox="1"/>
           <p:nvPr/>
         </p:nvSpPr>
         <p:spPr>
           <a:xfrm>
-            <a:off x="914400" y="2377440"/>
-            <a:ext cx="4754880" cy="457200"/>
+            <a:off x="9235440" y="2560320"/>
+            <a:ext cx="2651760" cy="1371600"/>
           </a:xfrm>
           <a:prstGeom prst="rect">
             <a:avLst/>
@@ -9515,29 +9523,37 @@
           <a:lstStyle/>
           <a:p>
             <a:pPr algn="ctr">
-              <a:defRPr sz="2000" b="1">
-                <a:solidFill>
-                  <a:srgbClr val="E74C3C"/>
-                </a:solidFill>
-                <a:latin typeface="Calibri"/>
-              </a:defRPr>
-            </a:pPr>
-            <a:r>
-              <a:t>Example: Flagged as Fraud</a:t>
-            </a:r>
-          </a:p>
-        </p:txBody>
-      </p:sp>
-      <p:sp>
-        <p:nvSpPr>
-          <p:cNvPr id="6" name="TextBox 5"/>
+              <a:defRPr sz="1500" b="0">
+                <a:solidFill>
+                  <a:srgbClr val="232F3E"/>
+                </a:solidFill>
+                <a:latin typeface="Calibri"/>
+              </a:defRPr>
+            </a:pPr>
+            <a:r>
+              <a:t>Explainable AI with</a:t>
+            </a:r>
+            <a:br/>
+            <a:r>
+              <a:t>fairness auditing</a:t>
+            </a:r>
+            <a:br/>
+            <a:r>
+              <a:t>across demographics</a:t>
+            </a:r>
+          </a:p>
+        </p:txBody>
+      </p:sp>
+      <p:sp>
+        <p:nvSpPr>
+          <p:cNvPr id="15" name="TextBox 14"/>
           <p:cNvSpPr txBox="1"/>
           <p:nvPr/>
         </p:nvSpPr>
         <p:spPr>
           <a:xfrm>
-            <a:off x="1097280" y="3017520"/>
-            <a:ext cx="4572000" cy="2286000"/>
+            <a:off x="731520" y="5029200"/>
+            <a:ext cx="10515600" cy="731520"/>
           </a:xfrm>
           <a:prstGeom prst="rect">
             <a:avLst/>
@@ -9550,11 +9566,8 @@
           </a:bodyPr>
           <a:lstStyle/>
           <a:p>
-            <a:pPr>
-              <a:spcAft>
-                <a:spcPts val="600"/>
-              </a:spcAft>
-              <a:defRPr sz="1500">
+            <a:pPr algn="l">
+              <a:defRPr sz="1700" b="0">
                 <a:solidFill>
                   <a:srgbClr val="232F3E"/>
                 </a:solidFill>
@@ -9562,347 +9575,7 @@
               </a:defRPr>
             </a:pPr>
             <a:r>
-              <a:t>→  Unusually high transaction amount</a:t>
-            </a:r>
-          </a:p>
-          <a:p>
-            <a:pPr>
-              <a:spcAft>
-                <a:spcPts val="600"/>
-              </a:spcAft>
-              <a:defRPr sz="1500">
-                <a:solidFill>
-                  <a:srgbClr val="232F3E"/>
-                </a:solidFill>
-                <a:latin typeface="Calibri"/>
-              </a:defRPr>
-            </a:pPr>
-            <a:r>
-              <a:t>→  Purchase at 3 AM (unusual hour)</a:t>
-            </a:r>
-          </a:p>
-          <a:p>
-            <a:pPr>
-              <a:spcAft>
-                <a:spcPts val="600"/>
-              </a:spcAft>
-              <a:defRPr sz="1500">
-                <a:solidFill>
-                  <a:srgbClr val="232F3E"/>
-                </a:solidFill>
-                <a:latin typeface="Calibri"/>
-              </a:defRPr>
-            </a:pPr>
-            <a:r>
-              <a:t>→  Merchant category rarely used</a:t>
-            </a:r>
-          </a:p>
-          <a:p>
-            <a:pPr>
-              <a:spcAft>
-                <a:spcPts val="600"/>
-              </a:spcAft>
-              <a:defRPr sz="1500">
-                <a:solidFill>
-                  <a:srgbClr val="232F3E"/>
-                </a:solidFill>
-                <a:latin typeface="Calibri"/>
-              </a:defRPr>
-            </a:pPr>
-            <a:r>
-              <a:t>→  Different city than usual</a:t>
-            </a:r>
-          </a:p>
-          <a:p>
-            <a:pPr>
-              <a:spcAft>
-                <a:spcPts val="600"/>
-              </a:spcAft>
-              <a:defRPr sz="1500">
-                <a:solidFill>
-                  <a:srgbClr val="232F3E"/>
-                </a:solidFill>
-                <a:latin typeface="Calibri"/>
-              </a:defRPr>
-            </a:pPr>
-          </a:p>
-          <a:p>
-            <a:pPr>
-              <a:spcAft>
-                <a:spcPts val="600"/>
-              </a:spcAft>
-              <a:defRPr sz="1500">
-                <a:solidFill>
-                  <a:srgbClr val="232F3E"/>
-                </a:solidFill>
-                <a:latin typeface="Calibri"/>
-              </a:defRPr>
-            </a:pPr>
-            <a:r>
-              <a:t>Multiple risk signals combined to</a:t>
-            </a:r>
-          </a:p>
-          <a:p>
-            <a:pPr>
-              <a:spcAft>
-                <a:spcPts val="600"/>
-              </a:spcAft>
-              <a:defRPr sz="1500">
-                <a:solidFill>
-                  <a:srgbClr val="232F3E"/>
-                </a:solidFill>
-                <a:latin typeface="Calibri"/>
-              </a:defRPr>
-            </a:pPr>
-            <a:r>
-              <a:t>push the score above the threshold</a:t>
-            </a:r>
-          </a:p>
-        </p:txBody>
-      </p:sp>
-      <p:sp>
-        <p:nvSpPr>
-          <p:cNvPr id="7" name="Rounded Rectangle 6"/>
-          <p:cNvSpPr/>
-          <p:nvPr/>
-        </p:nvSpPr>
-        <p:spPr>
-          <a:xfrm>
-            <a:off x="6400800" y="2286000"/>
-            <a:ext cx="5029200" cy="3200400"/>
-          </a:xfrm>
-          <a:prstGeom prst="roundRect">
-            <a:avLst/>
-          </a:prstGeom>
-          <a:solidFill>
-            <a:srgbClr val="E8FDEE"/>
-          </a:solidFill>
-          <a:ln>
-            <a:noFill/>
-          </a:ln>
-        </p:spPr>
-        <p:style>
-          <a:lnRef idx="1">
-            <a:schemeClr val="accent1"/>
-          </a:lnRef>
-          <a:fillRef idx="3">
-            <a:schemeClr val="accent1"/>
-          </a:fillRef>
-          <a:effectRef idx="2">
-            <a:schemeClr val="accent1"/>
-          </a:effectRef>
-          <a:fontRef idx="minor">
-            <a:schemeClr val="lt1"/>
-          </a:fontRef>
-        </p:style>
-        <p:txBody>
-          <a:bodyPr rtlCol="0" anchor="ctr"/>
-          <a:lstStyle/>
-          <a:p>
-            <a:pPr algn="ctr"/>
-          </a:p>
-        </p:txBody>
-      </p:sp>
-      <p:sp>
-        <p:nvSpPr>
-          <p:cNvPr id="8" name="TextBox 7"/>
-          <p:cNvSpPr txBox="1"/>
-          <p:nvPr/>
-        </p:nvSpPr>
-        <p:spPr>
-          <a:xfrm>
-            <a:off x="6583680" y="2377440"/>
-            <a:ext cx="4754880" cy="457200"/>
-          </a:xfrm>
-          <a:prstGeom prst="rect">
-            <a:avLst/>
-          </a:prstGeom>
-          <a:noFill/>
-        </p:spPr>
-        <p:txBody>
-          <a:bodyPr wrap="square">
-            <a:spAutoFit/>
-          </a:bodyPr>
-          <a:lstStyle/>
-          <a:p>
-            <a:pPr algn="ctr">
-              <a:defRPr sz="2000" b="1">
-                <a:solidFill>
-                  <a:srgbClr val="2ECC71"/>
-                </a:solidFill>
-                <a:latin typeface="Calibri"/>
-              </a:defRPr>
-            </a:pPr>
-            <a:r>
-              <a:t>Example: Approved as Legitimate</a:t>
-            </a:r>
-          </a:p>
-        </p:txBody>
-      </p:sp>
-      <p:sp>
-        <p:nvSpPr>
-          <p:cNvPr id="9" name="TextBox 8"/>
-          <p:cNvSpPr txBox="1"/>
-          <p:nvPr/>
-        </p:nvSpPr>
-        <p:spPr>
-          <a:xfrm>
-            <a:off x="6766560" y="3017520"/>
-            <a:ext cx="4572000" cy="2286000"/>
-          </a:xfrm>
-          <a:prstGeom prst="rect">
-            <a:avLst/>
-          </a:prstGeom>
-          <a:noFill/>
-        </p:spPr>
-        <p:txBody>
-          <a:bodyPr wrap="square">
-            <a:spAutoFit/>
-          </a:bodyPr>
-          <a:lstStyle/>
-          <a:p>
-            <a:pPr>
-              <a:spcAft>
-                <a:spcPts val="600"/>
-              </a:spcAft>
-              <a:defRPr sz="1500">
-                <a:solidFill>
-                  <a:srgbClr val="232F3E"/>
-                </a:solidFill>
-                <a:latin typeface="Calibri"/>
-              </a:defRPr>
-            </a:pPr>
-            <a:r>
-              <a:t>→  Normal transaction amount</a:t>
-            </a:r>
-          </a:p>
-          <a:p>
-            <a:pPr>
-              <a:spcAft>
-                <a:spcPts val="600"/>
-              </a:spcAft>
-              <a:defRPr sz="1500">
-                <a:solidFill>
-                  <a:srgbClr val="232F3E"/>
-                </a:solidFill>
-                <a:latin typeface="Calibri"/>
-              </a:defRPr>
-            </a:pPr>
-            <a:r>
-              <a:t>→  Purchase during business hours</a:t>
-            </a:r>
-          </a:p>
-          <a:p>
-            <a:pPr>
-              <a:spcAft>
-                <a:spcPts val="600"/>
-              </a:spcAft>
-              <a:defRPr sz="1500">
-                <a:solidFill>
-                  <a:srgbClr val="232F3E"/>
-                </a:solidFill>
-                <a:latin typeface="Calibri"/>
-              </a:defRPr>
-            </a:pPr>
-            <a:r>
-              <a:t>→  Familiar merchant category</a:t>
-            </a:r>
-          </a:p>
-          <a:p>
-            <a:pPr>
-              <a:spcAft>
-                <a:spcPts val="600"/>
-              </a:spcAft>
-              <a:defRPr sz="1500">
-                <a:solidFill>
-                  <a:srgbClr val="232F3E"/>
-                </a:solidFill>
-                <a:latin typeface="Calibri"/>
-              </a:defRPr>
-            </a:pPr>
-            <a:r>
-              <a:t>→  Customer's home city</a:t>
-            </a:r>
-          </a:p>
-          <a:p>
-            <a:pPr>
-              <a:spcAft>
-                <a:spcPts val="600"/>
-              </a:spcAft>
-              <a:defRPr sz="1500">
-                <a:solidFill>
-                  <a:srgbClr val="232F3E"/>
-                </a:solidFill>
-                <a:latin typeface="Calibri"/>
-              </a:defRPr>
-            </a:pPr>
-          </a:p>
-          <a:p>
-            <a:pPr>
-              <a:spcAft>
-                <a:spcPts val="600"/>
-              </a:spcAft>
-              <a:defRPr sz="1500">
-                <a:solidFill>
-                  <a:srgbClr val="232F3E"/>
-                </a:solidFill>
-                <a:latin typeface="Calibri"/>
-              </a:defRPr>
-            </a:pPr>
-            <a:r>
-              <a:t>All signals consistent with normal</a:t>
-            </a:r>
-          </a:p>
-          <a:p>
-            <a:pPr>
-              <a:spcAft>
-                <a:spcPts val="600"/>
-              </a:spcAft>
-              <a:defRPr sz="1500">
-                <a:solidFill>
-                  <a:srgbClr val="232F3E"/>
-                </a:solidFill>
-                <a:latin typeface="Calibri"/>
-              </a:defRPr>
-            </a:pPr>
-            <a:r>
-              <a:t>spending behavior</a:t>
-            </a:r>
-          </a:p>
-        </p:txBody>
-      </p:sp>
-      <p:sp>
-        <p:nvSpPr>
-          <p:cNvPr id="10" name="TextBox 9"/>
-          <p:cNvSpPr txBox="1"/>
-          <p:nvPr/>
-        </p:nvSpPr>
-        <p:spPr>
-          <a:xfrm>
-            <a:off x="731520" y="5760720"/>
-            <a:ext cx="10515600" cy="457200"/>
-          </a:xfrm>
-          <a:prstGeom prst="rect">
-            <a:avLst/>
-          </a:prstGeom>
-          <a:noFill/>
-        </p:spPr>
-        <p:txBody>
-          <a:bodyPr wrap="square">
-            <a:spAutoFit/>
-          </a:bodyPr>
-          <a:lstStyle/>
-          <a:p>
-            <a:pPr algn="l">
-              <a:defRPr sz="1600" b="0">
-                <a:solidFill>
-                  <a:srgbClr val="7F8C8D"/>
-                </a:solidFill>
-                <a:latin typeface="Calibri"/>
-              </a:defRPr>
-            </a:pPr>
-            <a:r>
-              <a:t>Every decision can be traced back to specific factors — enabling audit trails and dispute resolution.</a:t>
+              <a:t>The model processes transactions in real-time, providing instant fraud risk scores that can be integrated into existing payment processing workflows.</a:t>
             </a:r>
           </a:p>
         </p:txBody>
@@ -10233,4 +9906,319 @@
   </a:objectDefaults>
   <a:extraClrSchemeLst/>
 </a:theme>
+</file>
+
+<file path=ppt/theme/theme2.xml><?xml version="1.0" encoding="utf-8"?>
+<a:theme xmlns:a="http://schemas.openxmlformats.org/drawingml/2006/main" name="Office Theme">
+  <a:themeElements>
+    <a:clrScheme name="Office">
+      <a:dk1>
+        <a:sysClr val="windowText" lastClr="000000"/>
+      </a:dk1>
+      <a:lt1>
+        <a:sysClr val="window" lastClr="FFFFFF"/>
+      </a:lt1>
+      <a:dk2>
+        <a:srgbClr val="0E2841"/>
+      </a:dk2>
+      <a:lt2>
+        <a:srgbClr val="E8E8E8"/>
+      </a:lt2>
+      <a:accent1>
+        <a:srgbClr val="156082"/>
+      </a:accent1>
+      <a:accent2>
+        <a:srgbClr val="E97132"/>
+      </a:accent2>
+      <a:accent3>
+        <a:srgbClr val="196B24"/>
+      </a:accent3>
+      <a:accent4>
+        <a:srgbClr val="0F9ED5"/>
+      </a:accent4>
+      <a:accent5>
+        <a:srgbClr val="A02B93"/>
+      </a:accent5>
+      <a:accent6>
+        <a:srgbClr val="4EA72E"/>
+      </a:accent6>
+      <a:hlink>
+        <a:srgbClr val="467886"/>
+      </a:hlink>
+      <a:folHlink>
+        <a:srgbClr val="96607D"/>
+      </a:folHlink>
+    </a:clrScheme>
+    <a:fontScheme name="Office">
+      <a:majorFont>
+        <a:latin typeface="Aptos Display" panose="02110004020202020204"/>
+        <a:ea typeface=""/>
+        <a:cs typeface=""/>
+        <a:font script="Jpan" typeface="游ゴシック Light"/>
+        <a:font script="Hang" typeface="맑은 고딕"/>
+        <a:font script="Hans" typeface="等线 Light"/>
+        <a:font script="Hant" typeface="新細明體"/>
+        <a:font script="Arab" typeface="Times New Roman"/>
+        <a:font script="Hebr" typeface="Times New Roman"/>
+        <a:font script="Thai" typeface="Angsana New"/>
+        <a:font script="Ethi" typeface="Nyala"/>
+        <a:font script="Beng" typeface="Vrinda"/>
+        <a:font script="Gujr" typeface="Shruti"/>
+        <a:font script="Khmr" typeface="MoolBoran"/>
+        <a:font script="Knda" typeface="Tunga"/>
+        <a:font script="Guru" typeface="Raavi"/>
+        <a:font script="Cans" typeface="Euphemia"/>
+        <a:font script="Cher" typeface="Plantagenet Cherokee"/>
+        <a:font script="Yiii" typeface="Microsoft Yi Baiti"/>
+        <a:font script="Tibt" typeface="Microsoft Himalaya"/>
+        <a:font script="Thaa" typeface="MV Boli"/>
+        <a:font script="Deva" typeface="Mangal"/>
+        <a:font script="Telu" typeface="Gautami"/>
+        <a:font script="Taml" typeface="Latha"/>
+        <a:font script="Syrc" typeface="Estrangelo Edessa"/>
+        <a:font script="Orya" typeface="Kalinga"/>
+        <a:font script="Mlym" typeface="Kartika"/>
+        <a:font script="Laoo" typeface="DokChampa"/>
+        <a:font script="Sinh" typeface="Iskoola Pota"/>
+        <a:font script="Mong" typeface="Mongolian Baiti"/>
+        <a:font script="Viet" typeface="Times New Roman"/>
+        <a:font script="Uigh" typeface="Microsoft Uighur"/>
+        <a:font script="Geor" typeface="Sylfaen"/>
+        <a:font script="Armn" typeface="Arial"/>
+        <a:font script="Bugi" typeface="Leelawadee UI"/>
+        <a:font script="Bopo" typeface="Microsoft JhengHei"/>
+        <a:font script="Java" typeface="Javanese Text"/>
+        <a:font script="Lisu" typeface="Segoe UI"/>
+        <a:font script="Mymr" typeface="Myanmar Text"/>
+        <a:font script="Nkoo" typeface="Ebrima"/>
+        <a:font script="Olck" typeface="Nirmala UI"/>
+        <a:font script="Osma" typeface="Ebrima"/>
+        <a:font script="Phag" typeface="Phagspa"/>
+        <a:font script="Syrn" typeface="Estrangelo Edessa"/>
+        <a:font script="Syrj" typeface="Estrangelo Edessa"/>
+        <a:font script="Syre" typeface="Estrangelo Edessa"/>
+        <a:font script="Sora" typeface="Nirmala UI"/>
+        <a:font script="Tale" typeface="Microsoft Tai Le"/>
+        <a:font script="Talu" typeface="Microsoft New Tai Lue"/>
+        <a:font script="Tfng" typeface="Ebrima"/>
+      </a:majorFont>
+      <a:minorFont>
+        <a:latin typeface="Aptos" panose="02110004020202020204"/>
+        <a:ea typeface=""/>
+        <a:cs typeface=""/>
+        <a:font script="Jpan" typeface="游ゴシック"/>
+        <a:font script="Hang" typeface="맑은 고딕"/>
+        <a:font script="Hans" typeface="等线"/>
+        <a:font script="Hant" typeface="新細明體"/>
+        <a:font script="Arab" typeface="Arial"/>
+        <a:font script="Hebr" typeface="Arial"/>
+        <a:font script="Thai" typeface="Cordia New"/>
+        <a:font script="Ethi" typeface="Nyala"/>
+        <a:font script="Beng" typeface="Vrinda"/>
+        <a:font script="Gujr" typeface="Shruti"/>
+        <a:font script="Khmr" typeface="DaunPenh"/>
+        <a:font script="Knda" typeface="Tunga"/>
+        <a:font script="Guru" typeface="Raavi"/>
+        <a:font script="Cans" typeface="Euphemia"/>
+        <a:font script="Cher" typeface="Plantagenet Cherokee"/>
+        <a:font script="Yiii" typeface="Microsoft Yi Baiti"/>
+        <a:font script="Tibt" typeface="Microsoft Himalaya"/>
+        <a:font script="Thaa" typeface="MV Boli"/>
+        <a:font script="Deva" typeface="Mangal"/>
+        <a:font script="Telu" typeface="Gautami"/>
+        <a:font script="Taml" typeface="Latha"/>
+        <a:font script="Syrc" typeface="Estrangelo Edessa"/>
+        <a:font script="Orya" typeface="Kalinga"/>
+        <a:font script="Mlym" typeface="Kartika"/>
+        <a:font script="Laoo" typeface="DokChampa"/>
+        <a:font script="Sinh" typeface="Iskoola Pota"/>
+        <a:font script="Mong" typeface="Mongolian Baiti"/>
+        <a:font script="Viet" typeface="Arial"/>
+        <a:font script="Uigh" typeface="Microsoft Uighur"/>
+        <a:font script="Geor" typeface="Sylfaen"/>
+        <a:font script="Armn" typeface="Arial"/>
+        <a:font script="Bugi" typeface="Leelawadee UI"/>
+        <a:font script="Bopo" typeface="Microsoft JhengHei"/>
+        <a:font script="Java" typeface="Javanese Text"/>
+        <a:font script="Lisu" typeface="Segoe UI"/>
+        <a:font script="Mymr" typeface="Myanmar Text"/>
+        <a:font script="Nkoo" typeface="Ebrima"/>
+        <a:font script="Olck" typeface="Nirmala UI"/>
+        <a:font script="Osma" typeface="Ebrima"/>
+        <a:font script="Phag" typeface="Phagspa"/>
+        <a:font script="Syrn" typeface="Estrangelo Edessa"/>
+        <a:font script="Syrj" typeface="Estrangelo Edessa"/>
+        <a:font script="Syre" typeface="Estrangelo Edessa"/>
+        <a:font script="Sora" typeface="Nirmala UI"/>
+        <a:font script="Tale" typeface="Microsoft Tai Le"/>
+        <a:font script="Talu" typeface="Microsoft New Tai Lue"/>
+        <a:font script="Tfng" typeface="Ebrima"/>
+      </a:minorFont>
+    </a:fontScheme>
+    <a:fmtScheme name="Office">
+      <a:fillStyleLst>
+        <a:solidFill>
+          <a:schemeClr val="phClr"/>
+        </a:solidFill>
+        <a:gradFill rotWithShape="1">
+          <a:gsLst>
+            <a:gs pos="0">
+              <a:schemeClr val="phClr">
+                <a:lumMod val="110000"/>
+                <a:satMod val="105000"/>
+                <a:tint val="67000"/>
+              </a:schemeClr>
+            </a:gs>
+            <a:gs pos="50000">
+              <a:schemeClr val="phClr">
+                <a:lumMod val="105000"/>
+                <a:satMod val="103000"/>
+                <a:tint val="73000"/>
+              </a:schemeClr>
+            </a:gs>
+            <a:gs pos="100000">
+              <a:schemeClr val="phClr">
+                <a:lumMod val="105000"/>
+                <a:satMod val="109000"/>
+                <a:tint val="81000"/>
+              </a:schemeClr>
+            </a:gs>
+          </a:gsLst>
+          <a:lin ang="5400000" scaled="0"/>
+        </a:gradFill>
+        <a:gradFill rotWithShape="1">
+          <a:gsLst>
+            <a:gs pos="0">
+              <a:schemeClr val="phClr">
+                <a:satMod val="103000"/>
+                <a:lumMod val="102000"/>
+                <a:tint val="94000"/>
+              </a:schemeClr>
+            </a:gs>
+            <a:gs pos="50000">
+              <a:schemeClr val="phClr">
+                <a:satMod val="110000"/>
+                <a:lumMod val="100000"/>
+                <a:shade val="100000"/>
+              </a:schemeClr>
+            </a:gs>
+            <a:gs pos="100000">
+              <a:schemeClr val="phClr">
+                <a:lumMod val="99000"/>
+                <a:satMod val="120000"/>
+                <a:shade val="78000"/>
+              </a:schemeClr>
+            </a:gs>
+          </a:gsLst>
+          <a:lin ang="5400000" scaled="0"/>
+        </a:gradFill>
+      </a:fillStyleLst>
+      <a:lnStyleLst>
+        <a:ln w="12700" cap="flat" cmpd="sng" algn="ctr">
+          <a:solidFill>
+            <a:schemeClr val="phClr"/>
+          </a:solidFill>
+          <a:prstDash val="solid"/>
+          <a:miter lim="800000"/>
+        </a:ln>
+        <a:ln w="19050" cap="flat" cmpd="sng" algn="ctr">
+          <a:solidFill>
+            <a:schemeClr val="phClr"/>
+          </a:solidFill>
+          <a:prstDash val="solid"/>
+          <a:miter lim="800000"/>
+        </a:ln>
+        <a:ln w="25400" cap="flat" cmpd="sng" algn="ctr">
+          <a:solidFill>
+            <a:schemeClr val="phClr"/>
+          </a:solidFill>
+          <a:prstDash val="solid"/>
+          <a:miter lim="800000"/>
+        </a:ln>
+      </a:lnStyleLst>
+      <a:effectStyleLst>
+        <a:effectStyle>
+          <a:effectLst/>
+        </a:effectStyle>
+        <a:effectStyle>
+          <a:effectLst/>
+        </a:effectStyle>
+        <a:effectStyle>
+          <a:effectLst>
+            <a:outerShdw blurRad="57150" dist="19050" dir="5400000" algn="ctr" rotWithShape="0">
+              <a:srgbClr val="000000">
+                <a:alpha val="63000"/>
+              </a:srgbClr>
+            </a:outerShdw>
+          </a:effectLst>
+        </a:effectStyle>
+      </a:effectStyleLst>
+      <a:bgFillStyleLst>
+        <a:solidFill>
+          <a:schemeClr val="phClr"/>
+        </a:solidFill>
+        <a:solidFill>
+          <a:schemeClr val="phClr">
+            <a:tint val="95000"/>
+            <a:satMod val="170000"/>
+          </a:schemeClr>
+        </a:solidFill>
+        <a:gradFill rotWithShape="1">
+          <a:gsLst>
+            <a:gs pos="0">
+              <a:schemeClr val="phClr">
+                <a:tint val="93000"/>
+                <a:satMod val="150000"/>
+                <a:shade val="98000"/>
+                <a:lumMod val="102000"/>
+              </a:schemeClr>
+            </a:gs>
+            <a:gs pos="50000">
+              <a:schemeClr val="phClr">
+                <a:tint val="98000"/>
+                <a:satMod val="130000"/>
+                <a:shade val="90000"/>
+                <a:lumMod val="103000"/>
+              </a:schemeClr>
+            </a:gs>
+            <a:gs pos="100000">
+              <a:schemeClr val="phClr">
+                <a:shade val="63000"/>
+                <a:satMod val="120000"/>
+              </a:schemeClr>
+            </a:gs>
+          </a:gsLst>
+          <a:lin ang="5400000" scaled="0"/>
+        </a:gradFill>
+      </a:bgFillStyleLst>
+    </a:fmtScheme>
+  </a:themeElements>
+  <a:objectDefaults>
+    <a:lnDef>
+      <a:spPr/>
+      <a:bodyPr/>
+      <a:lstStyle/>
+      <a:style>
+        <a:lnRef idx="2">
+          <a:schemeClr val="accent1"/>
+        </a:lnRef>
+        <a:fillRef idx="0">
+          <a:schemeClr val="accent1"/>
+        </a:fillRef>
+        <a:effectRef idx="1">
+          <a:schemeClr val="accent1"/>
+        </a:effectRef>
+        <a:fontRef idx="minor">
+          <a:schemeClr val="tx1"/>
+        </a:fontRef>
+      </a:style>
+    </a:lnDef>
+  </a:objectDefaults>
+  <a:extraClrSchemeLst/>
+  <a:extLst>
+    <a:ext uri="{05A4C25C-085E-4340-85A3-A5531E510DB2}">
+      <thm15:themeFamily xmlns:thm15="http://schemas.microsoft.com/office/thememl/2012/main" name="Office Theme" id="{2E142A2C-CD16-42D6-873A-C26D2A0506FA}" vid="{1BDDFF52-6CD6-40A5-AB3C-68EB2F1E4D0A}"/>
+    </a:ext>
+  </a:extLst>
+</a:theme>
 </file>